--- a/cloudflare-deploy/public/library/admin/admin-kr.pptx
+++ b/cloudflare-deploy/public/library/admin/admin-kr.pptx
@@ -51,6 +51,8 @@
     <p:sldId id="299" r:id="rId50"/>
     <p:sldId id="300" r:id="rId51"/>
     <p:sldId id="301" r:id="rId52"/>
+    <p:sldId id="302" r:id="rId53"/>
+    <p:sldId id="303" r:id="rId54"/>
   </p:sldIdLst>
   <p:sldSz cx="12191695" cy="6858000" type="screen4x3"/>
   <p:notesSz cx="6858000" cy="9144000"/>
@@ -28063,6 +28065,167 @@
           </a:p>
         </p:txBody>
       </p:sp>
+      <p:sp>
+        <p:nvSpPr>
+          <p:cNvPr id="89" name="Rounded Rectangle 88"/>
+          <p:cNvSpPr/>
+          <p:nvPr/>
+        </p:nvSpPr>
+        <p:spPr>
+          <a:xfrm>
+            <a:off x="6141567" y="4224528"/>
+            <a:ext cx="384048" cy="228600"/>
+          </a:xfrm>
+          <a:prstGeom prst="roundRect">
+            <a:avLst/>
+          </a:prstGeom>
+          <a:solidFill>
+            <a:srgbClr val="4F46E5"/>
+          </a:solidFill>
+          <a:ln>
+            <a:noFill/>
+          </a:ln>
+          <a:effectLst/>
+        </p:spPr>
+        <p:style>
+          <a:lnRef idx="1">
+            <a:schemeClr val="accent1"/>
+          </a:lnRef>
+          <a:fillRef idx="3">
+            <a:schemeClr val="accent1"/>
+          </a:fillRef>
+          <a:effectRef idx="2">
+            <a:schemeClr val="accent1"/>
+          </a:effectRef>
+          <a:fontRef idx="minor">
+            <a:schemeClr val="lt1"/>
+          </a:fontRef>
+        </p:style>
+        <p:txBody>
+          <a:bodyPr rtlCol="0" anchor="ctr"/>
+          <a:lstStyle/>
+          <a:p>
+            <a:pPr algn="ctr"/>
+          </a:p>
+        </p:txBody>
+      </p:sp>
+      <p:sp>
+        <p:nvSpPr>
+          <p:cNvPr id="90" name="TextBox 89"/>
+          <p:cNvSpPr txBox="1"/>
+          <p:nvPr/>
+        </p:nvSpPr>
+        <p:spPr>
+          <a:xfrm>
+            <a:off x="6141567" y="4206240"/>
+            <a:ext cx="384048" cy="265176"/>
+          </a:xfrm>
+          <a:prstGeom prst="rect">
+            <a:avLst/>
+          </a:prstGeom>
+          <a:noFill/>
+        </p:spPr>
+        <p:txBody>
+          <a:bodyPr wrap="square" anchor="ctr">
+            <a:spAutoFit/>
+          </a:bodyPr>
+          <a:lstStyle/>
+          <a:p>
+            <a:pPr algn="ctr">
+              <a:lnSpc>
+                <a:spcPct val="100000"/>
+              </a:lnSpc>
+            </a:pPr>
+            <a:r>
+              <a:rPr sz="900" b="1">
+                <a:solidFill>
+                  <a:srgbClr val="FFFFFF"/>
+                </a:solidFill>
+                <a:latin typeface="Malgun Gothic"/>
+              </a:rPr>
+              <a:t>21</a:t>
+            </a:r>
+          </a:p>
+        </p:txBody>
+      </p:sp>
+      <p:sp>
+        <p:nvSpPr>
+          <p:cNvPr id="91" name="TextBox 90"/>
+          <p:cNvSpPr txBox="1"/>
+          <p:nvPr/>
+        </p:nvSpPr>
+        <p:spPr>
+          <a:xfrm>
+            <a:off x="6617055" y="4197096"/>
+            <a:ext cx="4587087" cy="274320"/>
+          </a:xfrm>
+          <a:prstGeom prst="rect">
+            <a:avLst/>
+          </a:prstGeom>
+          <a:noFill/>
+        </p:spPr>
+        <p:txBody>
+          <a:bodyPr wrap="square" anchor="ctr">
+            <a:spAutoFit/>
+          </a:bodyPr>
+          <a:lstStyle/>
+          <a:p>
+            <a:pPr algn="l">
+              <a:lnSpc>
+                <a:spcPct val="100000"/>
+              </a:lnSpc>
+            </a:pPr>
+            <a:r>
+              <a:rPr sz="1050" b="1">
+                <a:solidFill>
+                  <a:srgbClr val="334155"/>
+                </a:solidFill>
+                <a:latin typeface="Malgun Gothic"/>
+              </a:rPr>
+              <a:t>중국어 발음 코치</a:t>
+            </a:r>
+          </a:p>
+        </p:txBody>
+      </p:sp>
+      <p:sp>
+        <p:nvSpPr>
+          <p:cNvPr id="92" name="TextBox 91"/>
+          <p:cNvSpPr txBox="1"/>
+          <p:nvPr/>
+        </p:nvSpPr>
+        <p:spPr>
+          <a:xfrm>
+            <a:off x="11213287" y="4197096"/>
+            <a:ext cx="457200" cy="274320"/>
+          </a:xfrm>
+          <a:prstGeom prst="rect">
+            <a:avLst/>
+          </a:prstGeom>
+          <a:noFill/>
+        </p:spPr>
+        <p:txBody>
+          <a:bodyPr wrap="square" anchor="ctr">
+            <a:spAutoFit/>
+          </a:bodyPr>
+          <a:lstStyle/>
+          <a:p>
+            <a:pPr algn="r">
+              <a:lnSpc>
+                <a:spcPct val="100000"/>
+              </a:lnSpc>
+            </a:pPr>
+            <a:r>
+              <a:rPr sz="1050" b="1">
+                <a:solidFill>
+                  <a:srgbClr val="4F46E5"/>
+                </a:solidFill>
+                <a:latin typeface="Malgun Gothic"/>
+              </a:rPr>
+              <a:t>25</a:t>
+            </a:r>
+          </a:p>
+        </p:txBody>
+      </p:sp>
     </p:spTree>
   </p:cSld>
   <p:clrMapOvr>
@@ -38256,7 +38419,7 @@
                 </a:solidFill>
                 <a:latin typeface="Malgun Gothic"/>
               </a:rPr>
-              <a:t>21</a:t>
+              <a:t>22</a:t>
             </a:r>
           </a:p>
         </p:txBody>
@@ -38295,7 +38458,7 @@
                 </a:solidFill>
                 <a:latin typeface="Malgun Gothic"/>
               </a:rPr>
-              <a:t>중국어 발음 코치</a:t>
+              <a:t>공지 스튜디오 (포스터 + 팝업)</a:t>
             </a:r>
           </a:p>
         </p:txBody>
@@ -38334,7 +38497,7 @@
                 </a:solidFill>
                 <a:latin typeface="Malgun Gothic"/>
               </a:rPr>
-              <a:t>25</a:t>
+              <a:t>26</a:t>
             </a:r>
           </a:p>
         </p:txBody>
@@ -38417,7 +38580,7 @@
                 </a:solidFill>
                 <a:latin typeface="Malgun Gothic"/>
               </a:rPr>
-              <a:t>22</a:t>
+              <a:t>23</a:t>
             </a:r>
           </a:p>
         </p:txBody>
@@ -38456,7 +38619,7 @@
                 </a:solidFill>
                 <a:latin typeface="Malgun Gothic"/>
               </a:rPr>
-              <a:t>공지 스튜디오 (포스터 + 팝업)</a:t>
+              <a:t>AI 운영비서에게 시키기</a:t>
             </a:r>
           </a:p>
         </p:txBody>
@@ -38495,7 +38658,7 @@
                 </a:solidFill>
                 <a:latin typeface="Malgun Gothic"/>
               </a:rPr>
-              <a:t>26</a:t>
+              <a:t>27</a:t>
             </a:r>
           </a:p>
         </p:txBody>
@@ -38578,7 +38741,7 @@
                 </a:solidFill>
                 <a:latin typeface="Malgun Gothic"/>
               </a:rPr>
-              <a:t>23</a:t>
+              <a:t>24</a:t>
             </a:r>
           </a:p>
         </p:txBody>
@@ -38617,7 +38780,7 @@
                 </a:solidFill>
                 <a:latin typeface="Malgun Gothic"/>
               </a:rPr>
-              <a:t>AI 운영비서에게 시키기</a:t>
+              <a:t>학생 음성 일기 모니터</a:t>
             </a:r>
           </a:p>
         </p:txBody>
@@ -38656,7 +38819,7 @@
                 </a:solidFill>
                 <a:latin typeface="Malgun Gothic"/>
               </a:rPr>
-              <a:t>27</a:t>
+              <a:t>28</a:t>
             </a:r>
           </a:p>
         </p:txBody>
@@ -38739,7 +38902,7 @@
                 </a:solidFill>
                 <a:latin typeface="Malgun Gothic"/>
               </a:rPr>
-              <a:t>24</a:t>
+              <a:t>25</a:t>
             </a:r>
           </a:p>
         </p:txBody>
@@ -38778,7 +38941,7 @@
                 </a:solidFill>
                 <a:latin typeface="Malgun Gothic"/>
               </a:rPr>
-              <a:t>학생 음성 일기 모니터</a:t>
+              <a:t>강사 AI 코칭 검수(운영)</a:t>
             </a:r>
           </a:p>
         </p:txBody>
@@ -38817,7 +38980,7 @@
                 </a:solidFill>
                 <a:latin typeface="Malgun Gothic"/>
               </a:rPr>
-              <a:t>28</a:t>
+              <a:t>29</a:t>
             </a:r>
           </a:p>
         </p:txBody>
@@ -38900,7 +39063,7 @@
                 </a:solidFill>
                 <a:latin typeface="Malgun Gothic"/>
               </a:rPr>
-              <a:t>25</a:t>
+              <a:t>26</a:t>
             </a:r>
           </a:p>
         </p:txBody>
@@ -38939,7 +39102,7 @@
                 </a:solidFill>
                 <a:latin typeface="Malgun Gothic"/>
               </a:rPr>
-              <a:t>강사 AI 코칭 검수(운영)</a:t>
+              <a:t>QR 출결 체크</a:t>
             </a:r>
           </a:p>
         </p:txBody>
@@ -38978,7 +39141,7 @@
                 </a:solidFill>
                 <a:latin typeface="Malgun Gothic"/>
               </a:rPr>
-              <a:t>29</a:t>
+              <a:t>30</a:t>
             </a:r>
           </a:p>
         </p:txBody>
@@ -39061,7 +39224,7 @@
                 </a:solidFill>
                 <a:latin typeface="Malgun Gothic"/>
               </a:rPr>
-              <a:t>26</a:t>
+              <a:t>27</a:t>
             </a:r>
           </a:p>
         </p:txBody>
@@ -39100,7 +39263,7 @@
                 </a:solidFill>
                 <a:latin typeface="Malgun Gothic"/>
               </a:rPr>
-              <a:t>QR 출결 체크</a:t>
+              <a:t>상담 예약 관리</a:t>
             </a:r>
           </a:p>
         </p:txBody>
@@ -39139,7 +39302,7 @@
                 </a:solidFill>
                 <a:latin typeface="Malgun Gothic"/>
               </a:rPr>
-              <a:t>30</a:t>
+              <a:t>31</a:t>
             </a:r>
           </a:p>
         </p:txBody>
@@ -39222,7 +39385,7 @@
                 </a:solidFill>
                 <a:latin typeface="Malgun Gothic"/>
               </a:rPr>
-              <a:t>27</a:t>
+              <a:t>28</a:t>
             </a:r>
           </a:p>
         </p:txBody>
@@ -39261,7 +39424,7 @@
                 </a:solidFill>
                 <a:latin typeface="Malgun Gothic"/>
               </a:rPr>
-              <a:t>상담 예약 관리</a:t>
+              <a:t>친구 추천 보상 관리</a:t>
             </a:r>
           </a:p>
         </p:txBody>
@@ -39300,7 +39463,7 @@
                 </a:solidFill>
                 <a:latin typeface="Malgun Gothic"/>
               </a:rPr>
-              <a:t>31</a:t>
+              <a:t>32</a:t>
             </a:r>
           </a:p>
         </p:txBody>
@@ -39383,7 +39546,7 @@
                 </a:solidFill>
                 <a:latin typeface="Malgun Gothic"/>
               </a:rPr>
-              <a:t>28</a:t>
+              <a:t>29</a:t>
             </a:r>
           </a:p>
         </p:txBody>
@@ -39422,7 +39585,7 @@
                 </a:solidFill>
                 <a:latin typeface="Malgun Gothic"/>
               </a:rPr>
-              <a:t>친구 추천 보상 관리</a:t>
+              <a:t>연기·변경 요청 승인 처리</a:t>
             </a:r>
           </a:p>
         </p:txBody>
@@ -39461,7 +39624,7 @@
                 </a:solidFill>
                 <a:latin typeface="Malgun Gothic"/>
               </a:rPr>
-              <a:t>32</a:t>
+              <a:t>33</a:t>
             </a:r>
           </a:p>
         </p:txBody>
@@ -39544,7 +39707,7 @@
                 </a:solidFill>
                 <a:latin typeface="Malgun Gothic"/>
               </a:rPr>
-              <a:t>29</a:t>
+              <a:t>30</a:t>
             </a:r>
           </a:p>
         </p:txBody>
@@ -39583,7 +39746,7 @@
                 </a:solidFill>
                 <a:latin typeface="Malgun Gothic"/>
               </a:rPr>
-              <a:t>연기·변경 요청 승인 처리</a:t>
+              <a:t>자료실 카카오톡 링크 공유</a:t>
             </a:r>
           </a:p>
         </p:txBody>
@@ -39622,7 +39785,7 @@
                 </a:solidFill>
                 <a:latin typeface="Malgun Gothic"/>
               </a:rPr>
-              <a:t>33</a:t>
+              <a:t>34</a:t>
             </a:r>
           </a:p>
         </p:txBody>
@@ -39705,7 +39868,7 @@
                 </a:solidFill>
                 <a:latin typeface="Malgun Gothic"/>
               </a:rPr>
-              <a:t>30</a:t>
+              <a:t>31</a:t>
             </a:r>
           </a:p>
         </p:txBody>
@@ -39744,7 +39907,7 @@
                 </a:solidFill>
                 <a:latin typeface="Malgun Gothic"/>
               </a:rPr>
-              <a:t>자료실 카카오톡 링크 공유</a:t>
+              <a:t>수강 등록 · 결제 → 수업 자동 생성</a:t>
             </a:r>
           </a:p>
         </p:txBody>
@@ -39783,7 +39946,7 @@
                 </a:solidFill>
                 <a:latin typeface="Malgun Gothic"/>
               </a:rPr>
-              <a:t>34</a:t>
+              <a:t>35</a:t>
             </a:r>
           </a:p>
         </p:txBody>
@@ -39866,7 +40029,7 @@
                 </a:solidFill>
                 <a:latin typeface="Malgun Gothic"/>
               </a:rPr>
-              <a:t>31</a:t>
+              <a:t>32</a:t>
             </a:r>
           </a:p>
         </p:txBody>
@@ -39905,7 +40068,7 @@
                 </a:solidFill>
                 <a:latin typeface="Malgun Gothic"/>
               </a:rPr>
-              <a:t>수강 등록 · 결제 → 수업 자동 생성</a:t>
+              <a:t>수업 관찰 (라이브 참관)</a:t>
             </a:r>
           </a:p>
         </p:txBody>
@@ -39944,7 +40107,7 @@
                 </a:solidFill>
                 <a:latin typeface="Malgun Gothic"/>
               </a:rPr>
-              <a:t>35</a:t>
+              <a:t>36</a:t>
             </a:r>
           </a:p>
         </p:txBody>
@@ -40027,7 +40190,7 @@
                 </a:solidFill>
                 <a:latin typeface="Malgun Gothic"/>
               </a:rPr>
-              <a:t>32</a:t>
+              <a:t>33</a:t>
             </a:r>
           </a:p>
         </p:txBody>
@@ -40066,7 +40229,7 @@
                 </a:solidFill>
                 <a:latin typeface="Malgun Gothic"/>
               </a:rPr>
-              <a:t>수업 관찰 (라이브 참관)</a:t>
+              <a:t>새로워진 관리자 화면</a:t>
             </a:r>
           </a:p>
         </p:txBody>
@@ -40105,7 +40268,7 @@
                 </a:solidFill>
                 <a:latin typeface="Malgun Gothic"/>
               </a:rPr>
-              <a:t>36</a:t>
+              <a:t>37</a:t>
             </a:r>
           </a:p>
         </p:txBody>
@@ -40188,7 +40351,7 @@
                 </a:solidFill>
                 <a:latin typeface="Malgun Gothic"/>
               </a:rPr>
-              <a:t>33</a:t>
+              <a:t>34</a:t>
             </a:r>
           </a:p>
         </p:txBody>
@@ -40227,7 +40390,7 @@
                 </a:solidFill>
                 <a:latin typeface="Malgun Gothic"/>
               </a:rPr>
-              <a:t>새로워진 관리자 화면</a:t>
+              <a:t>화면 언어가 자동으로 맞춰져요</a:t>
             </a:r>
           </a:p>
         </p:txBody>
@@ -40266,7 +40429,7 @@
                 </a:solidFill>
                 <a:latin typeface="Malgun Gothic"/>
               </a:rPr>
-              <a:t>37</a:t>
+              <a:t>38</a:t>
             </a:r>
           </a:p>
         </p:txBody>
@@ -40349,7 +40512,7 @@
                 </a:solidFill>
                 <a:latin typeface="Malgun Gothic"/>
               </a:rPr>
-              <a:t>34</a:t>
+              <a:t>35</a:t>
             </a:r>
           </a:p>
         </p:txBody>
@@ -40388,7 +40551,7 @@
                 </a:solidFill>
                 <a:latin typeface="Malgun Gothic"/>
               </a:rPr>
-              <a:t>화면 언어가 자동으로 맞춰져요</a:t>
+              <a:t>판단력 훈련 운영 (학생 판단력 지수)</a:t>
             </a:r>
           </a:p>
         </p:txBody>
@@ -40427,7 +40590,7 @@
                 </a:solidFill>
                 <a:latin typeface="Malgun Gothic"/>
               </a:rPr>
-              <a:t>38</a:t>
+              <a:t>39</a:t>
             </a:r>
           </a:p>
         </p:txBody>
@@ -40510,7 +40673,7 @@
                 </a:solidFill>
                 <a:latin typeface="Malgun Gothic"/>
               </a:rPr>
-              <a:t>35</a:t>
+              <a:t>36</a:t>
             </a:r>
           </a:p>
         </p:txBody>
@@ -40549,7 +40712,7 @@
                 </a:solidFill>
                 <a:latin typeface="Malgun Gothic"/>
               </a:rPr>
-              <a:t>판단력 훈련 운영 (학생 판단력 지수)</a:t>
+              <a:t>강사 계정 관리 (비밀번호 재설정 · 접근 제한)</a:t>
             </a:r>
           </a:p>
         </p:txBody>
@@ -40588,7 +40751,7 @@
                 </a:solidFill>
                 <a:latin typeface="Malgun Gothic"/>
               </a:rPr>
-              <a:t>39</a:t>
+              <a:t>40</a:t>
             </a:r>
           </a:p>
         </p:txBody>
@@ -40671,7 +40834,7 @@
                 </a:solidFill>
                 <a:latin typeface="Malgun Gothic"/>
               </a:rPr>
-              <a:t>36</a:t>
+              <a:t>37</a:t>
             </a:r>
           </a:p>
         </p:txBody>
@@ -40710,7 +40873,7 @@
                 </a:solidFill>
                 <a:latin typeface="Malgun Gothic"/>
               </a:rPr>
-              <a:t>강사 계정 관리 (비밀번호 재설정 · 접근 제한)</a:t>
+              <a:t>강사 통합 관리 개편 (명부 필터 · 그룹 · 상세 탭)</a:t>
             </a:r>
           </a:p>
         </p:txBody>
@@ -40749,7 +40912,7 @@
                 </a:solidFill>
                 <a:latin typeface="Malgun Gothic"/>
               </a:rPr>
-              <a:t>40</a:t>
+              <a:t>41</a:t>
             </a:r>
           </a:p>
         </p:txBody>
@@ -40832,7 +40995,7 @@
                 </a:solidFill>
                 <a:latin typeface="Malgun Gothic"/>
               </a:rPr>
-              <a:t>37</a:t>
+              <a:t>38</a:t>
             </a:r>
           </a:p>
         </p:txBody>
@@ -40871,7 +41034,7 @@
                 </a:solidFill>
                 <a:latin typeface="Malgun Gothic"/>
               </a:rPr>
-              <a:t>기능 요약 · 데이터</a:t>
+              <a:t>학부모 월간 성적표 (오각형) 발송</a:t>
             </a:r>
           </a:p>
         </p:txBody>
@@ -40910,7 +41073,7 @@
                 </a:solidFill>
                 <a:latin typeface="Malgun Gothic"/>
               </a:rPr>
-              <a:t>41</a:t>
+              <a:t>42</a:t>
             </a:r>
           </a:p>
         </p:txBody>
@@ -40993,7 +41156,7 @@
                 </a:solidFill>
                 <a:latin typeface="Malgun Gothic"/>
               </a:rPr>
-              <a:t>38</a:t>
+              <a:t>39</a:t>
             </a:r>
           </a:p>
         </p:txBody>
@@ -41032,7 +41195,7 @@
                 </a:solidFill>
                 <a:latin typeface="Malgun Gothic"/>
               </a:rPr>
-              <a:t>한눈에 보는 데이터</a:t>
+              <a:t>기능 요약 · 데이터</a:t>
             </a:r>
           </a:p>
         </p:txBody>
@@ -41071,7 +41234,7 @@
                 </a:solidFill>
                 <a:latin typeface="Malgun Gothic"/>
               </a:rPr>
-              <a:t>42</a:t>
+              <a:t>43</a:t>
             </a:r>
           </a:p>
         </p:txBody>
@@ -41154,7 +41317,7 @@
                 </a:solidFill>
                 <a:latin typeface="Malgun Gothic"/>
               </a:rPr>
-              <a:t>39</a:t>
+              <a:t>40</a:t>
             </a:r>
           </a:p>
         </p:txBody>
@@ -41193,7 +41356,7 @@
                 </a:solidFill>
                 <a:latin typeface="Malgun Gothic"/>
               </a:rPr>
-              <a:t>자주 묻는 질문 (FAQ)</a:t>
+              <a:t>한눈에 보는 데이터</a:t>
             </a:r>
           </a:p>
         </p:txBody>
@@ -41232,7 +41395,7 @@
                 </a:solidFill>
                 <a:latin typeface="Malgun Gothic"/>
               </a:rPr>
-              <a:t>43</a:t>
+              <a:t>44</a:t>
             </a:r>
           </a:p>
         </p:txBody>
@@ -41315,7 +41478,7 @@
                 </a:solidFill>
                 <a:latin typeface="Malgun Gothic"/>
               </a:rPr>
-              <a:t>40</a:t>
+              <a:t>41</a:t>
             </a:r>
           </a:p>
         </p:txBody>
@@ -41354,7 +41517,7 @@
                 </a:solidFill>
                 <a:latin typeface="Malgun Gothic"/>
               </a:rPr>
-              <a:t>체크리스트</a:t>
+              <a:t>자주 묻는 질문 (FAQ)</a:t>
             </a:r>
           </a:p>
         </p:txBody>
@@ -41393,7 +41556,7 @@
                 </a:solidFill>
                 <a:latin typeface="Malgun Gothic"/>
               </a:rPr>
-              <a:t>44</a:t>
+              <a:t>45</a:t>
             </a:r>
           </a:p>
         </p:txBody>
@@ -41476,7 +41639,7 @@
                 </a:solidFill>
                 <a:latin typeface="Malgun Gothic"/>
               </a:rPr>
-              <a:t>41</a:t>
+              <a:t>42</a:t>
             </a:r>
           </a:p>
         </p:txBody>
@@ -41515,7 +41678,7 @@
                 </a:solidFill>
                 <a:latin typeface="Malgun Gothic"/>
               </a:rPr>
-              <a:t>마무리</a:t>
+              <a:t>체크리스트</a:t>
             </a:r>
           </a:p>
         </p:txBody>
@@ -41554,7 +41717,168 @@
                 </a:solidFill>
                 <a:latin typeface="Malgun Gothic"/>
               </a:rPr>
-              <a:t>45</a:t>
+              <a:t>46</a:t>
+            </a:r>
+          </a:p>
+        </p:txBody>
+      </p:sp>
+      <p:sp>
+        <p:nvSpPr>
+          <p:cNvPr id="91" name="Rounded Rectangle 90"/>
+          <p:cNvSpPr/>
+          <p:nvPr/>
+        </p:nvSpPr>
+        <p:spPr>
+          <a:xfrm>
+            <a:off x="6141567" y="4224528"/>
+            <a:ext cx="384048" cy="228600"/>
+          </a:xfrm>
+          <a:prstGeom prst="roundRect">
+            <a:avLst/>
+          </a:prstGeom>
+          <a:solidFill>
+            <a:srgbClr val="4F46E5"/>
+          </a:solidFill>
+          <a:ln>
+            <a:noFill/>
+          </a:ln>
+          <a:effectLst/>
+        </p:spPr>
+        <p:style>
+          <a:lnRef idx="1">
+            <a:schemeClr val="accent1"/>
+          </a:lnRef>
+          <a:fillRef idx="3">
+            <a:schemeClr val="accent1"/>
+          </a:fillRef>
+          <a:effectRef idx="2">
+            <a:schemeClr val="accent1"/>
+          </a:effectRef>
+          <a:fontRef idx="minor">
+            <a:schemeClr val="lt1"/>
+          </a:fontRef>
+        </p:style>
+        <p:txBody>
+          <a:bodyPr rtlCol="0" anchor="ctr"/>
+          <a:lstStyle/>
+          <a:p>
+            <a:pPr algn="ctr"/>
+          </a:p>
+        </p:txBody>
+      </p:sp>
+      <p:sp>
+        <p:nvSpPr>
+          <p:cNvPr id="92" name="TextBox 91"/>
+          <p:cNvSpPr txBox="1"/>
+          <p:nvPr/>
+        </p:nvSpPr>
+        <p:spPr>
+          <a:xfrm>
+            <a:off x="6141567" y="4206240"/>
+            <a:ext cx="384048" cy="265176"/>
+          </a:xfrm>
+          <a:prstGeom prst="rect">
+            <a:avLst/>
+          </a:prstGeom>
+          <a:noFill/>
+        </p:spPr>
+        <p:txBody>
+          <a:bodyPr wrap="square" anchor="ctr">
+            <a:spAutoFit/>
+          </a:bodyPr>
+          <a:lstStyle/>
+          <a:p>
+            <a:pPr algn="ctr">
+              <a:lnSpc>
+                <a:spcPct val="100000"/>
+              </a:lnSpc>
+            </a:pPr>
+            <a:r>
+              <a:rPr sz="900" b="1">
+                <a:solidFill>
+                  <a:srgbClr val="FFFFFF"/>
+                </a:solidFill>
+                <a:latin typeface="Malgun Gothic"/>
+              </a:rPr>
+              <a:t>43</a:t>
+            </a:r>
+          </a:p>
+        </p:txBody>
+      </p:sp>
+      <p:sp>
+        <p:nvSpPr>
+          <p:cNvPr id="93" name="TextBox 92"/>
+          <p:cNvSpPr txBox="1"/>
+          <p:nvPr/>
+        </p:nvSpPr>
+        <p:spPr>
+          <a:xfrm>
+            <a:off x="6617055" y="4197096"/>
+            <a:ext cx="4587087" cy="274320"/>
+          </a:xfrm>
+          <a:prstGeom prst="rect">
+            <a:avLst/>
+          </a:prstGeom>
+          <a:noFill/>
+        </p:spPr>
+        <p:txBody>
+          <a:bodyPr wrap="square" anchor="ctr">
+            <a:spAutoFit/>
+          </a:bodyPr>
+          <a:lstStyle/>
+          <a:p>
+            <a:pPr algn="l">
+              <a:lnSpc>
+                <a:spcPct val="100000"/>
+              </a:lnSpc>
+            </a:pPr>
+            <a:r>
+              <a:rPr sz="1050" b="1">
+                <a:solidFill>
+                  <a:srgbClr val="334155"/>
+                </a:solidFill>
+                <a:latin typeface="Malgun Gothic"/>
+              </a:rPr>
+              <a:t>마무리</a:t>
+            </a:r>
+          </a:p>
+        </p:txBody>
+      </p:sp>
+      <p:sp>
+        <p:nvSpPr>
+          <p:cNvPr id="94" name="TextBox 93"/>
+          <p:cNvSpPr txBox="1"/>
+          <p:nvPr/>
+        </p:nvSpPr>
+        <p:spPr>
+          <a:xfrm>
+            <a:off x="11213287" y="4197096"/>
+            <a:ext cx="457200" cy="274320"/>
+          </a:xfrm>
+          <a:prstGeom prst="rect">
+            <a:avLst/>
+          </a:prstGeom>
+          <a:noFill/>
+        </p:spPr>
+        <p:txBody>
+          <a:bodyPr wrap="square" anchor="ctr">
+            <a:spAutoFit/>
+          </a:bodyPr>
+          <a:lstStyle/>
+          <a:p>
+            <a:pPr algn="r">
+              <a:lnSpc>
+                <a:spcPct val="100000"/>
+              </a:lnSpc>
+            </a:pPr>
+            <a:r>
+              <a:rPr sz="1050" b="1">
+                <a:solidFill>
+                  <a:srgbClr val="4F46E5"/>
+                </a:solidFill>
+                <a:latin typeface="Malgun Gothic"/>
+              </a:rPr>
+              <a:t>47</a:t>
             </a:r>
           </a:p>
         </p:txBody>
@@ -42788,7 +43112,7 @@
                 </a:solidFill>
                 <a:latin typeface="Malgun Gothic"/>
               </a:rPr>
-              <a:t>기능 요약 · 데이터</a:t>
+              <a:t>주요 기능 사용법</a:t>
             </a:r>
           </a:p>
         </p:txBody>
@@ -42801,8 +43125,8 @@
         </p:nvSpPr>
         <p:spPr>
           <a:xfrm>
-            <a:off x="365760" y="841248"/>
-            <a:ext cx="658368" cy="512064"/>
+            <a:off x="365760" y="822960"/>
+            <a:ext cx="868680" cy="868680"/>
           </a:xfrm>
           <a:prstGeom prst="roundRect">
             <a:avLst/>
@@ -42845,9 +43169,2149 @@
         </p:nvSpPr>
         <p:spPr>
           <a:xfrm>
+            <a:off x="365760" y="822960"/>
+            <a:ext cx="868680" cy="868680"/>
+          </a:xfrm>
+          <a:prstGeom prst="rect">
+            <a:avLst/>
+          </a:prstGeom>
+          <a:noFill/>
+        </p:spPr>
+        <p:txBody>
+          <a:bodyPr wrap="square" anchor="ctr">
+            <a:spAutoFit/>
+          </a:bodyPr>
+          <a:lstStyle/>
+          <a:p>
+            <a:pPr algn="ctr">
+              <a:lnSpc>
+                <a:spcPct val="100000"/>
+              </a:lnSpc>
+            </a:pPr>
+            <a:r>
+              <a:rPr sz="2600" b="1">
+                <a:solidFill>
+                  <a:srgbClr val="FFFFFF"/>
+                </a:solidFill>
+                <a:latin typeface="Malgun Gothic"/>
+              </a:rPr>
+              <a:t>37</a:t>
+            </a:r>
+          </a:p>
+        </p:txBody>
+      </p:sp>
+      <p:sp>
+        <p:nvSpPr>
+          <p:cNvPr id="8" name="TextBox 7"/>
+          <p:cNvSpPr txBox="1"/>
+          <p:nvPr/>
+        </p:nvSpPr>
+        <p:spPr>
+          <a:xfrm>
+            <a:off x="1371600" y="822960"/>
+            <a:ext cx="10424160" cy="502920"/>
+          </a:xfrm>
+          <a:prstGeom prst="rect">
+            <a:avLst/>
+          </a:prstGeom>
+          <a:noFill/>
+        </p:spPr>
+        <p:txBody>
+          <a:bodyPr wrap="square" anchor="t">
+            <a:spAutoFit/>
+          </a:bodyPr>
+          <a:lstStyle/>
+          <a:p>
+            <a:pPr algn="l">
+              <a:lnSpc>
+                <a:spcPct val="100000"/>
+              </a:lnSpc>
+            </a:pPr>
+            <a:r>
+              <a:rPr sz="2300" b="1">
+                <a:solidFill>
+                  <a:srgbClr val="1E2340"/>
+                </a:solidFill>
+                <a:latin typeface="Malgun Gothic"/>
+              </a:rPr>
+              <a:t>🗂️ 강사 통합 관리 개편 (명부 필터 · 그룹 · 상세 탭)</a:t>
+            </a:r>
+          </a:p>
+        </p:txBody>
+      </p:sp>
+      <p:sp>
+        <p:nvSpPr>
+          <p:cNvPr id="9" name="TextBox 8"/>
+          <p:cNvSpPr txBox="1"/>
+          <p:nvPr/>
+        </p:nvSpPr>
+        <p:spPr>
+          <a:xfrm>
+            <a:off x="1417320" y="1353312"/>
+            <a:ext cx="10424160" cy="320040"/>
+          </a:xfrm>
+          <a:prstGeom prst="rect">
+            <a:avLst/>
+          </a:prstGeom>
+          <a:noFill/>
+        </p:spPr>
+        <p:txBody>
+          <a:bodyPr wrap="square" anchor="t">
+            <a:spAutoFit/>
+          </a:bodyPr>
+          <a:lstStyle/>
+          <a:p>
+            <a:pPr algn="l">
+              <a:lnSpc>
+                <a:spcPct val="100000"/>
+              </a:lnSpc>
+            </a:pPr>
+            <a:r>
+              <a:rPr sz="1300" b="0">
+                <a:solidFill>
+                  <a:srgbClr val="64748B"/>
+                </a:solidFill>
+                <a:latin typeface="Malgun Gothic"/>
+              </a:rPr>
+              <a:t>찾기 쉬운 명부 · 한눈에 보는 상세</a:t>
+            </a:r>
+          </a:p>
+        </p:txBody>
+      </p:sp>
+      <p:sp>
+        <p:nvSpPr>
+          <p:cNvPr id="10" name="Rounded Rectangle 9"/>
+          <p:cNvSpPr/>
+          <p:nvPr/>
+        </p:nvSpPr>
+        <p:spPr>
+          <a:xfrm>
+            <a:off x="365760" y="1828800"/>
+            <a:ext cx="11430000" cy="777240"/>
+          </a:xfrm>
+          <a:prstGeom prst="roundRect">
+            <a:avLst/>
+          </a:prstGeom>
+          <a:solidFill>
+            <a:srgbClr val="EEF2FF"/>
+          </a:solidFill>
+          <a:ln>
+            <a:noFill/>
+          </a:ln>
+          <a:effectLst/>
+        </p:spPr>
+        <p:style>
+          <a:lnRef idx="1">
+            <a:schemeClr val="accent1"/>
+          </a:lnRef>
+          <a:fillRef idx="3">
+            <a:schemeClr val="accent1"/>
+          </a:fillRef>
+          <a:effectRef idx="2">
+            <a:schemeClr val="accent1"/>
+          </a:effectRef>
+          <a:fontRef idx="minor">
+            <a:schemeClr val="lt1"/>
+          </a:fontRef>
+        </p:style>
+        <p:txBody>
+          <a:bodyPr rtlCol="0" anchor="ctr"/>
+          <a:lstStyle/>
+          <a:p>
+            <a:pPr algn="ctr"/>
+          </a:p>
+        </p:txBody>
+      </p:sp>
+      <p:sp>
+        <p:nvSpPr>
+          <p:cNvPr id="11" name="TextBox 10"/>
+          <p:cNvSpPr txBox="1"/>
+          <p:nvPr/>
+        </p:nvSpPr>
+        <p:spPr>
+          <a:xfrm>
+            <a:off x="548640" y="1901952"/>
+            <a:ext cx="11064240" cy="640080"/>
+          </a:xfrm>
+          <a:prstGeom prst="rect">
+            <a:avLst/>
+          </a:prstGeom>
+          <a:noFill/>
+        </p:spPr>
+        <p:txBody>
+          <a:bodyPr wrap="square" anchor="t">
+            <a:spAutoFit/>
+          </a:bodyPr>
+          <a:lstStyle/>
+          <a:p>
+            <a:pPr algn="l">
+              <a:lnSpc>
+                <a:spcPct val="115000"/>
+              </a:lnSpc>
+            </a:pPr>
+            <a:r>
+              <a:rPr sz="1200" b="0">
+                <a:solidFill>
+                  <a:srgbClr val="334155"/>
+                </a:solidFill>
+                <a:latin typeface="Malgun Gothic"/>
+              </a:rPr>
+              <a:t>강사 관리 화면이 찾기 쉽고 보기 편하게 정리됐어요. 흩어져 있던 메뉴를 네 묶음으로 그룹지어 사이드바에 담았고, 강사 명부 위에는 구분·상태·그룹 드롭다운 필터와 적용된 필터 칩이 생겼어요. 강사를 누르면 프로필·급여·평가 탭으로 나뉜 상세 화면이 열리고, 매니저 배지와 재직 상태(재직·휴직·퇴사) 가 한눈에 표시돼요.</a:t>
+            </a:r>
+          </a:p>
+        </p:txBody>
+      </p:sp>
+      <p:sp>
+        <p:nvSpPr>
+          <p:cNvPr id="12" name="TextBox 11"/>
+          <p:cNvSpPr txBox="1"/>
+          <p:nvPr/>
+        </p:nvSpPr>
+        <p:spPr>
+          <a:xfrm>
+            <a:off x="457200" y="2743200"/>
+            <a:ext cx="5669280" cy="320040"/>
+          </a:xfrm>
+          <a:prstGeom prst="rect">
+            <a:avLst/>
+          </a:prstGeom>
+          <a:noFill/>
+        </p:spPr>
+        <p:txBody>
+          <a:bodyPr wrap="square" anchor="t">
+            <a:spAutoFit/>
+          </a:bodyPr>
+          <a:lstStyle/>
+          <a:p>
+            <a:pPr algn="l">
+              <a:lnSpc>
+                <a:spcPct val="100000"/>
+              </a:lnSpc>
+            </a:pPr>
+            <a:r>
+              <a:rPr sz="1350" b="1">
+                <a:solidFill>
+                  <a:srgbClr val="4F46E5"/>
+                </a:solidFill>
+                <a:latin typeface="Malgun Gothic"/>
+              </a:rPr>
+              <a:t>사용 방법</a:t>
+            </a:r>
+          </a:p>
+        </p:txBody>
+      </p:sp>
+      <p:sp>
+        <p:nvSpPr>
+          <p:cNvPr id="13" name="TextBox 12"/>
+          <p:cNvSpPr txBox="1"/>
+          <p:nvPr/>
+        </p:nvSpPr>
+        <p:spPr>
+          <a:xfrm>
+            <a:off x="457200" y="3108960"/>
+            <a:ext cx="5669280" cy="2377440"/>
+          </a:xfrm>
+          <a:prstGeom prst="rect">
+            <a:avLst/>
+          </a:prstGeom>
+          <a:noFill/>
+        </p:spPr>
+        <p:txBody>
+          <a:bodyPr wrap="square">
+            <a:spAutoFit/>
+          </a:bodyPr>
+          <a:lstStyle/>
+          <a:p>
+            <a:pPr>
+              <a:lnSpc>
+                <a:spcPct val="115000"/>
+              </a:lnSpc>
+              <a:spcAft>
+                <a:spcPts val="600"/>
+              </a:spcAft>
+            </a:pPr>
+            <a:r>
+              <a:rPr sz="1050" b="1">
+                <a:solidFill>
+                  <a:srgbClr val="4F46E5"/>
+                </a:solidFill>
+                <a:latin typeface="Malgun Gothic"/>
+              </a:rPr>
+              <a:t>● </a:t>
+            </a:r>
+            <a:r>
+              <a:rPr sz="1250">
+                <a:solidFill>
+                  <a:srgbClr val="334155"/>
+                </a:solidFill>
+                <a:latin typeface="Malgun Gothic"/>
+              </a:rPr>
+              <a:t>관리자 메뉴 강사 통합을 열어요(메뉴가 네 묶음으로 정리돼 있어요).</a:t>
+            </a:r>
+          </a:p>
+          <a:p>
+            <a:pPr>
+              <a:lnSpc>
+                <a:spcPct val="115000"/>
+              </a:lnSpc>
+              <a:spcAft>
+                <a:spcPts val="600"/>
+              </a:spcAft>
+            </a:pPr>
+            <a:r>
+              <a:rPr sz="1050" b="1">
+                <a:solidFill>
+                  <a:srgbClr val="4F46E5"/>
+                </a:solidFill>
+                <a:latin typeface="Malgun Gothic"/>
+              </a:rPr>
+              <a:t>● </a:t>
+            </a:r>
+            <a:r>
+              <a:rPr sz="1250">
+                <a:solidFill>
+                  <a:srgbClr val="334155"/>
+                </a:solidFill>
+                <a:latin typeface="Malgun Gothic"/>
+              </a:rPr>
+              <a:t>명부 위 상태·그룹 드롭다운으로 원하는 강사만 걸러요.</a:t>
+            </a:r>
+          </a:p>
+          <a:p>
+            <a:pPr>
+              <a:lnSpc>
+                <a:spcPct val="115000"/>
+              </a:lnSpc>
+              <a:spcAft>
+                <a:spcPts val="600"/>
+              </a:spcAft>
+            </a:pPr>
+            <a:r>
+              <a:rPr sz="1050" b="1">
+                <a:solidFill>
+                  <a:srgbClr val="4F46E5"/>
+                </a:solidFill>
+                <a:latin typeface="Malgun Gothic"/>
+              </a:rPr>
+              <a:t>● </a:t>
+            </a:r>
+            <a:r>
+              <a:rPr sz="1250">
+                <a:solidFill>
+                  <a:srgbClr val="334155"/>
+                </a:solidFill>
+                <a:latin typeface="Malgun Gothic"/>
+              </a:rPr>
+              <a:t>적용된 필터는 칩으로 표시되고, 칩을 지우면 해제돼요.</a:t>
+            </a:r>
+          </a:p>
+          <a:p>
+            <a:pPr>
+              <a:lnSpc>
+                <a:spcPct val="115000"/>
+              </a:lnSpc>
+              <a:spcAft>
+                <a:spcPts val="600"/>
+              </a:spcAft>
+            </a:pPr>
+            <a:r>
+              <a:rPr sz="1050" b="1">
+                <a:solidFill>
+                  <a:srgbClr val="4F46E5"/>
+                </a:solidFill>
+                <a:latin typeface="Malgun Gothic"/>
+              </a:rPr>
+              <a:t>● </a:t>
+            </a:r>
+            <a:r>
+              <a:rPr sz="1250">
+                <a:solidFill>
+                  <a:srgbClr val="334155"/>
+                </a:solidFill>
+                <a:latin typeface="Malgun Gothic"/>
+              </a:rPr>
+              <a:t>강사를 누르면 프로필 / 급여 / 평가 탭 상세가 열려요.</a:t>
+            </a:r>
+          </a:p>
+          <a:p>
+            <a:pPr>
+              <a:lnSpc>
+                <a:spcPct val="115000"/>
+              </a:lnSpc>
+              <a:spcAft>
+                <a:spcPts val="600"/>
+              </a:spcAft>
+            </a:pPr>
+            <a:r>
+              <a:rPr sz="1050" b="1">
+                <a:solidFill>
+                  <a:srgbClr val="4F46E5"/>
+                </a:solidFill>
+                <a:latin typeface="Malgun Gothic"/>
+              </a:rPr>
+              <a:t>● </a:t>
+            </a:r>
+            <a:r>
+              <a:rPr sz="1250">
+                <a:solidFill>
+                  <a:srgbClr val="334155"/>
+                </a:solidFill>
+                <a:latin typeface="Malgun Gothic"/>
+              </a:rPr>
+              <a:t>급여·평가 탭의 요약 숫자는 열 때 필요한 만큼만 불러옵니다.</a:t>
+            </a:r>
+          </a:p>
+        </p:txBody>
+      </p:sp>
+      <p:sp>
+        <p:nvSpPr>
+          <p:cNvPr id="14" name="Rounded Rectangle 13"/>
+          <p:cNvSpPr/>
+          <p:nvPr/>
+        </p:nvSpPr>
+        <p:spPr>
+          <a:xfrm>
+            <a:off x="457200" y="5166360"/>
+            <a:ext cx="5669280" cy="1627632"/>
+          </a:xfrm>
+          <a:prstGeom prst="roundRect">
+            <a:avLst/>
+          </a:prstGeom>
+          <a:solidFill>
+            <a:srgbClr val="F4F7FF"/>
+          </a:solidFill>
+          <a:ln w="12700">
+            <a:solidFill>
+              <a:srgbClr val="4F46E5"/>
+            </a:solidFill>
+          </a:ln>
+          <a:effectLst/>
+        </p:spPr>
+        <p:style>
+          <a:lnRef idx="1">
+            <a:schemeClr val="accent1"/>
+          </a:lnRef>
+          <a:fillRef idx="3">
+            <a:schemeClr val="accent1"/>
+          </a:fillRef>
+          <a:effectRef idx="2">
+            <a:schemeClr val="accent1"/>
+          </a:effectRef>
+          <a:fontRef idx="minor">
+            <a:schemeClr val="lt1"/>
+          </a:fontRef>
+        </p:style>
+        <p:txBody>
+          <a:bodyPr rtlCol="0" anchor="ctr"/>
+          <a:lstStyle/>
+          <a:p>
+            <a:pPr algn="ctr"/>
+          </a:p>
+        </p:txBody>
+      </p:sp>
+      <p:sp>
+        <p:nvSpPr>
+          <p:cNvPr id="15" name="TextBox 14"/>
+          <p:cNvSpPr txBox="1"/>
+          <p:nvPr/>
+        </p:nvSpPr>
+        <p:spPr>
+          <a:xfrm>
+            <a:off x="594360" y="5221224"/>
+            <a:ext cx="5394960" cy="274320"/>
+          </a:xfrm>
+          <a:prstGeom prst="rect">
+            <a:avLst/>
+          </a:prstGeom>
+          <a:noFill/>
+        </p:spPr>
+        <p:txBody>
+          <a:bodyPr wrap="square" anchor="t">
+            <a:spAutoFit/>
+          </a:bodyPr>
+          <a:lstStyle/>
+          <a:p>
+            <a:pPr algn="l">
+              <a:lnSpc>
+                <a:spcPct val="100000"/>
+              </a:lnSpc>
+            </a:pPr>
+            <a:r>
+              <a:rPr sz="1150" b="1">
+                <a:solidFill>
+                  <a:srgbClr val="4F46E5"/>
+                </a:solidFill>
+                <a:latin typeface="Malgun Gothic"/>
+              </a:rPr>
+              <a:t>✅ 핵심 포인트</a:t>
+            </a:r>
+          </a:p>
+        </p:txBody>
+      </p:sp>
+      <p:sp>
+        <p:nvSpPr>
+          <p:cNvPr id="16" name="TextBox 15"/>
+          <p:cNvSpPr txBox="1"/>
+          <p:nvPr/>
+        </p:nvSpPr>
+        <p:spPr>
+          <a:xfrm>
+            <a:off x="594360" y="5495544"/>
+            <a:ext cx="5394960" cy="1261872"/>
+          </a:xfrm>
+          <a:prstGeom prst="rect">
+            <a:avLst/>
+          </a:prstGeom>
+          <a:noFill/>
+        </p:spPr>
+        <p:txBody>
+          <a:bodyPr wrap="square">
+            <a:spAutoFit/>
+          </a:bodyPr>
+          <a:lstStyle/>
+          <a:p>
+            <a:pPr>
+              <a:lnSpc>
+                <a:spcPct val="115000"/>
+              </a:lnSpc>
+              <a:spcAft>
+                <a:spcPts val="200"/>
+              </a:spcAft>
+            </a:pPr>
+            <a:r>
+              <a:rPr sz="900" b="1">
+                <a:solidFill>
+                  <a:srgbClr val="4F46E5"/>
+                </a:solidFill>
+                <a:latin typeface="Malgun Gothic"/>
+              </a:rPr>
+              <a:t>● </a:t>
+            </a:r>
+            <a:r>
+              <a:rPr sz="1100">
+                <a:solidFill>
+                  <a:srgbClr val="334155"/>
+                </a:solidFill>
+                <a:latin typeface="Malgun Gothic"/>
+              </a:rPr>
+              <a:t>매니저는 배지로 구분되고, 재직 상태가 재직·휴직·퇴사 3가지로 표시돼요.</a:t>
+            </a:r>
+          </a:p>
+          <a:p>
+            <a:pPr>
+              <a:lnSpc>
+                <a:spcPct val="115000"/>
+              </a:lnSpc>
+              <a:spcAft>
+                <a:spcPts val="200"/>
+              </a:spcAft>
+            </a:pPr>
+            <a:r>
+              <a:rPr sz="900" b="1">
+                <a:solidFill>
+                  <a:srgbClr val="4F46E5"/>
+                </a:solidFill>
+                <a:latin typeface="Malgun Gothic"/>
+              </a:rPr>
+              <a:t>● </a:t>
+            </a:r>
+            <a:r>
+              <a:rPr sz="1100">
+                <a:solidFill>
+                  <a:srgbClr val="334155"/>
+                </a:solidFill>
+                <a:latin typeface="Malgun Gothic"/>
+              </a:rPr>
+              <a:t>이름이 비어도 아이디로 대체 표기돼 빈칸이 없어요.</a:t>
+            </a:r>
+          </a:p>
+          <a:p>
+            <a:pPr>
+              <a:lnSpc>
+                <a:spcPct val="115000"/>
+              </a:lnSpc>
+              <a:spcAft>
+                <a:spcPts val="200"/>
+              </a:spcAft>
+            </a:pPr>
+            <a:r>
+              <a:rPr sz="900" b="1">
+                <a:solidFill>
+                  <a:srgbClr val="4F46E5"/>
+                </a:solidFill>
+                <a:latin typeface="Malgun Gothic"/>
+              </a:rPr>
+              <a:t>● </a:t>
+            </a:r>
+            <a:r>
+              <a:rPr sz="1100">
+                <a:solidFill>
+                  <a:srgbClr val="334155"/>
+                </a:solidFill>
+                <a:latin typeface="Malgun Gothic"/>
+              </a:rPr>
+              <a:t>상세 탭은 기존 API를 재사용해 빠르게 뜨고, 화면은 한/영 병기예요.</a:t>
+            </a:r>
+          </a:p>
+          <a:p>
+            <a:pPr>
+              <a:lnSpc>
+                <a:spcPct val="115000"/>
+              </a:lnSpc>
+              <a:spcAft>
+                <a:spcPts val="200"/>
+              </a:spcAft>
+            </a:pPr>
+            <a:r>
+              <a:rPr sz="900" b="1">
+                <a:solidFill>
+                  <a:srgbClr val="4F46E5"/>
+                </a:solidFill>
+                <a:latin typeface="Malgun Gothic"/>
+              </a:rPr>
+              <a:t>● </a:t>
+            </a:r>
+            <a:r>
+              <a:rPr sz="1100">
+                <a:solidFill>
+                  <a:srgbClr val="334155"/>
+                </a:solidFill>
+                <a:latin typeface="Malgun Gothic"/>
+              </a:rPr>
+              <a:t>중복이던 급여 입구를 정리하고 버그 접수는 별도 시스템으로 옮겼어요.</a:t>
+            </a:r>
+          </a:p>
+        </p:txBody>
+      </p:sp>
+      <p:sp>
+        <p:nvSpPr>
+          <p:cNvPr id="17" name="Rounded Rectangle 16"/>
+          <p:cNvSpPr/>
+          <p:nvPr/>
+        </p:nvSpPr>
+        <p:spPr>
+          <a:xfrm>
+            <a:off x="457200" y="6903720"/>
+            <a:ext cx="5669280" cy="640080"/>
+          </a:xfrm>
+          <a:prstGeom prst="roundRect">
+            <a:avLst/>
+          </a:prstGeom>
+          <a:solidFill>
+            <a:srgbClr val="FFFBEB"/>
+          </a:solidFill>
+          <a:ln w="12700">
+            <a:solidFill>
+              <a:srgbClr val="F59E0B"/>
+            </a:solidFill>
+          </a:ln>
+          <a:effectLst/>
+        </p:spPr>
+        <p:style>
+          <a:lnRef idx="1">
+            <a:schemeClr val="accent1"/>
+          </a:lnRef>
+          <a:fillRef idx="3">
+            <a:schemeClr val="accent1"/>
+          </a:fillRef>
+          <a:effectRef idx="2">
+            <a:schemeClr val="accent1"/>
+          </a:effectRef>
+          <a:fontRef idx="minor">
+            <a:schemeClr val="lt1"/>
+          </a:fontRef>
+        </p:style>
+        <p:txBody>
+          <a:bodyPr rtlCol="0" anchor="ctr"/>
+          <a:lstStyle/>
+          <a:p>
+            <a:pPr algn="ctr"/>
+          </a:p>
+        </p:txBody>
+      </p:sp>
+      <p:sp>
+        <p:nvSpPr>
+          <p:cNvPr id="18" name="TextBox 17"/>
+          <p:cNvSpPr txBox="1"/>
+          <p:nvPr/>
+        </p:nvSpPr>
+        <p:spPr>
+          <a:xfrm>
+            <a:off x="594360" y="6949440"/>
+            <a:ext cx="5394960" cy="548640"/>
+          </a:xfrm>
+          <a:prstGeom prst="rect">
+            <a:avLst/>
+          </a:prstGeom>
+          <a:noFill/>
+        </p:spPr>
+        <p:txBody>
+          <a:bodyPr wrap="square" anchor="t">
+            <a:spAutoFit/>
+          </a:bodyPr>
+          <a:lstStyle/>
+          <a:p>
+            <a:pPr algn="l">
+              <a:lnSpc>
+                <a:spcPct val="105000"/>
+              </a:lnSpc>
+            </a:pPr>
+            <a:r>
+              <a:rPr sz="1050" b="0">
+                <a:solidFill>
+                  <a:srgbClr val="92670A"/>
+                </a:solidFill>
+                <a:latin typeface="Malgun Gothic"/>
+              </a:rPr>
+              <a:t>⚠️ 알아두기 · 필터·상세 정리 작업이에요. 강사 등록·수정·삭제 기능 자체는 그대로예요.</a:t>
+            </a:r>
+          </a:p>
+        </p:txBody>
+      </p:sp>
+      <p:sp>
+        <p:nvSpPr>
+          <p:cNvPr id="19" name="Rounded Rectangle 18"/>
+          <p:cNvSpPr/>
+          <p:nvPr/>
+        </p:nvSpPr>
+        <p:spPr>
+          <a:xfrm>
+            <a:off x="457200" y="7635240"/>
+            <a:ext cx="5669280" cy="658368"/>
+          </a:xfrm>
+          <a:prstGeom prst="roundRect">
+            <a:avLst/>
+          </a:prstGeom>
+          <a:solidFill>
+            <a:srgbClr val="FFF7E6"/>
+          </a:solidFill>
+          <a:ln w="12700">
+            <a:solidFill>
+              <a:srgbClr val="FF9F1C"/>
+            </a:solidFill>
+          </a:ln>
+          <a:effectLst/>
+        </p:spPr>
+        <p:style>
+          <a:lnRef idx="1">
+            <a:schemeClr val="accent1"/>
+          </a:lnRef>
+          <a:fillRef idx="3">
+            <a:schemeClr val="accent1"/>
+          </a:fillRef>
+          <a:effectRef idx="2">
+            <a:schemeClr val="accent1"/>
+          </a:effectRef>
+          <a:fontRef idx="minor">
+            <a:schemeClr val="lt1"/>
+          </a:fontRef>
+        </p:style>
+        <p:txBody>
+          <a:bodyPr rtlCol="0" anchor="ctr"/>
+          <a:lstStyle/>
+          <a:p>
+            <a:pPr algn="ctr"/>
+          </a:p>
+        </p:txBody>
+      </p:sp>
+      <p:sp>
+        <p:nvSpPr>
+          <p:cNvPr id="20" name="TextBox 19"/>
+          <p:cNvSpPr txBox="1"/>
+          <p:nvPr/>
+        </p:nvSpPr>
+        <p:spPr>
+          <a:xfrm>
+            <a:off x="594360" y="7680960"/>
+            <a:ext cx="5394960" cy="566928"/>
+          </a:xfrm>
+          <a:prstGeom prst="rect">
+            <a:avLst/>
+          </a:prstGeom>
+          <a:noFill/>
+        </p:spPr>
+        <p:txBody>
+          <a:bodyPr wrap="square" anchor="t">
+            <a:spAutoFit/>
+          </a:bodyPr>
+          <a:lstStyle/>
+          <a:p>
+            <a:pPr algn="l">
+              <a:lnSpc>
+                <a:spcPct val="105000"/>
+              </a:lnSpc>
+            </a:pPr>
+            <a:r>
+              <a:rPr sz="1050" b="0">
+                <a:solidFill>
+                  <a:srgbClr val="5B4A2A"/>
+                </a:solidFill>
+                <a:latin typeface="Malgun Gothic"/>
+              </a:rPr>
+              <a:t>💡 꿀팁 · 강사가 많을수록 상태·그룹 필터가 큰 힘을 발휘해요. 자주 보는 조건은 필터를 걸어 두고 쓰세요.</a:t>
+            </a:r>
+          </a:p>
+        </p:txBody>
+      </p:sp>
+      <p:sp>
+        <p:nvSpPr>
+          <p:cNvPr id="21" name="Rectangle 20"/>
+          <p:cNvSpPr/>
+          <p:nvPr/>
+        </p:nvSpPr>
+        <p:spPr>
+          <a:xfrm>
+            <a:off x="6300216" y="2345436"/>
+            <a:ext cx="5596128" cy="3538728"/>
+          </a:xfrm>
+          <a:prstGeom prst="rect">
+            <a:avLst/>
+          </a:prstGeom>
+          <a:solidFill>
+            <a:srgbClr val="FFFFFF"/>
+          </a:solidFill>
+          <a:ln w="12700">
+            <a:solidFill>
+              <a:srgbClr val="E2E8F0"/>
+            </a:solidFill>
+          </a:ln>
+          <a:effectLst/>
+        </p:spPr>
+        <p:style>
+          <a:lnRef idx="1">
+            <a:schemeClr val="accent1"/>
+          </a:lnRef>
+          <a:fillRef idx="3">
+            <a:schemeClr val="accent1"/>
+          </a:fillRef>
+          <a:effectRef idx="2">
+            <a:schemeClr val="accent1"/>
+          </a:effectRef>
+          <a:fontRef idx="minor">
+            <a:schemeClr val="lt1"/>
+          </a:fontRef>
+        </p:style>
+        <p:txBody>
+          <a:bodyPr rtlCol="0" anchor="ctr"/>
+          <a:lstStyle/>
+          <a:p>
+            <a:pPr algn="ctr"/>
+          </a:p>
+        </p:txBody>
+      </p:sp>
+      <p:pic>
+        <p:nvPicPr>
+          <p:cNvPr id="22" name="Picture 21" descr="admin_teachers.jpg"/>
+          <p:cNvPicPr>
+            <a:picLocks noChangeAspect="1"/>
+          </p:cNvPicPr>
+          <p:nvPr/>
+        </p:nvPicPr>
+        <p:blipFill>
+          <a:blip r:embed="rId2"/>
+          <a:stretch>
+            <a:fillRect/>
+          </a:stretch>
+        </p:blipFill>
+        <p:spPr>
+          <a:xfrm>
+            <a:off x="6355080" y="2400300"/>
+            <a:ext cx="5486400" cy="3429000"/>
+          </a:xfrm>
+          <a:prstGeom prst="rect">
+            <a:avLst/>
+          </a:prstGeom>
+        </p:spPr>
+      </p:pic>
+    </p:spTree>
+  </p:cSld>
+  <p:clrMapOvr>
+    <a:masterClrMapping/>
+  </p:clrMapOvr>
+</p:sld>
+</file>
+
+<file path=ppt/slides/slide42.xml><?xml version="1.0" encoding="utf-8"?>
+<p:sld xmlns:a="http://schemas.openxmlformats.org/drawingml/2006/main" xmlns:p="http://schemas.openxmlformats.org/presentationml/2006/main" xmlns:r="http://schemas.openxmlformats.org/officeDocument/2006/relationships">
+  <p:cSld>
+    <p:bg>
+      <p:bgPr>
+        <a:solidFill>
+          <a:srgbClr val="FFFFFF"/>
+        </a:solidFill>
+        <a:effectLst/>
+      </p:bgPr>
+    </p:bg>
+    <p:spTree>
+      <p:nvGrpSpPr>
+        <p:cNvPr id="1" name=""/>
+        <p:cNvGrpSpPr/>
+        <p:nvPr/>
+      </p:nvGrpSpPr>
+      <p:grpSpPr/>
+      <p:sp>
+        <p:nvSpPr>
+          <p:cNvPr id="2" name="Rectangle 1"/>
+          <p:cNvSpPr/>
+          <p:nvPr/>
+        </p:nvSpPr>
+        <p:spPr>
+          <a:xfrm>
+            <a:off x="0" y="0"/>
+            <a:ext cx="12191695" cy="566928"/>
+          </a:xfrm>
+          <a:prstGeom prst="rect">
+            <a:avLst/>
+          </a:prstGeom>
+          <a:solidFill>
+            <a:srgbClr val="4F46E5"/>
+          </a:solidFill>
+          <a:ln>
+            <a:noFill/>
+          </a:ln>
+          <a:effectLst/>
+        </p:spPr>
+        <p:style>
+          <a:lnRef idx="1">
+            <a:schemeClr val="accent1"/>
+          </a:lnRef>
+          <a:fillRef idx="3">
+            <a:schemeClr val="accent1"/>
+          </a:fillRef>
+          <a:effectRef idx="2">
+            <a:schemeClr val="accent1"/>
+          </a:effectRef>
+          <a:fontRef idx="minor">
+            <a:schemeClr val="lt1"/>
+          </a:fontRef>
+        </p:style>
+        <p:txBody>
+          <a:bodyPr rtlCol="0" anchor="ctr"/>
+          <a:lstStyle/>
+          <a:p>
+            <a:pPr algn="ctr"/>
+          </a:p>
+        </p:txBody>
+      </p:sp>
+      <p:sp>
+        <p:nvSpPr>
+          <p:cNvPr id="3" name="Rectangle 2"/>
+          <p:cNvSpPr/>
+          <p:nvPr/>
+        </p:nvSpPr>
+        <p:spPr>
+          <a:xfrm>
+            <a:off x="0" y="566928"/>
+            <a:ext cx="12191695" cy="54864"/>
+          </a:xfrm>
+          <a:prstGeom prst="rect">
+            <a:avLst/>
+          </a:prstGeom>
+          <a:solidFill>
+            <a:srgbClr val="FF9F1C"/>
+          </a:solidFill>
+          <a:ln>
+            <a:noFill/>
+          </a:ln>
+          <a:effectLst/>
+        </p:spPr>
+        <p:style>
+          <a:lnRef idx="1">
+            <a:schemeClr val="accent1"/>
+          </a:lnRef>
+          <a:fillRef idx="3">
+            <a:schemeClr val="accent1"/>
+          </a:fillRef>
+          <a:effectRef idx="2">
+            <a:schemeClr val="accent1"/>
+          </a:effectRef>
+          <a:fontRef idx="minor">
+            <a:schemeClr val="lt1"/>
+          </a:fontRef>
+        </p:style>
+        <p:txBody>
+          <a:bodyPr rtlCol="0" anchor="ctr"/>
+          <a:lstStyle/>
+          <a:p>
+            <a:pPr algn="ctr"/>
+          </a:p>
+        </p:txBody>
+      </p:sp>
+      <p:sp>
+        <p:nvSpPr>
+          <p:cNvPr id="4" name="TextBox 3"/>
+          <p:cNvSpPr txBox="1"/>
+          <p:nvPr/>
+        </p:nvSpPr>
+        <p:spPr>
+          <a:xfrm>
+            <a:off x="365760" y="27432"/>
+            <a:ext cx="7315200" cy="502920"/>
+          </a:xfrm>
+          <a:prstGeom prst="rect">
+            <a:avLst/>
+          </a:prstGeom>
+          <a:noFill/>
+        </p:spPr>
+        <p:txBody>
+          <a:bodyPr wrap="square" anchor="ctr">
+            <a:spAutoFit/>
+          </a:bodyPr>
+          <a:lstStyle/>
+          <a:p>
+            <a:pPr algn="l">
+              <a:lnSpc>
+                <a:spcPct val="100000"/>
+              </a:lnSpc>
+            </a:pPr>
+            <a:r>
+              <a:rPr sz="1500" b="1">
+                <a:solidFill>
+                  <a:srgbClr val="FFFFFF"/>
+                </a:solidFill>
+                <a:latin typeface="Malgun Gothic"/>
+              </a:rPr>
+              <a:t>🏫 망고아이 관리자용 사용설명서</a:t>
+            </a:r>
+          </a:p>
+        </p:txBody>
+      </p:sp>
+      <p:sp>
+        <p:nvSpPr>
+          <p:cNvPr id="5" name="TextBox 4"/>
+          <p:cNvSpPr txBox="1"/>
+          <p:nvPr/>
+        </p:nvSpPr>
+        <p:spPr>
+          <a:xfrm>
+            <a:off x="8168335" y="27432"/>
+            <a:ext cx="3657600" cy="502920"/>
+          </a:xfrm>
+          <a:prstGeom prst="rect">
+            <a:avLst/>
+          </a:prstGeom>
+          <a:noFill/>
+        </p:spPr>
+        <p:txBody>
+          <a:bodyPr wrap="square" anchor="ctr">
+            <a:spAutoFit/>
+          </a:bodyPr>
+          <a:lstStyle/>
+          <a:p>
+            <a:pPr algn="r">
+              <a:lnSpc>
+                <a:spcPct val="100000"/>
+              </a:lnSpc>
+            </a:pPr>
+            <a:r>
+              <a:rPr sz="1300" b="1">
+                <a:solidFill>
+                  <a:srgbClr val="F1F5F9"/>
+                </a:solidFill>
+                <a:latin typeface="Malgun Gothic"/>
+              </a:rPr>
+              <a:t>주요 기능 사용법</a:t>
+            </a:r>
+          </a:p>
+        </p:txBody>
+      </p:sp>
+      <p:sp>
+        <p:nvSpPr>
+          <p:cNvPr id="6" name="Rounded Rectangle 5"/>
+          <p:cNvSpPr/>
+          <p:nvPr/>
+        </p:nvSpPr>
+        <p:spPr>
+          <a:xfrm>
+            <a:off x="365760" y="822960"/>
+            <a:ext cx="868680" cy="868680"/>
+          </a:xfrm>
+          <a:prstGeom prst="roundRect">
+            <a:avLst/>
+          </a:prstGeom>
+          <a:solidFill>
+            <a:srgbClr val="4F46E5"/>
+          </a:solidFill>
+          <a:ln>
+            <a:noFill/>
+          </a:ln>
+          <a:effectLst/>
+        </p:spPr>
+        <p:style>
+          <a:lnRef idx="1">
+            <a:schemeClr val="accent1"/>
+          </a:lnRef>
+          <a:fillRef idx="3">
+            <a:schemeClr val="accent1"/>
+          </a:fillRef>
+          <a:effectRef idx="2">
+            <a:schemeClr val="accent1"/>
+          </a:effectRef>
+          <a:fontRef idx="minor">
+            <a:schemeClr val="lt1"/>
+          </a:fontRef>
+        </p:style>
+        <p:txBody>
+          <a:bodyPr rtlCol="0" anchor="ctr"/>
+          <a:lstStyle/>
+          <a:p>
+            <a:pPr algn="ctr"/>
+          </a:p>
+        </p:txBody>
+      </p:sp>
+      <p:sp>
+        <p:nvSpPr>
+          <p:cNvPr id="7" name="TextBox 6"/>
+          <p:cNvSpPr txBox="1"/>
+          <p:nvPr/>
+        </p:nvSpPr>
+        <p:spPr>
+          <a:xfrm>
+            <a:off x="365760" y="822960"/>
+            <a:ext cx="868680" cy="868680"/>
+          </a:xfrm>
+          <a:prstGeom prst="rect">
+            <a:avLst/>
+          </a:prstGeom>
+          <a:noFill/>
+        </p:spPr>
+        <p:txBody>
+          <a:bodyPr wrap="square" anchor="ctr">
+            <a:spAutoFit/>
+          </a:bodyPr>
+          <a:lstStyle/>
+          <a:p>
+            <a:pPr algn="ctr">
+              <a:lnSpc>
+                <a:spcPct val="100000"/>
+              </a:lnSpc>
+            </a:pPr>
+            <a:r>
+              <a:rPr sz="2600" b="1">
+                <a:solidFill>
+                  <a:srgbClr val="FFFFFF"/>
+                </a:solidFill>
+                <a:latin typeface="Malgun Gothic"/>
+              </a:rPr>
+              <a:t>38</a:t>
+            </a:r>
+          </a:p>
+        </p:txBody>
+      </p:sp>
+      <p:sp>
+        <p:nvSpPr>
+          <p:cNvPr id="8" name="TextBox 7"/>
+          <p:cNvSpPr txBox="1"/>
+          <p:nvPr/>
+        </p:nvSpPr>
+        <p:spPr>
+          <a:xfrm>
+            <a:off x="1371600" y="822960"/>
+            <a:ext cx="10424160" cy="502920"/>
+          </a:xfrm>
+          <a:prstGeom prst="rect">
+            <a:avLst/>
+          </a:prstGeom>
+          <a:noFill/>
+        </p:spPr>
+        <p:txBody>
+          <a:bodyPr wrap="square" anchor="t">
+            <a:spAutoFit/>
+          </a:bodyPr>
+          <a:lstStyle/>
+          <a:p>
+            <a:pPr algn="l">
+              <a:lnSpc>
+                <a:spcPct val="100000"/>
+              </a:lnSpc>
+            </a:pPr>
+            <a:r>
+              <a:rPr sz="2300" b="1">
+                <a:solidFill>
+                  <a:srgbClr val="1E2340"/>
+                </a:solidFill>
+                <a:latin typeface="Malgun Gothic"/>
+              </a:rPr>
+              <a:t>🌟 학부모 월간 성적표 (오각형) 발송</a:t>
+            </a:r>
+          </a:p>
+        </p:txBody>
+      </p:sp>
+      <p:sp>
+        <p:nvSpPr>
+          <p:cNvPr id="9" name="TextBox 8"/>
+          <p:cNvSpPr txBox="1"/>
+          <p:nvPr/>
+        </p:nvSpPr>
+        <p:spPr>
+          <a:xfrm>
+            <a:off x="1417320" y="1353312"/>
+            <a:ext cx="10424160" cy="320040"/>
+          </a:xfrm>
+          <a:prstGeom prst="rect">
+            <a:avLst/>
+          </a:prstGeom>
+          <a:noFill/>
+        </p:spPr>
+        <p:txBody>
+          <a:bodyPr wrap="square" anchor="t">
+            <a:spAutoFit/>
+          </a:bodyPr>
+          <a:lstStyle/>
+          <a:p>
+            <a:pPr algn="l">
+              <a:lnSpc>
+                <a:spcPct val="100000"/>
+              </a:lnSpc>
+            </a:pPr>
+            <a:r>
+              <a:rPr sz="1300" b="0">
+                <a:solidFill>
+                  <a:srgbClr val="64748B"/>
+                </a:solidFill>
+                <a:latin typeface="Malgun Gothic"/>
+              </a:rPr>
+              <a:t>5축 그래프 성적표를 미리보고 링크로</a:t>
+            </a:r>
+          </a:p>
+        </p:txBody>
+      </p:sp>
+      <p:sp>
+        <p:nvSpPr>
+          <p:cNvPr id="10" name="Rounded Rectangle 9"/>
+          <p:cNvSpPr/>
+          <p:nvPr/>
+        </p:nvSpPr>
+        <p:spPr>
+          <a:xfrm>
+            <a:off x="365760" y="1828800"/>
+            <a:ext cx="11430000" cy="777240"/>
+          </a:xfrm>
+          <a:prstGeom prst="roundRect">
+            <a:avLst/>
+          </a:prstGeom>
+          <a:solidFill>
+            <a:srgbClr val="EEF2FF"/>
+          </a:solidFill>
+          <a:ln>
+            <a:noFill/>
+          </a:ln>
+          <a:effectLst/>
+        </p:spPr>
+        <p:style>
+          <a:lnRef idx="1">
+            <a:schemeClr val="accent1"/>
+          </a:lnRef>
+          <a:fillRef idx="3">
+            <a:schemeClr val="accent1"/>
+          </a:fillRef>
+          <a:effectRef idx="2">
+            <a:schemeClr val="accent1"/>
+          </a:effectRef>
+          <a:fontRef idx="minor">
+            <a:schemeClr val="lt1"/>
+          </a:fontRef>
+        </p:style>
+        <p:txBody>
+          <a:bodyPr rtlCol="0" anchor="ctr"/>
+          <a:lstStyle/>
+          <a:p>
+            <a:pPr algn="ctr"/>
+          </a:p>
+        </p:txBody>
+      </p:sp>
+      <p:sp>
+        <p:nvSpPr>
+          <p:cNvPr id="11" name="TextBox 10"/>
+          <p:cNvSpPr txBox="1"/>
+          <p:nvPr/>
+        </p:nvSpPr>
+        <p:spPr>
+          <a:xfrm>
+            <a:off x="548640" y="1901952"/>
+            <a:ext cx="11064240" cy="640080"/>
+          </a:xfrm>
+          <a:prstGeom prst="rect">
+            <a:avLst/>
+          </a:prstGeom>
+          <a:noFill/>
+        </p:spPr>
+        <p:txBody>
+          <a:bodyPr wrap="square" anchor="t">
+            <a:spAutoFit/>
+          </a:bodyPr>
+          <a:lstStyle/>
+          <a:p>
+            <a:pPr algn="l">
+              <a:lnSpc>
+                <a:spcPct val="115000"/>
+              </a:lnSpc>
+            </a:pPr>
+            <a:r>
+              <a:rPr sz="1200" b="0">
+                <a:solidFill>
+                  <a:srgbClr val="334155"/>
+                </a:solidFill>
+                <a:latin typeface="Malgun Gothic"/>
+              </a:rPr>
+              <a:t>학부모에게 보내는 월간 성적표가 오각형 5축 그래프로 새로워졌어요. 발음·유창성 / 어휘 / 문장 구성력 / 수업 태도 / 참여도 를 한눈에 보여 주고, 출결·판단력·담임의 한마디가 함께 담깁니다. 관리자·교사는 학생 ID와 월을 넣어 미리보기한 뒤 카카오톡 링크로 보냅니다.</a:t>
+            </a:r>
+          </a:p>
+        </p:txBody>
+      </p:sp>
+      <p:sp>
+        <p:nvSpPr>
+          <p:cNvPr id="12" name="TextBox 11"/>
+          <p:cNvSpPr txBox="1"/>
+          <p:nvPr/>
+        </p:nvSpPr>
+        <p:spPr>
+          <a:xfrm>
+            <a:off x="457200" y="2743200"/>
+            <a:ext cx="5669280" cy="320040"/>
+          </a:xfrm>
+          <a:prstGeom prst="rect">
+            <a:avLst/>
+          </a:prstGeom>
+          <a:noFill/>
+        </p:spPr>
+        <p:txBody>
+          <a:bodyPr wrap="square" anchor="t">
+            <a:spAutoFit/>
+          </a:bodyPr>
+          <a:lstStyle/>
+          <a:p>
+            <a:pPr algn="l">
+              <a:lnSpc>
+                <a:spcPct val="100000"/>
+              </a:lnSpc>
+            </a:pPr>
+            <a:r>
+              <a:rPr sz="1350" b="1">
+                <a:solidFill>
+                  <a:srgbClr val="4F46E5"/>
+                </a:solidFill>
+                <a:latin typeface="Malgun Gothic"/>
+              </a:rPr>
+              <a:t>사용 방법</a:t>
+            </a:r>
+          </a:p>
+        </p:txBody>
+      </p:sp>
+      <p:sp>
+        <p:nvSpPr>
+          <p:cNvPr id="13" name="TextBox 12"/>
+          <p:cNvSpPr txBox="1"/>
+          <p:nvPr/>
+        </p:nvSpPr>
+        <p:spPr>
+          <a:xfrm>
+            <a:off x="457200" y="3108960"/>
+            <a:ext cx="5669280" cy="2377440"/>
+          </a:xfrm>
+          <a:prstGeom prst="rect">
+            <a:avLst/>
+          </a:prstGeom>
+          <a:noFill/>
+        </p:spPr>
+        <p:txBody>
+          <a:bodyPr wrap="square">
+            <a:spAutoFit/>
+          </a:bodyPr>
+          <a:lstStyle/>
+          <a:p>
+            <a:pPr>
+              <a:lnSpc>
+                <a:spcPct val="115000"/>
+              </a:lnSpc>
+              <a:spcAft>
+                <a:spcPts val="600"/>
+              </a:spcAft>
+            </a:pPr>
+            <a:r>
+              <a:rPr sz="1050" b="1">
+                <a:solidFill>
+                  <a:srgbClr val="4F46E5"/>
+                </a:solidFill>
+                <a:latin typeface="Malgun Gothic"/>
+              </a:rPr>
+              <a:t>● </a:t>
+            </a:r>
+            <a:r>
+              <a:rPr sz="1250">
+                <a:solidFill>
+                  <a:srgbClr val="334155"/>
+                </a:solidFill>
+                <a:latin typeface="Malgun Gothic"/>
+              </a:rPr>
+              <a:t>월간 리포트 화면을 열어요.</a:t>
+            </a:r>
+          </a:p>
+          <a:p>
+            <a:pPr>
+              <a:lnSpc>
+                <a:spcPct val="115000"/>
+              </a:lnSpc>
+              <a:spcAft>
+                <a:spcPts val="600"/>
+              </a:spcAft>
+            </a:pPr>
+            <a:r>
+              <a:rPr sz="1050" b="1">
+                <a:solidFill>
+                  <a:srgbClr val="4F46E5"/>
+                </a:solidFill>
+                <a:latin typeface="Malgun Gothic"/>
+              </a:rPr>
+              <a:t>● </a:t>
+            </a:r>
+            <a:r>
+              <a:rPr sz="1250">
+                <a:solidFill>
+                  <a:srgbClr val="334155"/>
+                </a:solidFill>
+                <a:latin typeface="Malgun Gothic"/>
+              </a:rPr>
+              <a:t>학생 ID와 월을 넣고 레포트 보기를 눌러 미리봐요.</a:t>
+            </a:r>
+          </a:p>
+          <a:p>
+            <a:pPr>
+              <a:lnSpc>
+                <a:spcPct val="115000"/>
+              </a:lnSpc>
+              <a:spcAft>
+                <a:spcPts val="600"/>
+              </a:spcAft>
+            </a:pPr>
+            <a:r>
+              <a:rPr sz="1050" b="1">
+                <a:solidFill>
+                  <a:srgbClr val="4F46E5"/>
+                </a:solidFill>
+                <a:latin typeface="Malgun Gothic"/>
+              </a:rPr>
+              <a:t>● </a:t>
+            </a:r>
+            <a:r>
+              <a:rPr sz="1250">
+                <a:solidFill>
+                  <a:srgbClr val="334155"/>
+                </a:solidFill>
+                <a:latin typeface="Malgun Gothic"/>
+              </a:rPr>
+              <a:t>오각형과 담임의 한마디를 확인하고, 필요하면 평가를 보완해요.</a:t>
+            </a:r>
+          </a:p>
+          <a:p>
+            <a:pPr>
+              <a:lnSpc>
+                <a:spcPct val="115000"/>
+              </a:lnSpc>
+              <a:spcAft>
+                <a:spcPts val="600"/>
+              </a:spcAft>
+            </a:pPr>
+            <a:r>
+              <a:rPr sz="1050" b="1">
+                <a:solidFill>
+                  <a:srgbClr val="4F46E5"/>
+                </a:solidFill>
+                <a:latin typeface="Malgun Gothic"/>
+              </a:rPr>
+              <a:t>● </a:t>
+            </a:r>
+            <a:r>
+              <a:rPr sz="1250">
+                <a:solidFill>
+                  <a:srgbClr val="334155"/>
+                </a:solidFill>
+                <a:latin typeface="Malgun Gothic"/>
+              </a:rPr>
+              <a:t>주소에 ?uid=학생ID&amp;period=YYYY-MM 를 붙여 카카오톡 링크로 보냅니다.</a:t>
+            </a:r>
+          </a:p>
+        </p:txBody>
+      </p:sp>
+      <p:sp>
+        <p:nvSpPr>
+          <p:cNvPr id="14" name="Rounded Rectangle 13"/>
+          <p:cNvSpPr/>
+          <p:nvPr/>
+        </p:nvSpPr>
+        <p:spPr>
+          <a:xfrm>
+            <a:off x="457200" y="4782312"/>
+            <a:ext cx="5669280" cy="1316736"/>
+          </a:xfrm>
+          <a:prstGeom prst="roundRect">
+            <a:avLst/>
+          </a:prstGeom>
+          <a:solidFill>
+            <a:srgbClr val="F4F7FF"/>
+          </a:solidFill>
+          <a:ln w="12700">
+            <a:solidFill>
+              <a:srgbClr val="4F46E5"/>
+            </a:solidFill>
+          </a:ln>
+          <a:effectLst/>
+        </p:spPr>
+        <p:style>
+          <a:lnRef idx="1">
+            <a:schemeClr val="accent1"/>
+          </a:lnRef>
+          <a:fillRef idx="3">
+            <a:schemeClr val="accent1"/>
+          </a:fillRef>
+          <a:effectRef idx="2">
+            <a:schemeClr val="accent1"/>
+          </a:effectRef>
+          <a:fontRef idx="minor">
+            <a:schemeClr val="lt1"/>
+          </a:fontRef>
+        </p:style>
+        <p:txBody>
+          <a:bodyPr rtlCol="0" anchor="ctr"/>
+          <a:lstStyle/>
+          <a:p>
+            <a:pPr algn="ctr"/>
+          </a:p>
+        </p:txBody>
+      </p:sp>
+      <p:sp>
+        <p:nvSpPr>
+          <p:cNvPr id="15" name="TextBox 14"/>
+          <p:cNvSpPr txBox="1"/>
+          <p:nvPr/>
+        </p:nvSpPr>
+        <p:spPr>
+          <a:xfrm>
+            <a:off x="594360" y="4837175"/>
+            <a:ext cx="5394960" cy="274320"/>
+          </a:xfrm>
+          <a:prstGeom prst="rect">
+            <a:avLst/>
+          </a:prstGeom>
+          <a:noFill/>
+        </p:spPr>
+        <p:txBody>
+          <a:bodyPr wrap="square" anchor="t">
+            <a:spAutoFit/>
+          </a:bodyPr>
+          <a:lstStyle/>
+          <a:p>
+            <a:pPr algn="l">
+              <a:lnSpc>
+                <a:spcPct val="100000"/>
+              </a:lnSpc>
+            </a:pPr>
+            <a:r>
+              <a:rPr sz="1150" b="1">
+                <a:solidFill>
+                  <a:srgbClr val="4F46E5"/>
+                </a:solidFill>
+                <a:latin typeface="Malgun Gothic"/>
+              </a:rPr>
+              <a:t>✅ 핵심 포인트</a:t>
+            </a:r>
+          </a:p>
+        </p:txBody>
+      </p:sp>
+      <p:sp>
+        <p:nvSpPr>
+          <p:cNvPr id="16" name="TextBox 15"/>
+          <p:cNvSpPr txBox="1"/>
+          <p:nvPr/>
+        </p:nvSpPr>
+        <p:spPr>
+          <a:xfrm>
+            <a:off x="594360" y="5111496"/>
+            <a:ext cx="5394960" cy="950976"/>
+          </a:xfrm>
+          <a:prstGeom prst="rect">
+            <a:avLst/>
+          </a:prstGeom>
+          <a:noFill/>
+        </p:spPr>
+        <p:txBody>
+          <a:bodyPr wrap="square">
+            <a:spAutoFit/>
+          </a:bodyPr>
+          <a:lstStyle/>
+          <a:p>
+            <a:pPr>
+              <a:lnSpc>
+                <a:spcPct val="115000"/>
+              </a:lnSpc>
+              <a:spcAft>
+                <a:spcPts val="200"/>
+              </a:spcAft>
+            </a:pPr>
+            <a:r>
+              <a:rPr sz="900" b="1">
+                <a:solidFill>
+                  <a:srgbClr val="4F46E5"/>
+                </a:solidFill>
+                <a:latin typeface="Malgun Gothic"/>
+              </a:rPr>
+              <a:t>● </a:t>
+            </a:r>
+            <a:r>
+              <a:rPr sz="1100">
+                <a:solidFill>
+                  <a:srgbClr val="334155"/>
+                </a:solidFill>
+                <a:latin typeface="Malgun Gothic"/>
+              </a:rPr>
+              <a:t>실제 기록이 있는 축만 채워져 신뢰할 수 있어요.</a:t>
+            </a:r>
+          </a:p>
+          <a:p>
+            <a:pPr>
+              <a:lnSpc>
+                <a:spcPct val="115000"/>
+              </a:lnSpc>
+              <a:spcAft>
+                <a:spcPts val="200"/>
+              </a:spcAft>
+            </a:pPr>
+            <a:r>
+              <a:rPr sz="900" b="1">
+                <a:solidFill>
+                  <a:srgbClr val="4F46E5"/>
+                </a:solidFill>
+                <a:latin typeface="Malgun Gothic"/>
+              </a:rPr>
+              <a:t>● </a:t>
+            </a:r>
+            <a:r>
+              <a:rPr sz="1100">
+                <a:solidFill>
+                  <a:srgbClr val="334155"/>
+                </a:solidFill>
+                <a:latin typeface="Malgun Gothic"/>
+              </a:rPr>
+              <a:t>2개월 주기로 정리해 학부모 피로 없이 변화를 전달해요.</a:t>
+            </a:r>
+          </a:p>
+          <a:p>
+            <a:pPr>
+              <a:lnSpc>
+                <a:spcPct val="115000"/>
+              </a:lnSpc>
+              <a:spcAft>
+                <a:spcPts val="200"/>
+              </a:spcAft>
+            </a:pPr>
+            <a:r>
+              <a:rPr sz="900" b="1">
+                <a:solidFill>
+                  <a:srgbClr val="4F46E5"/>
+                </a:solidFill>
+                <a:latin typeface="Malgun Gothic"/>
+              </a:rPr>
+              <a:t>● </a:t>
+            </a:r>
+            <a:r>
+              <a:rPr sz="1100">
+                <a:solidFill>
+                  <a:srgbClr val="334155"/>
+                </a:solidFill>
+                <a:latin typeface="Malgun Gothic"/>
+              </a:rPr>
+              <a:t>인쇄/PDF 버튼으로 상담용 종이 성적표도 즉시 만들 수 있어요.</a:t>
+            </a:r>
+          </a:p>
+        </p:txBody>
+      </p:sp>
+      <p:sp>
+        <p:nvSpPr>
+          <p:cNvPr id="17" name="Rounded Rectangle 16"/>
+          <p:cNvSpPr/>
+          <p:nvPr/>
+        </p:nvSpPr>
+        <p:spPr>
+          <a:xfrm>
+            <a:off x="457200" y="6208775"/>
+            <a:ext cx="5669280" cy="640080"/>
+          </a:xfrm>
+          <a:prstGeom prst="roundRect">
+            <a:avLst/>
+          </a:prstGeom>
+          <a:solidFill>
+            <a:srgbClr val="FFFBEB"/>
+          </a:solidFill>
+          <a:ln w="12700">
+            <a:solidFill>
+              <a:srgbClr val="F59E0B"/>
+            </a:solidFill>
+          </a:ln>
+          <a:effectLst/>
+        </p:spPr>
+        <p:style>
+          <a:lnRef idx="1">
+            <a:schemeClr val="accent1"/>
+          </a:lnRef>
+          <a:fillRef idx="3">
+            <a:schemeClr val="accent1"/>
+          </a:fillRef>
+          <a:effectRef idx="2">
+            <a:schemeClr val="accent1"/>
+          </a:effectRef>
+          <a:fontRef idx="minor">
+            <a:schemeClr val="lt1"/>
+          </a:fontRef>
+        </p:style>
+        <p:txBody>
+          <a:bodyPr rtlCol="0" anchor="ctr"/>
+          <a:lstStyle/>
+          <a:p>
+            <a:pPr algn="ctr"/>
+          </a:p>
+        </p:txBody>
+      </p:sp>
+      <p:sp>
+        <p:nvSpPr>
+          <p:cNvPr id="18" name="TextBox 17"/>
+          <p:cNvSpPr txBox="1"/>
+          <p:nvPr/>
+        </p:nvSpPr>
+        <p:spPr>
+          <a:xfrm>
+            <a:off x="594360" y="6254495"/>
+            <a:ext cx="5394960" cy="548640"/>
+          </a:xfrm>
+          <a:prstGeom prst="rect">
+            <a:avLst/>
+          </a:prstGeom>
+          <a:noFill/>
+        </p:spPr>
+        <p:txBody>
+          <a:bodyPr wrap="square" anchor="t">
+            <a:spAutoFit/>
+          </a:bodyPr>
+          <a:lstStyle/>
+          <a:p>
+            <a:pPr algn="l">
+              <a:lnSpc>
+                <a:spcPct val="105000"/>
+              </a:lnSpc>
+            </a:pPr>
+            <a:r>
+              <a:rPr sz="1050" b="0">
+                <a:solidFill>
+                  <a:srgbClr val="92670A"/>
+                </a:solidFill>
+                <a:latin typeface="Malgun Gothic"/>
+              </a:rPr>
+              <a:t>⚠️ 알아두기 · 성적표 열람은 승인 게이트를 거쳐요. 관리자는 로그인 세션으로, 학부모는 발급된 링크(토큰)로만 열립니다.</a:t>
+            </a:r>
+          </a:p>
+        </p:txBody>
+      </p:sp>
+      <p:sp>
+        <p:nvSpPr>
+          <p:cNvPr id="19" name="Rounded Rectangle 18"/>
+          <p:cNvSpPr/>
+          <p:nvPr/>
+        </p:nvSpPr>
+        <p:spPr>
+          <a:xfrm>
+            <a:off x="457200" y="6940295"/>
+            <a:ext cx="5669280" cy="658368"/>
+          </a:xfrm>
+          <a:prstGeom prst="roundRect">
+            <a:avLst/>
+          </a:prstGeom>
+          <a:solidFill>
+            <a:srgbClr val="FFF7E6"/>
+          </a:solidFill>
+          <a:ln w="12700">
+            <a:solidFill>
+              <a:srgbClr val="FF9F1C"/>
+            </a:solidFill>
+          </a:ln>
+          <a:effectLst/>
+        </p:spPr>
+        <p:style>
+          <a:lnRef idx="1">
+            <a:schemeClr val="accent1"/>
+          </a:lnRef>
+          <a:fillRef idx="3">
+            <a:schemeClr val="accent1"/>
+          </a:fillRef>
+          <a:effectRef idx="2">
+            <a:schemeClr val="accent1"/>
+          </a:effectRef>
+          <a:fontRef idx="minor">
+            <a:schemeClr val="lt1"/>
+          </a:fontRef>
+        </p:style>
+        <p:txBody>
+          <a:bodyPr rtlCol="0" anchor="ctr"/>
+          <a:lstStyle/>
+          <a:p>
+            <a:pPr algn="ctr"/>
+          </a:p>
+        </p:txBody>
+      </p:sp>
+      <p:sp>
+        <p:nvSpPr>
+          <p:cNvPr id="20" name="TextBox 19"/>
+          <p:cNvSpPr txBox="1"/>
+          <p:nvPr/>
+        </p:nvSpPr>
+        <p:spPr>
+          <a:xfrm>
+            <a:off x="594360" y="6986015"/>
+            <a:ext cx="5394960" cy="566928"/>
+          </a:xfrm>
+          <a:prstGeom prst="rect">
+            <a:avLst/>
+          </a:prstGeom>
+          <a:noFill/>
+        </p:spPr>
+        <p:txBody>
+          <a:bodyPr wrap="square" anchor="t">
+            <a:spAutoFit/>
+          </a:bodyPr>
+          <a:lstStyle/>
+          <a:p>
+            <a:pPr algn="l">
+              <a:lnSpc>
+                <a:spcPct val="105000"/>
+              </a:lnSpc>
+            </a:pPr>
+            <a:r>
+              <a:rPr sz="1050" b="0">
+                <a:solidFill>
+                  <a:srgbClr val="5B4A2A"/>
+                </a:solidFill>
+                <a:latin typeface="Malgun Gothic"/>
+              </a:rPr>
+              <a:t>💡 꿀팁 · 상담 예약과 함께 성적표 링크를 미리 보내면 상담이 훨씬 매끄러워요.</a:t>
+            </a:r>
+          </a:p>
+        </p:txBody>
+      </p:sp>
+      <p:sp>
+        <p:nvSpPr>
+          <p:cNvPr id="21" name="Rectangle 20"/>
+          <p:cNvSpPr/>
+          <p:nvPr/>
+        </p:nvSpPr>
+        <p:spPr>
+          <a:xfrm>
+            <a:off x="6300216" y="2345436"/>
+            <a:ext cx="5596128" cy="3538728"/>
+          </a:xfrm>
+          <a:prstGeom prst="rect">
+            <a:avLst/>
+          </a:prstGeom>
+          <a:solidFill>
+            <a:srgbClr val="FFFFFF"/>
+          </a:solidFill>
+          <a:ln w="12700">
+            <a:solidFill>
+              <a:srgbClr val="E2E8F0"/>
+            </a:solidFill>
+          </a:ln>
+          <a:effectLst/>
+        </p:spPr>
+        <p:style>
+          <a:lnRef idx="1">
+            <a:schemeClr val="accent1"/>
+          </a:lnRef>
+          <a:fillRef idx="3">
+            <a:schemeClr val="accent1"/>
+          </a:fillRef>
+          <a:effectRef idx="2">
+            <a:schemeClr val="accent1"/>
+          </a:effectRef>
+          <a:fontRef idx="minor">
+            <a:schemeClr val="lt1"/>
+          </a:fontRef>
+        </p:style>
+        <p:txBody>
+          <a:bodyPr rtlCol="0" anchor="ctr"/>
+          <a:lstStyle/>
+          <a:p>
+            <a:pPr algn="ctr"/>
+          </a:p>
+        </p:txBody>
+      </p:sp>
+      <p:pic>
+        <p:nvPicPr>
+          <p:cNvPr id="22" name="Picture 21" descr="student_report_pentagon.jpg"/>
+          <p:cNvPicPr>
+            <a:picLocks noChangeAspect="1"/>
+          </p:cNvPicPr>
+          <p:nvPr/>
+        </p:nvPicPr>
+        <p:blipFill>
+          <a:blip r:embed="rId2"/>
+          <a:stretch>
+            <a:fillRect/>
+          </a:stretch>
+        </p:blipFill>
+        <p:spPr>
+          <a:xfrm>
+            <a:off x="6355080" y="2400300"/>
+            <a:ext cx="5486400" cy="3429000"/>
+          </a:xfrm>
+          <a:prstGeom prst="rect">
+            <a:avLst/>
+          </a:prstGeom>
+        </p:spPr>
+      </p:pic>
+    </p:spTree>
+  </p:cSld>
+  <p:clrMapOvr>
+    <a:masterClrMapping/>
+  </p:clrMapOvr>
+</p:sld>
+</file>
+
+<file path=ppt/slides/slide43.xml><?xml version="1.0" encoding="utf-8"?>
+<p:sld xmlns:a="http://schemas.openxmlformats.org/drawingml/2006/main" xmlns:p="http://schemas.openxmlformats.org/presentationml/2006/main" xmlns:r="http://schemas.openxmlformats.org/officeDocument/2006/relationships">
+  <p:cSld>
+    <p:bg>
+      <p:bgPr>
+        <a:solidFill>
+          <a:srgbClr val="FFFFFF"/>
+        </a:solidFill>
+        <a:effectLst/>
+      </p:bgPr>
+    </p:bg>
+    <p:spTree>
+      <p:nvGrpSpPr>
+        <p:cNvPr id="1" name=""/>
+        <p:cNvGrpSpPr/>
+        <p:nvPr/>
+      </p:nvGrpSpPr>
+      <p:grpSpPr/>
+      <p:sp>
+        <p:nvSpPr>
+          <p:cNvPr id="2" name="Rectangle 1"/>
+          <p:cNvSpPr/>
+          <p:nvPr/>
+        </p:nvSpPr>
+        <p:spPr>
+          <a:xfrm>
+            <a:off x="0" y="0"/>
+            <a:ext cx="12191695" cy="566928"/>
+          </a:xfrm>
+          <a:prstGeom prst="rect">
+            <a:avLst/>
+          </a:prstGeom>
+          <a:solidFill>
+            <a:srgbClr val="4F46E5"/>
+          </a:solidFill>
+          <a:ln>
+            <a:noFill/>
+          </a:ln>
+          <a:effectLst/>
+        </p:spPr>
+        <p:style>
+          <a:lnRef idx="1">
+            <a:schemeClr val="accent1"/>
+          </a:lnRef>
+          <a:fillRef idx="3">
+            <a:schemeClr val="accent1"/>
+          </a:fillRef>
+          <a:effectRef idx="2">
+            <a:schemeClr val="accent1"/>
+          </a:effectRef>
+          <a:fontRef idx="minor">
+            <a:schemeClr val="lt1"/>
+          </a:fontRef>
+        </p:style>
+        <p:txBody>
+          <a:bodyPr rtlCol="0" anchor="ctr"/>
+          <a:lstStyle/>
+          <a:p>
+            <a:pPr algn="ctr"/>
+          </a:p>
+        </p:txBody>
+      </p:sp>
+      <p:sp>
+        <p:nvSpPr>
+          <p:cNvPr id="3" name="Rectangle 2"/>
+          <p:cNvSpPr/>
+          <p:nvPr/>
+        </p:nvSpPr>
+        <p:spPr>
+          <a:xfrm>
+            <a:off x="0" y="566928"/>
+            <a:ext cx="12191695" cy="54864"/>
+          </a:xfrm>
+          <a:prstGeom prst="rect">
+            <a:avLst/>
+          </a:prstGeom>
+          <a:solidFill>
+            <a:srgbClr val="FF9F1C"/>
+          </a:solidFill>
+          <a:ln>
+            <a:noFill/>
+          </a:ln>
+          <a:effectLst/>
+        </p:spPr>
+        <p:style>
+          <a:lnRef idx="1">
+            <a:schemeClr val="accent1"/>
+          </a:lnRef>
+          <a:fillRef idx="3">
+            <a:schemeClr val="accent1"/>
+          </a:fillRef>
+          <a:effectRef idx="2">
+            <a:schemeClr val="accent1"/>
+          </a:effectRef>
+          <a:fontRef idx="minor">
+            <a:schemeClr val="lt1"/>
+          </a:fontRef>
+        </p:style>
+        <p:txBody>
+          <a:bodyPr rtlCol="0" anchor="ctr"/>
+          <a:lstStyle/>
+          <a:p>
+            <a:pPr algn="ctr"/>
+          </a:p>
+        </p:txBody>
+      </p:sp>
+      <p:sp>
+        <p:nvSpPr>
+          <p:cNvPr id="4" name="TextBox 3"/>
+          <p:cNvSpPr txBox="1"/>
+          <p:nvPr/>
+        </p:nvSpPr>
+        <p:spPr>
+          <a:xfrm>
+            <a:off x="365760" y="27432"/>
+            <a:ext cx="7315200" cy="502920"/>
+          </a:xfrm>
+          <a:prstGeom prst="rect">
+            <a:avLst/>
+          </a:prstGeom>
+          <a:noFill/>
+        </p:spPr>
+        <p:txBody>
+          <a:bodyPr wrap="square" anchor="ctr">
+            <a:spAutoFit/>
+          </a:bodyPr>
+          <a:lstStyle/>
+          <a:p>
+            <a:pPr algn="l">
+              <a:lnSpc>
+                <a:spcPct val="100000"/>
+              </a:lnSpc>
+            </a:pPr>
+            <a:r>
+              <a:rPr sz="1500" b="1">
+                <a:solidFill>
+                  <a:srgbClr val="FFFFFF"/>
+                </a:solidFill>
+                <a:latin typeface="Malgun Gothic"/>
+              </a:rPr>
+              <a:t>🏫 망고아이 관리자용 사용설명서</a:t>
+            </a:r>
+          </a:p>
+        </p:txBody>
+      </p:sp>
+      <p:sp>
+        <p:nvSpPr>
+          <p:cNvPr id="5" name="TextBox 4"/>
+          <p:cNvSpPr txBox="1"/>
+          <p:nvPr/>
+        </p:nvSpPr>
+        <p:spPr>
+          <a:xfrm>
+            <a:off x="8168335" y="27432"/>
+            <a:ext cx="3657600" cy="502920"/>
+          </a:xfrm>
+          <a:prstGeom prst="rect">
+            <a:avLst/>
+          </a:prstGeom>
+          <a:noFill/>
+        </p:spPr>
+        <p:txBody>
+          <a:bodyPr wrap="square" anchor="ctr">
+            <a:spAutoFit/>
+          </a:bodyPr>
+          <a:lstStyle/>
+          <a:p>
+            <a:pPr algn="r">
+              <a:lnSpc>
+                <a:spcPct val="100000"/>
+              </a:lnSpc>
+            </a:pPr>
+            <a:r>
+              <a:rPr sz="1300" b="1">
+                <a:solidFill>
+                  <a:srgbClr val="F1F5F9"/>
+                </a:solidFill>
+                <a:latin typeface="Malgun Gothic"/>
+              </a:rPr>
+              <a:t>기능 요약 · 데이터</a:t>
+            </a:r>
+          </a:p>
+        </p:txBody>
+      </p:sp>
+      <p:sp>
+        <p:nvSpPr>
+          <p:cNvPr id="6" name="Rounded Rectangle 5"/>
+          <p:cNvSpPr/>
+          <p:nvPr/>
+        </p:nvSpPr>
+        <p:spPr>
+          <a:xfrm>
             <a:off x="365760" y="841248"/>
             <a:ext cx="658368" cy="512064"/>
           </a:xfrm>
+          <a:prstGeom prst="roundRect">
+            <a:avLst/>
+          </a:prstGeom>
+          <a:solidFill>
+            <a:srgbClr val="4F46E5"/>
+          </a:solidFill>
+          <a:ln>
+            <a:noFill/>
+          </a:ln>
+          <a:effectLst/>
+        </p:spPr>
+        <p:style>
+          <a:lnRef idx="1">
+            <a:schemeClr val="accent1"/>
+          </a:lnRef>
+          <a:fillRef idx="3">
+            <a:schemeClr val="accent1"/>
+          </a:fillRef>
+          <a:effectRef idx="2">
+            <a:schemeClr val="accent1"/>
+          </a:effectRef>
+          <a:fontRef idx="minor">
+            <a:schemeClr val="lt1"/>
+          </a:fontRef>
+        </p:style>
+        <p:txBody>
+          <a:bodyPr rtlCol="0" anchor="ctr"/>
+          <a:lstStyle/>
+          <a:p>
+            <a:pPr algn="ctr"/>
+          </a:p>
+        </p:txBody>
+      </p:sp>
+      <p:sp>
+        <p:nvSpPr>
+          <p:cNvPr id="7" name="TextBox 6"/>
+          <p:cNvSpPr txBox="1"/>
+          <p:nvPr/>
+        </p:nvSpPr>
+        <p:spPr>
+          <a:xfrm>
+            <a:off x="365760" y="841248"/>
+            <a:ext cx="658368" cy="512064"/>
+          </a:xfrm>
           <a:prstGeom prst="rect">
             <a:avLst/>
           </a:prstGeom>
@@ -42871,7 +45335,7 @@
                 </a:solidFill>
                 <a:latin typeface="Malgun Gothic"/>
               </a:rPr>
-              <a:t>37</a:t>
+              <a:t>39</a:t>
             </a:r>
           </a:p>
         </p:txBody>
@@ -43609,7 +46073,7 @@
 </p:sld>
 </file>
 
-<file path=ppt/slides/slide42.xml><?xml version="1.0" encoding="utf-8"?>
+<file path=ppt/slides/slide44.xml><?xml version="1.0" encoding="utf-8"?>
 <p:sld xmlns:a="http://schemas.openxmlformats.org/drawingml/2006/main" xmlns:p="http://schemas.openxmlformats.org/presentationml/2006/main" xmlns:r="http://schemas.openxmlformats.org/officeDocument/2006/relationships">
   <p:cSld>
     <p:bg>
@@ -43871,7 +46335,7 @@
                 </a:solidFill>
                 <a:latin typeface="Malgun Gothic"/>
               </a:rPr>
-              <a:t>38</a:t>
+              <a:t>40</a:t>
             </a:r>
           </a:p>
         </p:txBody>
@@ -44029,1997 +46493,6 @@
           </a:graphicData>
         </a:graphic>
       </p:graphicFrame>
-    </p:spTree>
-  </p:cSld>
-  <p:clrMapOvr>
-    <a:masterClrMapping/>
-  </p:clrMapOvr>
-</p:sld>
-</file>
-
-<file path=ppt/slides/slide43.xml><?xml version="1.0" encoding="utf-8"?>
-<p:sld xmlns:a="http://schemas.openxmlformats.org/drawingml/2006/main" xmlns:p="http://schemas.openxmlformats.org/presentationml/2006/main" xmlns:r="http://schemas.openxmlformats.org/officeDocument/2006/relationships">
-  <p:cSld>
-    <p:bg>
-      <p:bgPr>
-        <a:solidFill>
-          <a:srgbClr val="FFFFFF"/>
-        </a:solidFill>
-        <a:effectLst/>
-      </p:bgPr>
-    </p:bg>
-    <p:spTree>
-      <p:nvGrpSpPr>
-        <p:cNvPr id="1" name=""/>
-        <p:cNvGrpSpPr/>
-        <p:nvPr/>
-      </p:nvGrpSpPr>
-      <p:grpSpPr/>
-      <p:sp>
-        <p:nvSpPr>
-          <p:cNvPr id="2" name="Rectangle 1"/>
-          <p:cNvSpPr/>
-          <p:nvPr/>
-        </p:nvSpPr>
-        <p:spPr>
-          <a:xfrm>
-            <a:off x="0" y="0"/>
-            <a:ext cx="12191695" cy="566928"/>
-          </a:xfrm>
-          <a:prstGeom prst="rect">
-            <a:avLst/>
-          </a:prstGeom>
-          <a:solidFill>
-            <a:srgbClr val="4F46E5"/>
-          </a:solidFill>
-          <a:ln>
-            <a:noFill/>
-          </a:ln>
-          <a:effectLst/>
-        </p:spPr>
-        <p:style>
-          <a:lnRef idx="1">
-            <a:schemeClr val="accent1"/>
-          </a:lnRef>
-          <a:fillRef idx="3">
-            <a:schemeClr val="accent1"/>
-          </a:fillRef>
-          <a:effectRef idx="2">
-            <a:schemeClr val="accent1"/>
-          </a:effectRef>
-          <a:fontRef idx="minor">
-            <a:schemeClr val="lt1"/>
-          </a:fontRef>
-        </p:style>
-        <p:txBody>
-          <a:bodyPr rtlCol="0" anchor="ctr"/>
-          <a:lstStyle/>
-          <a:p>
-            <a:pPr algn="ctr"/>
-          </a:p>
-        </p:txBody>
-      </p:sp>
-      <p:sp>
-        <p:nvSpPr>
-          <p:cNvPr id="3" name="Rectangle 2"/>
-          <p:cNvSpPr/>
-          <p:nvPr/>
-        </p:nvSpPr>
-        <p:spPr>
-          <a:xfrm>
-            <a:off x="0" y="566928"/>
-            <a:ext cx="12191695" cy="54864"/>
-          </a:xfrm>
-          <a:prstGeom prst="rect">
-            <a:avLst/>
-          </a:prstGeom>
-          <a:solidFill>
-            <a:srgbClr val="FF9F1C"/>
-          </a:solidFill>
-          <a:ln>
-            <a:noFill/>
-          </a:ln>
-          <a:effectLst/>
-        </p:spPr>
-        <p:style>
-          <a:lnRef idx="1">
-            <a:schemeClr val="accent1"/>
-          </a:lnRef>
-          <a:fillRef idx="3">
-            <a:schemeClr val="accent1"/>
-          </a:fillRef>
-          <a:effectRef idx="2">
-            <a:schemeClr val="accent1"/>
-          </a:effectRef>
-          <a:fontRef idx="minor">
-            <a:schemeClr val="lt1"/>
-          </a:fontRef>
-        </p:style>
-        <p:txBody>
-          <a:bodyPr rtlCol="0" anchor="ctr"/>
-          <a:lstStyle/>
-          <a:p>
-            <a:pPr algn="ctr"/>
-          </a:p>
-        </p:txBody>
-      </p:sp>
-      <p:sp>
-        <p:nvSpPr>
-          <p:cNvPr id="4" name="TextBox 3"/>
-          <p:cNvSpPr txBox="1"/>
-          <p:nvPr/>
-        </p:nvSpPr>
-        <p:spPr>
-          <a:xfrm>
-            <a:off x="365760" y="27432"/>
-            <a:ext cx="7315200" cy="502920"/>
-          </a:xfrm>
-          <a:prstGeom prst="rect">
-            <a:avLst/>
-          </a:prstGeom>
-          <a:noFill/>
-        </p:spPr>
-        <p:txBody>
-          <a:bodyPr wrap="square" anchor="ctr">
-            <a:spAutoFit/>
-          </a:bodyPr>
-          <a:lstStyle/>
-          <a:p>
-            <a:pPr algn="l">
-              <a:lnSpc>
-                <a:spcPct val="100000"/>
-              </a:lnSpc>
-            </a:pPr>
-            <a:r>
-              <a:rPr sz="1500" b="1">
-                <a:solidFill>
-                  <a:srgbClr val="FFFFFF"/>
-                </a:solidFill>
-                <a:latin typeface="Malgun Gothic"/>
-              </a:rPr>
-              <a:t>🏫 망고아이 관리자용 사용설명서</a:t>
-            </a:r>
-          </a:p>
-        </p:txBody>
-      </p:sp>
-      <p:sp>
-        <p:nvSpPr>
-          <p:cNvPr id="5" name="TextBox 4"/>
-          <p:cNvSpPr txBox="1"/>
-          <p:nvPr/>
-        </p:nvSpPr>
-        <p:spPr>
-          <a:xfrm>
-            <a:off x="8168335" y="27432"/>
-            <a:ext cx="3657600" cy="502920"/>
-          </a:xfrm>
-          <a:prstGeom prst="rect">
-            <a:avLst/>
-          </a:prstGeom>
-          <a:noFill/>
-        </p:spPr>
-        <p:txBody>
-          <a:bodyPr wrap="square" anchor="ctr">
-            <a:spAutoFit/>
-          </a:bodyPr>
-          <a:lstStyle/>
-          <a:p>
-            <a:pPr algn="r">
-              <a:lnSpc>
-                <a:spcPct val="100000"/>
-              </a:lnSpc>
-            </a:pPr>
-            <a:r>
-              <a:rPr sz="1300" b="1">
-                <a:solidFill>
-                  <a:srgbClr val="F1F5F9"/>
-                </a:solidFill>
-                <a:latin typeface="Malgun Gothic"/>
-              </a:rPr>
-              <a:t>자주 묻는 질문 (FAQ)</a:t>
-            </a:r>
-          </a:p>
-        </p:txBody>
-      </p:sp>
-      <p:sp>
-        <p:nvSpPr>
-          <p:cNvPr id="6" name="Rounded Rectangle 5"/>
-          <p:cNvSpPr/>
-          <p:nvPr/>
-        </p:nvSpPr>
-        <p:spPr>
-          <a:xfrm>
-            <a:off x="365760" y="841248"/>
-            <a:ext cx="658368" cy="512064"/>
-          </a:xfrm>
-          <a:prstGeom prst="roundRect">
-            <a:avLst/>
-          </a:prstGeom>
-          <a:solidFill>
-            <a:srgbClr val="4F46E5"/>
-          </a:solidFill>
-          <a:ln>
-            <a:noFill/>
-          </a:ln>
-          <a:effectLst/>
-        </p:spPr>
-        <p:style>
-          <a:lnRef idx="1">
-            <a:schemeClr val="accent1"/>
-          </a:lnRef>
-          <a:fillRef idx="3">
-            <a:schemeClr val="accent1"/>
-          </a:fillRef>
-          <a:effectRef idx="2">
-            <a:schemeClr val="accent1"/>
-          </a:effectRef>
-          <a:fontRef idx="minor">
-            <a:schemeClr val="lt1"/>
-          </a:fontRef>
-        </p:style>
-        <p:txBody>
-          <a:bodyPr rtlCol="0" anchor="ctr"/>
-          <a:lstStyle/>
-          <a:p>
-            <a:pPr algn="ctr"/>
-          </a:p>
-        </p:txBody>
-      </p:sp>
-      <p:sp>
-        <p:nvSpPr>
-          <p:cNvPr id="7" name="TextBox 6"/>
-          <p:cNvSpPr txBox="1"/>
-          <p:nvPr/>
-        </p:nvSpPr>
-        <p:spPr>
-          <a:xfrm>
-            <a:off x="365760" y="841248"/>
-            <a:ext cx="658368" cy="512064"/>
-          </a:xfrm>
-          <a:prstGeom prst="rect">
-            <a:avLst/>
-          </a:prstGeom>
-          <a:noFill/>
-        </p:spPr>
-        <p:txBody>
-          <a:bodyPr wrap="square" anchor="ctr">
-            <a:spAutoFit/>
-          </a:bodyPr>
-          <a:lstStyle/>
-          <a:p>
-            <a:pPr algn="ctr">
-              <a:lnSpc>
-                <a:spcPct val="100000"/>
-              </a:lnSpc>
-            </a:pPr>
-            <a:r>
-              <a:rPr sz="1700" b="1">
-                <a:solidFill>
-                  <a:srgbClr val="FFFFFF"/>
-                </a:solidFill>
-                <a:latin typeface="Malgun Gothic"/>
-              </a:rPr>
-              <a:t>39</a:t>
-            </a:r>
-          </a:p>
-        </p:txBody>
-      </p:sp>
-      <p:sp>
-        <p:nvSpPr>
-          <p:cNvPr id="8" name="TextBox 7"/>
-          <p:cNvSpPr txBox="1"/>
-          <p:nvPr/>
-        </p:nvSpPr>
-        <p:spPr>
-          <a:xfrm>
-            <a:off x="1143000" y="868680"/>
-            <a:ext cx="9144000" cy="457200"/>
-          </a:xfrm>
-          <a:prstGeom prst="rect">
-            <a:avLst/>
-          </a:prstGeom>
-          <a:noFill/>
-        </p:spPr>
-        <p:txBody>
-          <a:bodyPr wrap="square" anchor="t">
-            <a:spAutoFit/>
-          </a:bodyPr>
-          <a:lstStyle/>
-          <a:p>
-            <a:pPr algn="l">
-              <a:lnSpc>
-                <a:spcPct val="100000"/>
-              </a:lnSpc>
-            </a:pPr>
-            <a:r>
-              <a:rPr sz="2200" b="1">
-                <a:solidFill>
-                  <a:srgbClr val="4F46E5"/>
-                </a:solidFill>
-                <a:latin typeface="Malgun Gothic"/>
-              </a:rPr>
-              <a:t>❓ 자주 묻는 질문 (FAQ)</a:t>
-            </a:r>
-          </a:p>
-        </p:txBody>
-      </p:sp>
-      <p:sp>
-        <p:nvSpPr>
-          <p:cNvPr id="9" name="Rounded Rectangle 8"/>
-          <p:cNvSpPr/>
-          <p:nvPr/>
-        </p:nvSpPr>
-        <p:spPr>
-          <a:xfrm>
-            <a:off x="365760" y="1554480"/>
-            <a:ext cx="11460175" cy="868680"/>
-          </a:xfrm>
-          <a:prstGeom prst="roundRect">
-            <a:avLst/>
-          </a:prstGeom>
-          <a:solidFill>
-            <a:srgbClr val="F8FAFC"/>
-          </a:solidFill>
-          <a:ln w="12700">
-            <a:solidFill>
-              <a:srgbClr val="E2E8F0"/>
-            </a:solidFill>
-          </a:ln>
-          <a:effectLst/>
-        </p:spPr>
-        <p:style>
-          <a:lnRef idx="1">
-            <a:schemeClr val="accent1"/>
-          </a:lnRef>
-          <a:fillRef idx="3">
-            <a:schemeClr val="accent1"/>
-          </a:fillRef>
-          <a:effectRef idx="2">
-            <a:schemeClr val="accent1"/>
-          </a:effectRef>
-          <a:fontRef idx="minor">
-            <a:schemeClr val="lt1"/>
-          </a:fontRef>
-        </p:style>
-        <p:txBody>
-          <a:bodyPr rtlCol="0" anchor="ctr"/>
-          <a:lstStyle/>
-          <a:p>
-            <a:pPr algn="ctr"/>
-          </a:p>
-        </p:txBody>
-      </p:sp>
-      <p:sp>
-        <p:nvSpPr>
-          <p:cNvPr id="10" name="TextBox 9"/>
-          <p:cNvSpPr txBox="1"/>
-          <p:nvPr/>
-        </p:nvSpPr>
-        <p:spPr>
-          <a:xfrm>
-            <a:off x="548640" y="1627632"/>
-            <a:ext cx="11094415" cy="365760"/>
-          </a:xfrm>
-          <a:prstGeom prst="rect">
-            <a:avLst/>
-          </a:prstGeom>
-          <a:noFill/>
-        </p:spPr>
-        <p:txBody>
-          <a:bodyPr wrap="square" anchor="t">
-            <a:spAutoFit/>
-          </a:bodyPr>
-          <a:lstStyle/>
-          <a:p>
-            <a:pPr algn="l">
-              <a:lnSpc>
-                <a:spcPct val="100000"/>
-              </a:lnSpc>
-            </a:pPr>
-            <a:r>
-              <a:rPr sz="1350" b="1">
-                <a:solidFill>
-                  <a:srgbClr val="4F46E5"/>
-                </a:solidFill>
-                <a:latin typeface="Malgun Gothic"/>
-              </a:rPr>
-              <a:t>Q. 어디서 접속하나요?</a:t>
-            </a:r>
-          </a:p>
-        </p:txBody>
-      </p:sp>
-      <p:sp>
-        <p:nvSpPr>
-          <p:cNvPr id="11" name="TextBox 10"/>
-          <p:cNvSpPr txBox="1"/>
-          <p:nvPr/>
-        </p:nvSpPr>
-        <p:spPr>
-          <a:xfrm>
-            <a:off x="548640" y="1965960"/>
-            <a:ext cx="11094415" cy="411480"/>
-          </a:xfrm>
-          <a:prstGeom prst="rect">
-            <a:avLst/>
-          </a:prstGeom>
-          <a:noFill/>
-        </p:spPr>
-        <p:txBody>
-          <a:bodyPr wrap="square" anchor="t">
-            <a:spAutoFit/>
-          </a:bodyPr>
-          <a:lstStyle/>
-          <a:p>
-            <a:pPr algn="l">
-              <a:lnSpc>
-                <a:spcPct val="105000"/>
-              </a:lnSpc>
-            </a:pPr>
-            <a:r>
-              <a:rPr sz="1150" b="0">
-                <a:solidFill>
-                  <a:srgbClr val="475569"/>
-                </a:solidFill>
-                <a:latin typeface="Malgun Gothic"/>
-              </a:rPr>
-              <a:t>A. admin.mangoi.co.kr 에서 로그인해요. 휴대폰·태블릿·PC 모두 웹에서 바로 접속할 수 있어요.</a:t>
-            </a:r>
-          </a:p>
-        </p:txBody>
-      </p:sp>
-      <p:sp>
-        <p:nvSpPr>
-          <p:cNvPr id="12" name="Rounded Rectangle 11"/>
-          <p:cNvSpPr/>
-          <p:nvPr/>
-        </p:nvSpPr>
-        <p:spPr>
-          <a:xfrm>
-            <a:off x="365760" y="2542032"/>
-            <a:ext cx="11460175" cy="868680"/>
-          </a:xfrm>
-          <a:prstGeom prst="roundRect">
-            <a:avLst/>
-          </a:prstGeom>
-          <a:solidFill>
-            <a:srgbClr val="F8FAFC"/>
-          </a:solidFill>
-          <a:ln w="12700">
-            <a:solidFill>
-              <a:srgbClr val="E2E8F0"/>
-            </a:solidFill>
-          </a:ln>
-          <a:effectLst/>
-        </p:spPr>
-        <p:style>
-          <a:lnRef idx="1">
-            <a:schemeClr val="accent1"/>
-          </a:lnRef>
-          <a:fillRef idx="3">
-            <a:schemeClr val="accent1"/>
-          </a:fillRef>
-          <a:effectRef idx="2">
-            <a:schemeClr val="accent1"/>
-          </a:effectRef>
-          <a:fontRef idx="minor">
-            <a:schemeClr val="lt1"/>
-          </a:fontRef>
-        </p:style>
-        <p:txBody>
-          <a:bodyPr rtlCol="0" anchor="ctr"/>
-          <a:lstStyle/>
-          <a:p>
-            <a:pPr algn="ctr"/>
-          </a:p>
-        </p:txBody>
-      </p:sp>
-      <p:sp>
-        <p:nvSpPr>
-          <p:cNvPr id="13" name="TextBox 12"/>
-          <p:cNvSpPr txBox="1"/>
-          <p:nvPr/>
-        </p:nvSpPr>
-        <p:spPr>
-          <a:xfrm>
-            <a:off x="548640" y="2615184"/>
-            <a:ext cx="11094415" cy="365760"/>
-          </a:xfrm>
-          <a:prstGeom prst="rect">
-            <a:avLst/>
-          </a:prstGeom>
-          <a:noFill/>
-        </p:spPr>
-        <p:txBody>
-          <a:bodyPr wrap="square" anchor="t">
-            <a:spAutoFit/>
-          </a:bodyPr>
-          <a:lstStyle/>
-          <a:p>
-            <a:pPr algn="l">
-              <a:lnSpc>
-                <a:spcPct val="100000"/>
-              </a:lnSpc>
-            </a:pPr>
-            <a:r>
-              <a:rPr sz="1350" b="1">
-                <a:solidFill>
-                  <a:srgbClr val="4F46E5"/>
-                </a:solidFill>
-                <a:latin typeface="Malgun Gothic"/>
-              </a:rPr>
-              <a:t>Q. 기능이 안 보여요.</a:t>
-            </a:r>
-          </a:p>
-        </p:txBody>
-      </p:sp>
-      <p:sp>
-        <p:nvSpPr>
-          <p:cNvPr id="14" name="TextBox 13"/>
-          <p:cNvSpPr txBox="1"/>
-          <p:nvPr/>
-        </p:nvSpPr>
-        <p:spPr>
-          <a:xfrm>
-            <a:off x="548640" y="2953512"/>
-            <a:ext cx="11094415" cy="411480"/>
-          </a:xfrm>
-          <a:prstGeom prst="rect">
-            <a:avLst/>
-          </a:prstGeom>
-          <a:noFill/>
-        </p:spPr>
-        <p:txBody>
-          <a:bodyPr wrap="square" anchor="t">
-            <a:spAutoFit/>
-          </a:bodyPr>
-          <a:lstStyle/>
-          <a:p>
-            <a:pPr algn="l">
-              <a:lnSpc>
-                <a:spcPct val="105000"/>
-              </a:lnSpc>
-            </a:pPr>
-            <a:r>
-              <a:rPr sz="1150" b="0">
-                <a:solidFill>
-                  <a:srgbClr val="475569"/>
-                </a:solidFill>
-                <a:latin typeface="Malgun Gothic"/>
-              </a:rPr>
-              <a:t>A. 권한(역할)에 따라 메뉴가 달라요. 상단 기능 검색이나 AI 비서에게 이름을 말해 찾으세요.</a:t>
-            </a:r>
-          </a:p>
-        </p:txBody>
-      </p:sp>
-      <p:sp>
-        <p:nvSpPr>
-          <p:cNvPr id="15" name="Rounded Rectangle 14"/>
-          <p:cNvSpPr/>
-          <p:nvPr/>
-        </p:nvSpPr>
-        <p:spPr>
-          <a:xfrm>
-            <a:off x="365760" y="3529584"/>
-            <a:ext cx="11460175" cy="868680"/>
-          </a:xfrm>
-          <a:prstGeom prst="roundRect">
-            <a:avLst/>
-          </a:prstGeom>
-          <a:solidFill>
-            <a:srgbClr val="F8FAFC"/>
-          </a:solidFill>
-          <a:ln w="12700">
-            <a:solidFill>
-              <a:srgbClr val="E2E8F0"/>
-            </a:solidFill>
-          </a:ln>
-          <a:effectLst/>
-        </p:spPr>
-        <p:style>
-          <a:lnRef idx="1">
-            <a:schemeClr val="accent1"/>
-          </a:lnRef>
-          <a:fillRef idx="3">
-            <a:schemeClr val="accent1"/>
-          </a:fillRef>
-          <a:effectRef idx="2">
-            <a:schemeClr val="accent1"/>
-          </a:effectRef>
-          <a:fontRef idx="minor">
-            <a:schemeClr val="lt1"/>
-          </a:fontRef>
-        </p:style>
-        <p:txBody>
-          <a:bodyPr rtlCol="0" anchor="ctr"/>
-          <a:lstStyle/>
-          <a:p>
-            <a:pPr algn="ctr"/>
-          </a:p>
-        </p:txBody>
-      </p:sp>
-      <p:sp>
-        <p:nvSpPr>
-          <p:cNvPr id="16" name="TextBox 15"/>
-          <p:cNvSpPr txBox="1"/>
-          <p:nvPr/>
-        </p:nvSpPr>
-        <p:spPr>
-          <a:xfrm>
-            <a:off x="548640" y="3602736"/>
-            <a:ext cx="11094415" cy="365760"/>
-          </a:xfrm>
-          <a:prstGeom prst="rect">
-            <a:avLst/>
-          </a:prstGeom>
-          <a:noFill/>
-        </p:spPr>
-        <p:txBody>
-          <a:bodyPr wrap="square" anchor="t">
-            <a:spAutoFit/>
-          </a:bodyPr>
-          <a:lstStyle/>
-          <a:p>
-            <a:pPr algn="l">
-              <a:lnSpc>
-                <a:spcPct val="100000"/>
-              </a:lnSpc>
-            </a:pPr>
-            <a:r>
-              <a:rPr sz="1350" b="1">
-                <a:solidFill>
-                  <a:srgbClr val="4F46E5"/>
-                </a:solidFill>
-                <a:latin typeface="Malgun Gothic"/>
-              </a:rPr>
-              <a:t>Q. 학생이 수업 입장이 안 된대요.</a:t>
-            </a:r>
-          </a:p>
-        </p:txBody>
-      </p:sp>
-      <p:sp>
-        <p:nvSpPr>
-          <p:cNvPr id="17" name="TextBox 16"/>
-          <p:cNvSpPr txBox="1"/>
-          <p:nvPr/>
-        </p:nvSpPr>
-        <p:spPr>
-          <a:xfrm>
-            <a:off x="548640" y="3941064"/>
-            <a:ext cx="11094415" cy="411480"/>
-          </a:xfrm>
-          <a:prstGeom prst="rect">
-            <a:avLst/>
-          </a:prstGeom>
-          <a:noFill/>
-        </p:spPr>
-        <p:txBody>
-          <a:bodyPr wrap="square" anchor="t">
-            <a:spAutoFit/>
-          </a:bodyPr>
-          <a:lstStyle/>
-          <a:p>
-            <a:pPr algn="l">
-              <a:lnSpc>
-                <a:spcPct val="105000"/>
-              </a:lnSpc>
-            </a:pPr>
-            <a:r>
-              <a:rPr sz="1150" b="0">
-                <a:solidFill>
-                  <a:srgbClr val="475569"/>
-                </a:solidFill>
-                <a:latin typeface="Malgun Gothic"/>
-              </a:rPr>
-              <a:t>A. 대부분 브라우저 권한 문제예요. 크롬/엣지로 재접속 후 카메라·마이크 ‘허용’을 안내하세요. 카카오톡 안이면 외부 브라우저로 열게 하세요.</a:t>
-            </a:r>
-          </a:p>
-        </p:txBody>
-      </p:sp>
-      <p:sp>
-        <p:nvSpPr>
-          <p:cNvPr id="18" name="Rounded Rectangle 17"/>
-          <p:cNvSpPr/>
-          <p:nvPr/>
-        </p:nvSpPr>
-        <p:spPr>
-          <a:xfrm>
-            <a:off x="365760" y="4517136"/>
-            <a:ext cx="11460175" cy="868680"/>
-          </a:xfrm>
-          <a:prstGeom prst="roundRect">
-            <a:avLst/>
-          </a:prstGeom>
-          <a:solidFill>
-            <a:srgbClr val="F8FAFC"/>
-          </a:solidFill>
-          <a:ln w="12700">
-            <a:solidFill>
-              <a:srgbClr val="E2E8F0"/>
-            </a:solidFill>
-          </a:ln>
-          <a:effectLst/>
-        </p:spPr>
-        <p:style>
-          <a:lnRef idx="1">
-            <a:schemeClr val="accent1"/>
-          </a:lnRef>
-          <a:fillRef idx="3">
-            <a:schemeClr val="accent1"/>
-          </a:fillRef>
-          <a:effectRef idx="2">
-            <a:schemeClr val="accent1"/>
-          </a:effectRef>
-          <a:fontRef idx="minor">
-            <a:schemeClr val="lt1"/>
-          </a:fontRef>
-        </p:style>
-        <p:txBody>
-          <a:bodyPr rtlCol="0" anchor="ctr"/>
-          <a:lstStyle/>
-          <a:p>
-            <a:pPr algn="ctr"/>
-          </a:p>
-        </p:txBody>
-      </p:sp>
-      <p:sp>
-        <p:nvSpPr>
-          <p:cNvPr id="19" name="TextBox 18"/>
-          <p:cNvSpPr txBox="1"/>
-          <p:nvPr/>
-        </p:nvSpPr>
-        <p:spPr>
-          <a:xfrm>
-            <a:off x="548640" y="4590288"/>
-            <a:ext cx="11094415" cy="365760"/>
-          </a:xfrm>
-          <a:prstGeom prst="rect">
-            <a:avLst/>
-          </a:prstGeom>
-          <a:noFill/>
-        </p:spPr>
-        <p:txBody>
-          <a:bodyPr wrap="square" anchor="t">
-            <a:spAutoFit/>
-          </a:bodyPr>
-          <a:lstStyle/>
-          <a:p>
-            <a:pPr algn="l">
-              <a:lnSpc>
-                <a:spcPct val="100000"/>
-              </a:lnSpc>
-            </a:pPr>
-            <a:r>
-              <a:rPr sz="1350" b="1">
-                <a:solidFill>
-                  <a:srgbClr val="4F46E5"/>
-                </a:solidFill>
-                <a:latin typeface="Malgun Gothic"/>
-              </a:rPr>
-              <a:t>Q. AI 비서가 실행까지 하나요?</a:t>
-            </a:r>
-          </a:p>
-        </p:txBody>
-      </p:sp>
-      <p:sp>
-        <p:nvSpPr>
-          <p:cNvPr id="20" name="TextBox 19"/>
-          <p:cNvSpPr txBox="1"/>
-          <p:nvPr/>
-        </p:nvSpPr>
-        <p:spPr>
-          <a:xfrm>
-            <a:off x="548640" y="4928616"/>
-            <a:ext cx="11094415" cy="411480"/>
-          </a:xfrm>
-          <a:prstGeom prst="rect">
-            <a:avLst/>
-          </a:prstGeom>
-          <a:noFill/>
-        </p:spPr>
-        <p:txBody>
-          <a:bodyPr wrap="square" anchor="t">
-            <a:spAutoFit/>
-          </a:bodyPr>
-          <a:lstStyle/>
-          <a:p>
-            <a:pPr algn="l">
-              <a:lnSpc>
-                <a:spcPct val="105000"/>
-              </a:lnSpc>
-            </a:pPr>
-            <a:r>
-              <a:rPr sz="1150" b="0">
-                <a:solidFill>
-                  <a:srgbClr val="475569"/>
-                </a:solidFill>
-                <a:latin typeface="Malgun Gothic"/>
-              </a:rPr>
-              <a:t>A. 조회는 바로, 중요한 처리는 ‘할까요?’로 확인 후 실행해요. 권한이 있는 일만 처리합니다.</a:t>
-            </a:r>
-          </a:p>
-        </p:txBody>
-      </p:sp>
-      <p:sp>
-        <p:nvSpPr>
-          <p:cNvPr id="21" name="Rounded Rectangle 20"/>
-          <p:cNvSpPr/>
-          <p:nvPr/>
-        </p:nvSpPr>
-        <p:spPr>
-          <a:xfrm>
-            <a:off x="365760" y="5504688"/>
-            <a:ext cx="11460175" cy="868680"/>
-          </a:xfrm>
-          <a:prstGeom prst="roundRect">
-            <a:avLst/>
-          </a:prstGeom>
-          <a:solidFill>
-            <a:srgbClr val="F8FAFC"/>
-          </a:solidFill>
-          <a:ln w="12700">
-            <a:solidFill>
-              <a:srgbClr val="E2E8F0"/>
-            </a:solidFill>
-          </a:ln>
-          <a:effectLst/>
-        </p:spPr>
-        <p:style>
-          <a:lnRef idx="1">
-            <a:schemeClr val="accent1"/>
-          </a:lnRef>
-          <a:fillRef idx="3">
-            <a:schemeClr val="accent1"/>
-          </a:fillRef>
-          <a:effectRef idx="2">
-            <a:schemeClr val="accent1"/>
-          </a:effectRef>
-          <a:fontRef idx="minor">
-            <a:schemeClr val="lt1"/>
-          </a:fontRef>
-        </p:style>
-        <p:txBody>
-          <a:bodyPr rtlCol="0" anchor="ctr"/>
-          <a:lstStyle/>
-          <a:p>
-            <a:pPr algn="ctr"/>
-          </a:p>
-        </p:txBody>
-      </p:sp>
-      <p:sp>
-        <p:nvSpPr>
-          <p:cNvPr id="22" name="TextBox 21"/>
-          <p:cNvSpPr txBox="1"/>
-          <p:nvPr/>
-        </p:nvSpPr>
-        <p:spPr>
-          <a:xfrm>
-            <a:off x="548640" y="5577840"/>
-            <a:ext cx="11094415" cy="365760"/>
-          </a:xfrm>
-          <a:prstGeom prst="rect">
-            <a:avLst/>
-          </a:prstGeom>
-          <a:noFill/>
-        </p:spPr>
-        <p:txBody>
-          <a:bodyPr wrap="square" anchor="t">
-            <a:spAutoFit/>
-          </a:bodyPr>
-          <a:lstStyle/>
-          <a:p>
-            <a:pPr algn="l">
-              <a:lnSpc>
-                <a:spcPct val="100000"/>
-              </a:lnSpc>
-            </a:pPr>
-            <a:r>
-              <a:rPr sz="1350" b="1">
-                <a:solidFill>
-                  <a:srgbClr val="4F46E5"/>
-                </a:solidFill>
-                <a:latin typeface="Malgun Gothic"/>
-              </a:rPr>
-              <a:t>Q. 환불 계산이 헷갈려요.</a:t>
-            </a:r>
-          </a:p>
-        </p:txBody>
-      </p:sp>
-      <p:sp>
-        <p:nvSpPr>
-          <p:cNvPr id="23" name="TextBox 22"/>
-          <p:cNvSpPr txBox="1"/>
-          <p:nvPr/>
-        </p:nvSpPr>
-        <p:spPr>
-          <a:xfrm>
-            <a:off x="548640" y="5916168"/>
-            <a:ext cx="11094415" cy="411480"/>
-          </a:xfrm>
-          <a:prstGeom prst="rect">
-            <a:avLst/>
-          </a:prstGeom>
-          <a:noFill/>
-        </p:spPr>
-        <p:txBody>
-          <a:bodyPr wrap="square" anchor="t">
-            <a:spAutoFit/>
-          </a:bodyPr>
-          <a:lstStyle/>
-          <a:p>
-            <a:pPr algn="l">
-              <a:lnSpc>
-                <a:spcPct val="105000"/>
-              </a:lnSpc>
-            </a:pPr>
-            <a:r>
-              <a:rPr sz="1150" b="0">
-                <a:solidFill>
-                  <a:srgbClr val="475569"/>
-                </a:solidFill>
-                <a:latin typeface="Malgun Gothic"/>
-              </a:rPr>
-              <a:t>A. 환불 규정표대로 자동 계산되며, 할인 결제는 정가 기준으로 재정산됩니다.</a:t>
-            </a:r>
-          </a:p>
-        </p:txBody>
-      </p:sp>
-      <p:sp>
-        <p:nvSpPr>
-          <p:cNvPr id="24" name="Rounded Rectangle 23"/>
-          <p:cNvSpPr/>
-          <p:nvPr/>
-        </p:nvSpPr>
-        <p:spPr>
-          <a:xfrm>
-            <a:off x="365760" y="6492240"/>
-            <a:ext cx="11460175" cy="868680"/>
-          </a:xfrm>
-          <a:prstGeom prst="roundRect">
-            <a:avLst/>
-          </a:prstGeom>
-          <a:solidFill>
-            <a:srgbClr val="F8FAFC"/>
-          </a:solidFill>
-          <a:ln w="12700">
-            <a:solidFill>
-              <a:srgbClr val="E2E8F0"/>
-            </a:solidFill>
-          </a:ln>
-          <a:effectLst/>
-        </p:spPr>
-        <p:style>
-          <a:lnRef idx="1">
-            <a:schemeClr val="accent1"/>
-          </a:lnRef>
-          <a:fillRef idx="3">
-            <a:schemeClr val="accent1"/>
-          </a:fillRef>
-          <a:effectRef idx="2">
-            <a:schemeClr val="accent1"/>
-          </a:effectRef>
-          <a:fontRef idx="minor">
-            <a:schemeClr val="lt1"/>
-          </a:fontRef>
-        </p:style>
-        <p:txBody>
-          <a:bodyPr rtlCol="0" anchor="ctr"/>
-          <a:lstStyle/>
-          <a:p>
-            <a:pPr algn="ctr"/>
-          </a:p>
-        </p:txBody>
-      </p:sp>
-      <p:sp>
-        <p:nvSpPr>
-          <p:cNvPr id="25" name="TextBox 24"/>
-          <p:cNvSpPr txBox="1"/>
-          <p:nvPr/>
-        </p:nvSpPr>
-        <p:spPr>
-          <a:xfrm>
-            <a:off x="548640" y="6565392"/>
-            <a:ext cx="11094415" cy="365760"/>
-          </a:xfrm>
-          <a:prstGeom prst="rect">
-            <a:avLst/>
-          </a:prstGeom>
-          <a:noFill/>
-        </p:spPr>
-        <p:txBody>
-          <a:bodyPr wrap="square" anchor="t">
-            <a:spAutoFit/>
-          </a:bodyPr>
-          <a:lstStyle/>
-          <a:p>
-            <a:pPr algn="l">
-              <a:lnSpc>
-                <a:spcPct val="100000"/>
-              </a:lnSpc>
-            </a:pPr>
-            <a:r>
-              <a:rPr sz="1350" b="1">
-                <a:solidFill>
-                  <a:srgbClr val="4F46E5"/>
-                </a:solidFill>
-                <a:latin typeface="Malgun Gothic"/>
-              </a:rPr>
-              <a:t>Q. 이탈이 걱정돼요.</a:t>
-            </a:r>
-          </a:p>
-        </p:txBody>
-      </p:sp>
-      <p:sp>
-        <p:nvSpPr>
-          <p:cNvPr id="26" name="TextBox 25"/>
-          <p:cNvSpPr txBox="1"/>
-          <p:nvPr/>
-        </p:nvSpPr>
-        <p:spPr>
-          <a:xfrm>
-            <a:off x="548640" y="6903720"/>
-            <a:ext cx="11094415" cy="411480"/>
-          </a:xfrm>
-          <a:prstGeom prst="rect">
-            <a:avLst/>
-          </a:prstGeom>
-          <a:noFill/>
-        </p:spPr>
-        <p:txBody>
-          <a:bodyPr wrap="square" anchor="t">
-            <a:spAutoFit/>
-          </a:bodyPr>
-          <a:lstStyle/>
-          <a:p>
-            <a:pPr algn="l">
-              <a:lnSpc>
-                <a:spcPct val="105000"/>
-              </a:lnSpc>
-            </a:pPr>
-            <a:r>
-              <a:rPr sz="1150" b="0">
-                <a:solidFill>
-                  <a:srgbClr val="475569"/>
-                </a:solidFill>
-                <a:latin typeface="Malgun Gothic"/>
-              </a:rPr>
-              <a:t>A. 리텐션 센터의 이탈위험·전염 관계망으로 미리 찾아 알림톡·상담으로 개입하세요.</a:t>
-            </a:r>
-          </a:p>
-        </p:txBody>
-      </p:sp>
-    </p:spTree>
-  </p:cSld>
-  <p:clrMapOvr>
-    <a:masterClrMapping/>
-  </p:clrMapOvr>
-</p:sld>
-</file>
-
-<file path=ppt/slides/slide44.xml><?xml version="1.0" encoding="utf-8"?>
-<p:sld xmlns:a="http://schemas.openxmlformats.org/drawingml/2006/main" xmlns:p="http://schemas.openxmlformats.org/presentationml/2006/main" xmlns:r="http://schemas.openxmlformats.org/officeDocument/2006/relationships">
-  <p:cSld>
-    <p:bg>
-      <p:bgPr>
-        <a:solidFill>
-          <a:srgbClr val="EEF2FF"/>
-        </a:solidFill>
-        <a:effectLst/>
-      </p:bgPr>
-    </p:bg>
-    <p:spTree>
-      <p:nvGrpSpPr>
-        <p:cNvPr id="1" name=""/>
-        <p:cNvGrpSpPr/>
-        <p:nvPr/>
-      </p:nvGrpSpPr>
-      <p:grpSpPr/>
-      <p:sp>
-        <p:nvSpPr>
-          <p:cNvPr id="2" name="Rectangle 1"/>
-          <p:cNvSpPr/>
-          <p:nvPr/>
-        </p:nvSpPr>
-        <p:spPr>
-          <a:xfrm>
-            <a:off x="0" y="0"/>
-            <a:ext cx="12191695" cy="566928"/>
-          </a:xfrm>
-          <a:prstGeom prst="rect">
-            <a:avLst/>
-          </a:prstGeom>
-          <a:solidFill>
-            <a:srgbClr val="4F46E5"/>
-          </a:solidFill>
-          <a:ln>
-            <a:noFill/>
-          </a:ln>
-          <a:effectLst/>
-        </p:spPr>
-        <p:style>
-          <a:lnRef idx="1">
-            <a:schemeClr val="accent1"/>
-          </a:lnRef>
-          <a:fillRef idx="3">
-            <a:schemeClr val="accent1"/>
-          </a:fillRef>
-          <a:effectRef idx="2">
-            <a:schemeClr val="accent1"/>
-          </a:effectRef>
-          <a:fontRef idx="minor">
-            <a:schemeClr val="lt1"/>
-          </a:fontRef>
-        </p:style>
-        <p:txBody>
-          <a:bodyPr rtlCol="0" anchor="ctr"/>
-          <a:lstStyle/>
-          <a:p>
-            <a:pPr algn="ctr"/>
-          </a:p>
-        </p:txBody>
-      </p:sp>
-      <p:sp>
-        <p:nvSpPr>
-          <p:cNvPr id="3" name="Rectangle 2"/>
-          <p:cNvSpPr/>
-          <p:nvPr/>
-        </p:nvSpPr>
-        <p:spPr>
-          <a:xfrm>
-            <a:off x="0" y="566928"/>
-            <a:ext cx="12191695" cy="54864"/>
-          </a:xfrm>
-          <a:prstGeom prst="rect">
-            <a:avLst/>
-          </a:prstGeom>
-          <a:solidFill>
-            <a:srgbClr val="FF9F1C"/>
-          </a:solidFill>
-          <a:ln>
-            <a:noFill/>
-          </a:ln>
-          <a:effectLst/>
-        </p:spPr>
-        <p:style>
-          <a:lnRef idx="1">
-            <a:schemeClr val="accent1"/>
-          </a:lnRef>
-          <a:fillRef idx="3">
-            <a:schemeClr val="accent1"/>
-          </a:fillRef>
-          <a:effectRef idx="2">
-            <a:schemeClr val="accent1"/>
-          </a:effectRef>
-          <a:fontRef idx="minor">
-            <a:schemeClr val="lt1"/>
-          </a:fontRef>
-        </p:style>
-        <p:txBody>
-          <a:bodyPr rtlCol="0" anchor="ctr"/>
-          <a:lstStyle/>
-          <a:p>
-            <a:pPr algn="ctr"/>
-          </a:p>
-        </p:txBody>
-      </p:sp>
-      <p:sp>
-        <p:nvSpPr>
-          <p:cNvPr id="4" name="TextBox 3"/>
-          <p:cNvSpPr txBox="1"/>
-          <p:nvPr/>
-        </p:nvSpPr>
-        <p:spPr>
-          <a:xfrm>
-            <a:off x="365760" y="27432"/>
-            <a:ext cx="7315200" cy="502920"/>
-          </a:xfrm>
-          <a:prstGeom prst="rect">
-            <a:avLst/>
-          </a:prstGeom>
-          <a:noFill/>
-        </p:spPr>
-        <p:txBody>
-          <a:bodyPr wrap="square" anchor="ctr">
-            <a:spAutoFit/>
-          </a:bodyPr>
-          <a:lstStyle/>
-          <a:p>
-            <a:pPr algn="l">
-              <a:lnSpc>
-                <a:spcPct val="100000"/>
-              </a:lnSpc>
-            </a:pPr>
-            <a:r>
-              <a:rPr sz="1500" b="1">
-                <a:solidFill>
-                  <a:srgbClr val="FFFFFF"/>
-                </a:solidFill>
-                <a:latin typeface="Malgun Gothic"/>
-              </a:rPr>
-              <a:t>🏫 망고아이 관리자용 사용설명서</a:t>
-            </a:r>
-          </a:p>
-        </p:txBody>
-      </p:sp>
-      <p:sp>
-        <p:nvSpPr>
-          <p:cNvPr id="5" name="TextBox 4"/>
-          <p:cNvSpPr txBox="1"/>
-          <p:nvPr/>
-        </p:nvSpPr>
-        <p:spPr>
-          <a:xfrm>
-            <a:off x="8168335" y="27432"/>
-            <a:ext cx="3657600" cy="502920"/>
-          </a:xfrm>
-          <a:prstGeom prst="rect">
-            <a:avLst/>
-          </a:prstGeom>
-          <a:noFill/>
-        </p:spPr>
-        <p:txBody>
-          <a:bodyPr wrap="square" anchor="ctr">
-            <a:spAutoFit/>
-          </a:bodyPr>
-          <a:lstStyle/>
-          <a:p>
-            <a:pPr algn="r">
-              <a:lnSpc>
-                <a:spcPct val="100000"/>
-              </a:lnSpc>
-            </a:pPr>
-            <a:r>
-              <a:rPr sz="1300" b="1">
-                <a:solidFill>
-                  <a:srgbClr val="F1F5F9"/>
-                </a:solidFill>
-                <a:latin typeface="Malgun Gothic"/>
-              </a:rPr>
-              <a:t>체크리스트</a:t>
-            </a:r>
-          </a:p>
-        </p:txBody>
-      </p:sp>
-      <p:sp>
-        <p:nvSpPr>
-          <p:cNvPr id="6" name="Rounded Rectangle 5"/>
-          <p:cNvSpPr/>
-          <p:nvPr/>
-        </p:nvSpPr>
-        <p:spPr>
-          <a:xfrm>
-            <a:off x="365760" y="841248"/>
-            <a:ext cx="658368" cy="512064"/>
-          </a:xfrm>
-          <a:prstGeom prst="roundRect">
-            <a:avLst/>
-          </a:prstGeom>
-          <a:solidFill>
-            <a:srgbClr val="4F46E5"/>
-          </a:solidFill>
-          <a:ln>
-            <a:noFill/>
-          </a:ln>
-          <a:effectLst/>
-        </p:spPr>
-        <p:style>
-          <a:lnRef idx="1">
-            <a:schemeClr val="accent1"/>
-          </a:lnRef>
-          <a:fillRef idx="3">
-            <a:schemeClr val="accent1"/>
-          </a:fillRef>
-          <a:effectRef idx="2">
-            <a:schemeClr val="accent1"/>
-          </a:effectRef>
-          <a:fontRef idx="minor">
-            <a:schemeClr val="lt1"/>
-          </a:fontRef>
-        </p:style>
-        <p:txBody>
-          <a:bodyPr rtlCol="0" anchor="ctr"/>
-          <a:lstStyle/>
-          <a:p>
-            <a:pPr algn="ctr"/>
-          </a:p>
-        </p:txBody>
-      </p:sp>
-      <p:sp>
-        <p:nvSpPr>
-          <p:cNvPr id="7" name="TextBox 6"/>
-          <p:cNvSpPr txBox="1"/>
-          <p:nvPr/>
-        </p:nvSpPr>
-        <p:spPr>
-          <a:xfrm>
-            <a:off x="365760" y="841248"/>
-            <a:ext cx="658368" cy="512064"/>
-          </a:xfrm>
-          <a:prstGeom prst="rect">
-            <a:avLst/>
-          </a:prstGeom>
-          <a:noFill/>
-        </p:spPr>
-        <p:txBody>
-          <a:bodyPr wrap="square" anchor="ctr">
-            <a:spAutoFit/>
-          </a:bodyPr>
-          <a:lstStyle/>
-          <a:p>
-            <a:pPr algn="ctr">
-              <a:lnSpc>
-                <a:spcPct val="100000"/>
-              </a:lnSpc>
-            </a:pPr>
-            <a:r>
-              <a:rPr sz="1700" b="1">
-                <a:solidFill>
-                  <a:srgbClr val="FFFFFF"/>
-                </a:solidFill>
-                <a:latin typeface="Malgun Gothic"/>
-              </a:rPr>
-              <a:t>40</a:t>
-            </a:r>
-          </a:p>
-        </p:txBody>
-      </p:sp>
-      <p:sp>
-        <p:nvSpPr>
-          <p:cNvPr id="8" name="TextBox 7"/>
-          <p:cNvSpPr txBox="1"/>
-          <p:nvPr/>
-        </p:nvSpPr>
-        <p:spPr>
-          <a:xfrm>
-            <a:off x="1143000" y="868680"/>
-            <a:ext cx="9144000" cy="457200"/>
-          </a:xfrm>
-          <a:prstGeom prst="rect">
-            <a:avLst/>
-          </a:prstGeom>
-          <a:noFill/>
-        </p:spPr>
-        <p:txBody>
-          <a:bodyPr wrap="square" anchor="t">
-            <a:spAutoFit/>
-          </a:bodyPr>
-          <a:lstStyle/>
-          <a:p>
-            <a:pPr algn="l">
-              <a:lnSpc>
-                <a:spcPct val="100000"/>
-              </a:lnSpc>
-            </a:pPr>
-            <a:r>
-              <a:rPr sz="2200" b="1">
-                <a:solidFill>
-                  <a:srgbClr val="4F46E5"/>
-                </a:solidFill>
-                <a:latin typeface="Malgun Gothic"/>
-              </a:rPr>
-              <a:t>✅ 매일 운영 체크리스트</a:t>
-            </a:r>
-          </a:p>
-        </p:txBody>
-      </p:sp>
-      <p:sp>
-        <p:nvSpPr>
-          <p:cNvPr id="9" name="Rounded Rectangle 8"/>
-          <p:cNvSpPr/>
-          <p:nvPr/>
-        </p:nvSpPr>
-        <p:spPr>
-          <a:xfrm>
-            <a:off x="457200" y="1645920"/>
-            <a:ext cx="292608" cy="292608"/>
-          </a:xfrm>
-          <a:prstGeom prst="roundRect">
-            <a:avLst/>
-          </a:prstGeom>
-          <a:solidFill>
-            <a:srgbClr val="FFFFFF"/>
-          </a:solidFill>
-          <a:ln w="12700">
-            <a:solidFill>
-              <a:srgbClr val="4F46E5"/>
-            </a:solidFill>
-          </a:ln>
-          <a:effectLst/>
-        </p:spPr>
-        <p:style>
-          <a:lnRef idx="1">
-            <a:schemeClr val="accent1"/>
-          </a:lnRef>
-          <a:fillRef idx="3">
-            <a:schemeClr val="accent1"/>
-          </a:fillRef>
-          <a:effectRef idx="2">
-            <a:schemeClr val="accent1"/>
-          </a:effectRef>
-          <a:fontRef idx="minor">
-            <a:schemeClr val="lt1"/>
-          </a:fontRef>
-        </p:style>
-        <p:txBody>
-          <a:bodyPr rtlCol="0" anchor="ctr"/>
-          <a:lstStyle/>
-          <a:p>
-            <a:pPr algn="ctr"/>
-          </a:p>
-        </p:txBody>
-      </p:sp>
-      <p:sp>
-        <p:nvSpPr>
-          <p:cNvPr id="10" name="TextBox 9"/>
-          <p:cNvSpPr txBox="1"/>
-          <p:nvPr/>
-        </p:nvSpPr>
-        <p:spPr>
-          <a:xfrm>
-            <a:off x="914400" y="1581912"/>
-            <a:ext cx="10058400" cy="411480"/>
-          </a:xfrm>
-          <a:prstGeom prst="rect">
-            <a:avLst/>
-          </a:prstGeom>
-          <a:noFill/>
-        </p:spPr>
-        <p:txBody>
-          <a:bodyPr wrap="square" anchor="t">
-            <a:spAutoFit/>
-          </a:bodyPr>
-          <a:lstStyle/>
-          <a:p>
-            <a:pPr algn="l">
-              <a:lnSpc>
-                <a:spcPct val="100000"/>
-              </a:lnSpc>
-            </a:pPr>
-            <a:r>
-              <a:rPr sz="1500" b="1">
-                <a:solidFill>
-                  <a:srgbClr val="334155"/>
-                </a:solidFill>
-                <a:latin typeface="Malgun Gothic"/>
-              </a:rPr>
-              <a:t>오늘 매출·재원·출석률 지표를 확인했나요?</a:t>
-            </a:r>
-          </a:p>
-        </p:txBody>
-      </p:sp>
-      <p:sp>
-        <p:nvSpPr>
-          <p:cNvPr id="11" name="Rounded Rectangle 10"/>
-          <p:cNvSpPr/>
-          <p:nvPr/>
-        </p:nvSpPr>
-        <p:spPr>
-          <a:xfrm>
-            <a:off x="457200" y="2212848"/>
-            <a:ext cx="292608" cy="292608"/>
-          </a:xfrm>
-          <a:prstGeom prst="roundRect">
-            <a:avLst/>
-          </a:prstGeom>
-          <a:solidFill>
-            <a:srgbClr val="FFFFFF"/>
-          </a:solidFill>
-          <a:ln w="12700">
-            <a:solidFill>
-              <a:srgbClr val="4F46E5"/>
-            </a:solidFill>
-          </a:ln>
-          <a:effectLst/>
-        </p:spPr>
-        <p:style>
-          <a:lnRef idx="1">
-            <a:schemeClr val="accent1"/>
-          </a:lnRef>
-          <a:fillRef idx="3">
-            <a:schemeClr val="accent1"/>
-          </a:fillRef>
-          <a:effectRef idx="2">
-            <a:schemeClr val="accent1"/>
-          </a:effectRef>
-          <a:fontRef idx="minor">
-            <a:schemeClr val="lt1"/>
-          </a:fontRef>
-        </p:style>
-        <p:txBody>
-          <a:bodyPr rtlCol="0" anchor="ctr"/>
-          <a:lstStyle/>
-          <a:p>
-            <a:pPr algn="ctr"/>
-          </a:p>
-        </p:txBody>
-      </p:sp>
-      <p:sp>
-        <p:nvSpPr>
-          <p:cNvPr id="12" name="TextBox 11"/>
-          <p:cNvSpPr txBox="1"/>
-          <p:nvPr/>
-        </p:nvSpPr>
-        <p:spPr>
-          <a:xfrm>
-            <a:off x="914400" y="2148840"/>
-            <a:ext cx="10058400" cy="411480"/>
-          </a:xfrm>
-          <a:prstGeom prst="rect">
-            <a:avLst/>
-          </a:prstGeom>
-          <a:noFill/>
-        </p:spPr>
-        <p:txBody>
-          <a:bodyPr wrap="square" anchor="t">
-            <a:spAutoFit/>
-          </a:bodyPr>
-          <a:lstStyle/>
-          <a:p>
-            <a:pPr algn="l">
-              <a:lnSpc>
-                <a:spcPct val="100000"/>
-              </a:lnSpc>
-            </a:pPr>
-            <a:r>
-              <a:rPr sz="1500" b="1">
-                <a:solidFill>
-                  <a:srgbClr val="334155"/>
-                </a:solidFill>
-                <a:latin typeface="Malgun Gothic"/>
-              </a:rPr>
-              <a:t>신규 상담/문의를 처리했나요?</a:t>
-            </a:r>
-          </a:p>
-        </p:txBody>
-      </p:sp>
-      <p:sp>
-        <p:nvSpPr>
-          <p:cNvPr id="13" name="Rounded Rectangle 12"/>
-          <p:cNvSpPr/>
-          <p:nvPr/>
-        </p:nvSpPr>
-        <p:spPr>
-          <a:xfrm>
-            <a:off x="457200" y="2779776"/>
-            <a:ext cx="292608" cy="292608"/>
-          </a:xfrm>
-          <a:prstGeom prst="roundRect">
-            <a:avLst/>
-          </a:prstGeom>
-          <a:solidFill>
-            <a:srgbClr val="FFFFFF"/>
-          </a:solidFill>
-          <a:ln w="12700">
-            <a:solidFill>
-              <a:srgbClr val="4F46E5"/>
-            </a:solidFill>
-          </a:ln>
-          <a:effectLst/>
-        </p:spPr>
-        <p:style>
-          <a:lnRef idx="1">
-            <a:schemeClr val="accent1"/>
-          </a:lnRef>
-          <a:fillRef idx="3">
-            <a:schemeClr val="accent1"/>
-          </a:fillRef>
-          <a:effectRef idx="2">
-            <a:schemeClr val="accent1"/>
-          </a:effectRef>
-          <a:fontRef idx="minor">
-            <a:schemeClr val="lt1"/>
-          </a:fontRef>
-        </p:style>
-        <p:txBody>
-          <a:bodyPr rtlCol="0" anchor="ctr"/>
-          <a:lstStyle/>
-          <a:p>
-            <a:pPr algn="ctr"/>
-          </a:p>
-        </p:txBody>
-      </p:sp>
-      <p:sp>
-        <p:nvSpPr>
-          <p:cNvPr id="14" name="TextBox 13"/>
-          <p:cNvSpPr txBox="1"/>
-          <p:nvPr/>
-        </p:nvSpPr>
-        <p:spPr>
-          <a:xfrm>
-            <a:off x="914400" y="2715768"/>
-            <a:ext cx="10058400" cy="411480"/>
-          </a:xfrm>
-          <a:prstGeom prst="rect">
-            <a:avLst/>
-          </a:prstGeom>
-          <a:noFill/>
-        </p:spPr>
-        <p:txBody>
-          <a:bodyPr wrap="square" anchor="t">
-            <a:spAutoFit/>
-          </a:bodyPr>
-          <a:lstStyle/>
-          <a:p>
-            <a:pPr algn="l">
-              <a:lnSpc>
-                <a:spcPct val="100000"/>
-              </a:lnSpc>
-            </a:pPr>
-            <a:r>
-              <a:rPr sz="1500" b="1">
-                <a:solidFill>
-                  <a:srgbClr val="334155"/>
-                </a:solidFill>
-                <a:latin typeface="Malgun Gothic"/>
-              </a:rPr>
-              <a:t>미납·환불 건을 확인했나요?</a:t>
-            </a:r>
-          </a:p>
-        </p:txBody>
-      </p:sp>
-      <p:sp>
-        <p:nvSpPr>
-          <p:cNvPr id="15" name="Rounded Rectangle 14"/>
-          <p:cNvSpPr/>
-          <p:nvPr/>
-        </p:nvSpPr>
-        <p:spPr>
-          <a:xfrm>
-            <a:off x="457200" y="3346704"/>
-            <a:ext cx="292608" cy="292608"/>
-          </a:xfrm>
-          <a:prstGeom prst="roundRect">
-            <a:avLst/>
-          </a:prstGeom>
-          <a:solidFill>
-            <a:srgbClr val="FFFFFF"/>
-          </a:solidFill>
-          <a:ln w="12700">
-            <a:solidFill>
-              <a:srgbClr val="4F46E5"/>
-            </a:solidFill>
-          </a:ln>
-          <a:effectLst/>
-        </p:spPr>
-        <p:style>
-          <a:lnRef idx="1">
-            <a:schemeClr val="accent1"/>
-          </a:lnRef>
-          <a:fillRef idx="3">
-            <a:schemeClr val="accent1"/>
-          </a:fillRef>
-          <a:effectRef idx="2">
-            <a:schemeClr val="accent1"/>
-          </a:effectRef>
-          <a:fontRef idx="minor">
-            <a:schemeClr val="lt1"/>
-          </a:fontRef>
-        </p:style>
-        <p:txBody>
-          <a:bodyPr rtlCol="0" anchor="ctr"/>
-          <a:lstStyle/>
-          <a:p>
-            <a:pPr algn="ctr"/>
-          </a:p>
-        </p:txBody>
-      </p:sp>
-      <p:sp>
-        <p:nvSpPr>
-          <p:cNvPr id="16" name="TextBox 15"/>
-          <p:cNvSpPr txBox="1"/>
-          <p:nvPr/>
-        </p:nvSpPr>
-        <p:spPr>
-          <a:xfrm>
-            <a:off x="914400" y="3282696"/>
-            <a:ext cx="10058400" cy="411480"/>
-          </a:xfrm>
-          <a:prstGeom prst="rect">
-            <a:avLst/>
-          </a:prstGeom>
-          <a:noFill/>
-        </p:spPr>
-        <p:txBody>
-          <a:bodyPr wrap="square" anchor="t">
-            <a:spAutoFit/>
-          </a:bodyPr>
-          <a:lstStyle/>
-          <a:p>
-            <a:pPr algn="l">
-              <a:lnSpc>
-                <a:spcPct val="100000"/>
-              </a:lnSpc>
-            </a:pPr>
-            <a:r>
-              <a:rPr sz="1500" b="1">
-                <a:solidFill>
-                  <a:srgbClr val="334155"/>
-                </a:solidFill>
-                <a:latin typeface="Malgun Gothic"/>
-              </a:rPr>
-              <a:t>실시간 수업(LIVE) 상태를 점검했나요?</a:t>
-            </a:r>
-          </a:p>
-        </p:txBody>
-      </p:sp>
-      <p:sp>
-        <p:nvSpPr>
-          <p:cNvPr id="17" name="Rounded Rectangle 16"/>
-          <p:cNvSpPr/>
-          <p:nvPr/>
-        </p:nvSpPr>
-        <p:spPr>
-          <a:xfrm>
-            <a:off x="457200" y="3913632"/>
-            <a:ext cx="292608" cy="292608"/>
-          </a:xfrm>
-          <a:prstGeom prst="roundRect">
-            <a:avLst/>
-          </a:prstGeom>
-          <a:solidFill>
-            <a:srgbClr val="FFFFFF"/>
-          </a:solidFill>
-          <a:ln w="12700">
-            <a:solidFill>
-              <a:srgbClr val="4F46E5"/>
-            </a:solidFill>
-          </a:ln>
-          <a:effectLst/>
-        </p:spPr>
-        <p:style>
-          <a:lnRef idx="1">
-            <a:schemeClr val="accent1"/>
-          </a:lnRef>
-          <a:fillRef idx="3">
-            <a:schemeClr val="accent1"/>
-          </a:fillRef>
-          <a:effectRef idx="2">
-            <a:schemeClr val="accent1"/>
-          </a:effectRef>
-          <a:fontRef idx="minor">
-            <a:schemeClr val="lt1"/>
-          </a:fontRef>
-        </p:style>
-        <p:txBody>
-          <a:bodyPr rtlCol="0" anchor="ctr"/>
-          <a:lstStyle/>
-          <a:p>
-            <a:pPr algn="ctr"/>
-          </a:p>
-        </p:txBody>
-      </p:sp>
-      <p:sp>
-        <p:nvSpPr>
-          <p:cNvPr id="18" name="TextBox 17"/>
-          <p:cNvSpPr txBox="1"/>
-          <p:nvPr/>
-        </p:nvSpPr>
-        <p:spPr>
-          <a:xfrm>
-            <a:off x="914400" y="3849624"/>
-            <a:ext cx="10058400" cy="411480"/>
-          </a:xfrm>
-          <a:prstGeom prst="rect">
-            <a:avLst/>
-          </a:prstGeom>
-          <a:noFill/>
-        </p:spPr>
-        <p:txBody>
-          <a:bodyPr wrap="square" anchor="t">
-            <a:spAutoFit/>
-          </a:bodyPr>
-          <a:lstStyle/>
-          <a:p>
-            <a:pPr algn="l">
-              <a:lnSpc>
-                <a:spcPct val="100000"/>
-              </a:lnSpc>
-            </a:pPr>
-            <a:r>
-              <a:rPr sz="1500" b="1">
-                <a:solidFill>
-                  <a:srgbClr val="334155"/>
-                </a:solidFill>
-                <a:latin typeface="Malgun Gothic"/>
-              </a:rPr>
-              <a:t>이탈위험이 오른 학생을 챙겼나요?</a:t>
-            </a:r>
-          </a:p>
-        </p:txBody>
-      </p:sp>
-      <p:sp>
-        <p:nvSpPr>
-          <p:cNvPr id="19" name="Rounded Rectangle 18"/>
-          <p:cNvSpPr/>
-          <p:nvPr/>
-        </p:nvSpPr>
-        <p:spPr>
-          <a:xfrm>
-            <a:off x="457200" y="4480560"/>
-            <a:ext cx="292608" cy="292608"/>
-          </a:xfrm>
-          <a:prstGeom prst="roundRect">
-            <a:avLst/>
-          </a:prstGeom>
-          <a:solidFill>
-            <a:srgbClr val="FFFFFF"/>
-          </a:solidFill>
-          <a:ln w="12700">
-            <a:solidFill>
-              <a:srgbClr val="4F46E5"/>
-            </a:solidFill>
-          </a:ln>
-          <a:effectLst/>
-        </p:spPr>
-        <p:style>
-          <a:lnRef idx="1">
-            <a:schemeClr val="accent1"/>
-          </a:lnRef>
-          <a:fillRef idx="3">
-            <a:schemeClr val="accent1"/>
-          </a:fillRef>
-          <a:effectRef idx="2">
-            <a:schemeClr val="accent1"/>
-          </a:effectRef>
-          <a:fontRef idx="minor">
-            <a:schemeClr val="lt1"/>
-          </a:fontRef>
-        </p:style>
-        <p:txBody>
-          <a:bodyPr rtlCol="0" anchor="ctr"/>
-          <a:lstStyle/>
-          <a:p>
-            <a:pPr algn="ctr"/>
-          </a:p>
-        </p:txBody>
-      </p:sp>
-      <p:sp>
-        <p:nvSpPr>
-          <p:cNvPr id="20" name="TextBox 19"/>
-          <p:cNvSpPr txBox="1"/>
-          <p:nvPr/>
-        </p:nvSpPr>
-        <p:spPr>
-          <a:xfrm>
-            <a:off x="914400" y="4416552"/>
-            <a:ext cx="10058400" cy="411480"/>
-          </a:xfrm>
-          <a:prstGeom prst="rect">
-            <a:avLst/>
-          </a:prstGeom>
-          <a:noFill/>
-        </p:spPr>
-        <p:txBody>
-          <a:bodyPr wrap="square" anchor="t">
-            <a:spAutoFit/>
-          </a:bodyPr>
-          <a:lstStyle/>
-          <a:p>
-            <a:pPr algn="l">
-              <a:lnSpc>
-                <a:spcPct val="100000"/>
-              </a:lnSpc>
-            </a:pPr>
-            <a:r>
-              <a:rPr sz="1500" b="1">
-                <a:solidFill>
-                  <a:srgbClr val="334155"/>
-                </a:solidFill>
-                <a:latin typeface="Malgun Gothic"/>
-              </a:rPr>
-              <a:t>강사 평가/코칭 피드백을 반영했나요?</a:t>
-            </a:r>
-          </a:p>
-        </p:txBody>
-      </p:sp>
-      <p:sp>
-        <p:nvSpPr>
-          <p:cNvPr id="21" name="Rounded Rectangle 20"/>
-          <p:cNvSpPr/>
-          <p:nvPr/>
-        </p:nvSpPr>
-        <p:spPr>
-          <a:xfrm>
-            <a:off x="457200" y="5047488"/>
-            <a:ext cx="292608" cy="292608"/>
-          </a:xfrm>
-          <a:prstGeom prst="roundRect">
-            <a:avLst/>
-          </a:prstGeom>
-          <a:solidFill>
-            <a:srgbClr val="FFFFFF"/>
-          </a:solidFill>
-          <a:ln w="12700">
-            <a:solidFill>
-              <a:srgbClr val="4F46E5"/>
-            </a:solidFill>
-          </a:ln>
-          <a:effectLst/>
-        </p:spPr>
-        <p:style>
-          <a:lnRef idx="1">
-            <a:schemeClr val="accent1"/>
-          </a:lnRef>
-          <a:fillRef idx="3">
-            <a:schemeClr val="accent1"/>
-          </a:fillRef>
-          <a:effectRef idx="2">
-            <a:schemeClr val="accent1"/>
-          </a:effectRef>
-          <a:fontRef idx="minor">
-            <a:schemeClr val="lt1"/>
-          </a:fontRef>
-        </p:style>
-        <p:txBody>
-          <a:bodyPr rtlCol="0" anchor="ctr"/>
-          <a:lstStyle/>
-          <a:p>
-            <a:pPr algn="ctr"/>
-          </a:p>
-        </p:txBody>
-      </p:sp>
-      <p:sp>
-        <p:nvSpPr>
-          <p:cNvPr id="22" name="TextBox 21"/>
-          <p:cNvSpPr txBox="1"/>
-          <p:nvPr/>
-        </p:nvSpPr>
-        <p:spPr>
-          <a:xfrm>
-            <a:off x="914400" y="4983480"/>
-            <a:ext cx="10058400" cy="411480"/>
-          </a:xfrm>
-          <a:prstGeom prst="rect">
-            <a:avLst/>
-          </a:prstGeom>
-          <a:noFill/>
-        </p:spPr>
-        <p:txBody>
-          <a:bodyPr wrap="square" anchor="t">
-            <a:spAutoFit/>
-          </a:bodyPr>
-          <a:lstStyle/>
-          <a:p>
-            <a:pPr algn="l">
-              <a:lnSpc>
-                <a:spcPct val="100000"/>
-              </a:lnSpc>
-            </a:pPr>
-            <a:r>
-              <a:rPr sz="1500" b="1">
-                <a:solidFill>
-                  <a:srgbClr val="334155"/>
-                </a:solidFill>
-                <a:latin typeface="Malgun Gothic"/>
-              </a:rPr>
-              <a:t>반복 문의를 FAQ에 추가했나요?</a:t>
-            </a:r>
-          </a:p>
-        </p:txBody>
-      </p:sp>
-      <p:pic>
-        <p:nvPicPr>
-          <p:cNvPr id="23" name="Picture 22" descr="mango_char.png"/>
-          <p:cNvPicPr>
-            <a:picLocks noChangeAspect="1"/>
-          </p:cNvPicPr>
-          <p:nvPr/>
-        </p:nvPicPr>
-        <p:blipFill>
-          <a:blip r:embed="rId2"/>
-          <a:stretch>
-            <a:fillRect/>
-          </a:stretch>
-        </p:blipFill>
-        <p:spPr>
-          <a:xfrm>
-            <a:off x="9153162" y="4480559"/>
-            <a:ext cx="2489892" cy="2011680"/>
-          </a:xfrm>
-          <a:prstGeom prst="rect">
-            <a:avLst/>
-          </a:prstGeom>
-        </p:spPr>
-      </p:pic>
     </p:spTree>
   </p:cSld>
   <p:clrMapOvr>
@@ -46207,7 +46680,7 @@
                 </a:solidFill>
                 <a:latin typeface="Malgun Gothic"/>
               </a:rPr>
-              <a:t>마무리</a:t>
+              <a:t>자주 묻는 질문 (FAQ)</a:t>
             </a:r>
           </a:p>
         </p:txBody>
@@ -46291,6 +46764,1997 @@
                 <a:latin typeface="Malgun Gothic"/>
               </a:rPr>
               <a:t>41</a:t>
+            </a:r>
+          </a:p>
+        </p:txBody>
+      </p:sp>
+      <p:sp>
+        <p:nvSpPr>
+          <p:cNvPr id="8" name="TextBox 7"/>
+          <p:cNvSpPr txBox="1"/>
+          <p:nvPr/>
+        </p:nvSpPr>
+        <p:spPr>
+          <a:xfrm>
+            <a:off x="1143000" y="868680"/>
+            <a:ext cx="9144000" cy="457200"/>
+          </a:xfrm>
+          <a:prstGeom prst="rect">
+            <a:avLst/>
+          </a:prstGeom>
+          <a:noFill/>
+        </p:spPr>
+        <p:txBody>
+          <a:bodyPr wrap="square" anchor="t">
+            <a:spAutoFit/>
+          </a:bodyPr>
+          <a:lstStyle/>
+          <a:p>
+            <a:pPr algn="l">
+              <a:lnSpc>
+                <a:spcPct val="100000"/>
+              </a:lnSpc>
+            </a:pPr>
+            <a:r>
+              <a:rPr sz="2200" b="1">
+                <a:solidFill>
+                  <a:srgbClr val="4F46E5"/>
+                </a:solidFill>
+                <a:latin typeface="Malgun Gothic"/>
+              </a:rPr>
+              <a:t>❓ 자주 묻는 질문 (FAQ)</a:t>
+            </a:r>
+          </a:p>
+        </p:txBody>
+      </p:sp>
+      <p:sp>
+        <p:nvSpPr>
+          <p:cNvPr id="9" name="Rounded Rectangle 8"/>
+          <p:cNvSpPr/>
+          <p:nvPr/>
+        </p:nvSpPr>
+        <p:spPr>
+          <a:xfrm>
+            <a:off x="365760" y="1554480"/>
+            <a:ext cx="11460175" cy="868680"/>
+          </a:xfrm>
+          <a:prstGeom prst="roundRect">
+            <a:avLst/>
+          </a:prstGeom>
+          <a:solidFill>
+            <a:srgbClr val="F8FAFC"/>
+          </a:solidFill>
+          <a:ln w="12700">
+            <a:solidFill>
+              <a:srgbClr val="E2E8F0"/>
+            </a:solidFill>
+          </a:ln>
+          <a:effectLst/>
+        </p:spPr>
+        <p:style>
+          <a:lnRef idx="1">
+            <a:schemeClr val="accent1"/>
+          </a:lnRef>
+          <a:fillRef idx="3">
+            <a:schemeClr val="accent1"/>
+          </a:fillRef>
+          <a:effectRef idx="2">
+            <a:schemeClr val="accent1"/>
+          </a:effectRef>
+          <a:fontRef idx="minor">
+            <a:schemeClr val="lt1"/>
+          </a:fontRef>
+        </p:style>
+        <p:txBody>
+          <a:bodyPr rtlCol="0" anchor="ctr"/>
+          <a:lstStyle/>
+          <a:p>
+            <a:pPr algn="ctr"/>
+          </a:p>
+        </p:txBody>
+      </p:sp>
+      <p:sp>
+        <p:nvSpPr>
+          <p:cNvPr id="10" name="TextBox 9"/>
+          <p:cNvSpPr txBox="1"/>
+          <p:nvPr/>
+        </p:nvSpPr>
+        <p:spPr>
+          <a:xfrm>
+            <a:off x="548640" y="1627632"/>
+            <a:ext cx="11094415" cy="365760"/>
+          </a:xfrm>
+          <a:prstGeom prst="rect">
+            <a:avLst/>
+          </a:prstGeom>
+          <a:noFill/>
+        </p:spPr>
+        <p:txBody>
+          <a:bodyPr wrap="square" anchor="t">
+            <a:spAutoFit/>
+          </a:bodyPr>
+          <a:lstStyle/>
+          <a:p>
+            <a:pPr algn="l">
+              <a:lnSpc>
+                <a:spcPct val="100000"/>
+              </a:lnSpc>
+            </a:pPr>
+            <a:r>
+              <a:rPr sz="1350" b="1">
+                <a:solidFill>
+                  <a:srgbClr val="4F46E5"/>
+                </a:solidFill>
+                <a:latin typeface="Malgun Gothic"/>
+              </a:rPr>
+              <a:t>Q. 어디서 접속하나요?</a:t>
+            </a:r>
+          </a:p>
+        </p:txBody>
+      </p:sp>
+      <p:sp>
+        <p:nvSpPr>
+          <p:cNvPr id="11" name="TextBox 10"/>
+          <p:cNvSpPr txBox="1"/>
+          <p:nvPr/>
+        </p:nvSpPr>
+        <p:spPr>
+          <a:xfrm>
+            <a:off x="548640" y="1965960"/>
+            <a:ext cx="11094415" cy="411480"/>
+          </a:xfrm>
+          <a:prstGeom prst="rect">
+            <a:avLst/>
+          </a:prstGeom>
+          <a:noFill/>
+        </p:spPr>
+        <p:txBody>
+          <a:bodyPr wrap="square" anchor="t">
+            <a:spAutoFit/>
+          </a:bodyPr>
+          <a:lstStyle/>
+          <a:p>
+            <a:pPr algn="l">
+              <a:lnSpc>
+                <a:spcPct val="105000"/>
+              </a:lnSpc>
+            </a:pPr>
+            <a:r>
+              <a:rPr sz="1150" b="0">
+                <a:solidFill>
+                  <a:srgbClr val="475569"/>
+                </a:solidFill>
+                <a:latin typeface="Malgun Gothic"/>
+              </a:rPr>
+              <a:t>A. admin.mangoi.co.kr 에서 로그인해요. 휴대폰·태블릿·PC 모두 웹에서 바로 접속할 수 있어요.</a:t>
+            </a:r>
+          </a:p>
+        </p:txBody>
+      </p:sp>
+      <p:sp>
+        <p:nvSpPr>
+          <p:cNvPr id="12" name="Rounded Rectangle 11"/>
+          <p:cNvSpPr/>
+          <p:nvPr/>
+        </p:nvSpPr>
+        <p:spPr>
+          <a:xfrm>
+            <a:off x="365760" y="2542032"/>
+            <a:ext cx="11460175" cy="868680"/>
+          </a:xfrm>
+          <a:prstGeom prst="roundRect">
+            <a:avLst/>
+          </a:prstGeom>
+          <a:solidFill>
+            <a:srgbClr val="F8FAFC"/>
+          </a:solidFill>
+          <a:ln w="12700">
+            <a:solidFill>
+              <a:srgbClr val="E2E8F0"/>
+            </a:solidFill>
+          </a:ln>
+          <a:effectLst/>
+        </p:spPr>
+        <p:style>
+          <a:lnRef idx="1">
+            <a:schemeClr val="accent1"/>
+          </a:lnRef>
+          <a:fillRef idx="3">
+            <a:schemeClr val="accent1"/>
+          </a:fillRef>
+          <a:effectRef idx="2">
+            <a:schemeClr val="accent1"/>
+          </a:effectRef>
+          <a:fontRef idx="minor">
+            <a:schemeClr val="lt1"/>
+          </a:fontRef>
+        </p:style>
+        <p:txBody>
+          <a:bodyPr rtlCol="0" anchor="ctr"/>
+          <a:lstStyle/>
+          <a:p>
+            <a:pPr algn="ctr"/>
+          </a:p>
+        </p:txBody>
+      </p:sp>
+      <p:sp>
+        <p:nvSpPr>
+          <p:cNvPr id="13" name="TextBox 12"/>
+          <p:cNvSpPr txBox="1"/>
+          <p:nvPr/>
+        </p:nvSpPr>
+        <p:spPr>
+          <a:xfrm>
+            <a:off x="548640" y="2615184"/>
+            <a:ext cx="11094415" cy="365760"/>
+          </a:xfrm>
+          <a:prstGeom prst="rect">
+            <a:avLst/>
+          </a:prstGeom>
+          <a:noFill/>
+        </p:spPr>
+        <p:txBody>
+          <a:bodyPr wrap="square" anchor="t">
+            <a:spAutoFit/>
+          </a:bodyPr>
+          <a:lstStyle/>
+          <a:p>
+            <a:pPr algn="l">
+              <a:lnSpc>
+                <a:spcPct val="100000"/>
+              </a:lnSpc>
+            </a:pPr>
+            <a:r>
+              <a:rPr sz="1350" b="1">
+                <a:solidFill>
+                  <a:srgbClr val="4F46E5"/>
+                </a:solidFill>
+                <a:latin typeface="Malgun Gothic"/>
+              </a:rPr>
+              <a:t>Q. 기능이 안 보여요.</a:t>
+            </a:r>
+          </a:p>
+        </p:txBody>
+      </p:sp>
+      <p:sp>
+        <p:nvSpPr>
+          <p:cNvPr id="14" name="TextBox 13"/>
+          <p:cNvSpPr txBox="1"/>
+          <p:nvPr/>
+        </p:nvSpPr>
+        <p:spPr>
+          <a:xfrm>
+            <a:off x="548640" y="2953512"/>
+            <a:ext cx="11094415" cy="411480"/>
+          </a:xfrm>
+          <a:prstGeom prst="rect">
+            <a:avLst/>
+          </a:prstGeom>
+          <a:noFill/>
+        </p:spPr>
+        <p:txBody>
+          <a:bodyPr wrap="square" anchor="t">
+            <a:spAutoFit/>
+          </a:bodyPr>
+          <a:lstStyle/>
+          <a:p>
+            <a:pPr algn="l">
+              <a:lnSpc>
+                <a:spcPct val="105000"/>
+              </a:lnSpc>
+            </a:pPr>
+            <a:r>
+              <a:rPr sz="1150" b="0">
+                <a:solidFill>
+                  <a:srgbClr val="475569"/>
+                </a:solidFill>
+                <a:latin typeface="Malgun Gothic"/>
+              </a:rPr>
+              <a:t>A. 권한(역할)에 따라 메뉴가 달라요. 상단 기능 검색이나 AI 비서에게 이름을 말해 찾으세요.</a:t>
+            </a:r>
+          </a:p>
+        </p:txBody>
+      </p:sp>
+      <p:sp>
+        <p:nvSpPr>
+          <p:cNvPr id="15" name="Rounded Rectangle 14"/>
+          <p:cNvSpPr/>
+          <p:nvPr/>
+        </p:nvSpPr>
+        <p:spPr>
+          <a:xfrm>
+            <a:off x="365760" y="3529584"/>
+            <a:ext cx="11460175" cy="868680"/>
+          </a:xfrm>
+          <a:prstGeom prst="roundRect">
+            <a:avLst/>
+          </a:prstGeom>
+          <a:solidFill>
+            <a:srgbClr val="F8FAFC"/>
+          </a:solidFill>
+          <a:ln w="12700">
+            <a:solidFill>
+              <a:srgbClr val="E2E8F0"/>
+            </a:solidFill>
+          </a:ln>
+          <a:effectLst/>
+        </p:spPr>
+        <p:style>
+          <a:lnRef idx="1">
+            <a:schemeClr val="accent1"/>
+          </a:lnRef>
+          <a:fillRef idx="3">
+            <a:schemeClr val="accent1"/>
+          </a:fillRef>
+          <a:effectRef idx="2">
+            <a:schemeClr val="accent1"/>
+          </a:effectRef>
+          <a:fontRef idx="minor">
+            <a:schemeClr val="lt1"/>
+          </a:fontRef>
+        </p:style>
+        <p:txBody>
+          <a:bodyPr rtlCol="0" anchor="ctr"/>
+          <a:lstStyle/>
+          <a:p>
+            <a:pPr algn="ctr"/>
+          </a:p>
+        </p:txBody>
+      </p:sp>
+      <p:sp>
+        <p:nvSpPr>
+          <p:cNvPr id="16" name="TextBox 15"/>
+          <p:cNvSpPr txBox="1"/>
+          <p:nvPr/>
+        </p:nvSpPr>
+        <p:spPr>
+          <a:xfrm>
+            <a:off x="548640" y="3602736"/>
+            <a:ext cx="11094415" cy="365760"/>
+          </a:xfrm>
+          <a:prstGeom prst="rect">
+            <a:avLst/>
+          </a:prstGeom>
+          <a:noFill/>
+        </p:spPr>
+        <p:txBody>
+          <a:bodyPr wrap="square" anchor="t">
+            <a:spAutoFit/>
+          </a:bodyPr>
+          <a:lstStyle/>
+          <a:p>
+            <a:pPr algn="l">
+              <a:lnSpc>
+                <a:spcPct val="100000"/>
+              </a:lnSpc>
+            </a:pPr>
+            <a:r>
+              <a:rPr sz="1350" b="1">
+                <a:solidFill>
+                  <a:srgbClr val="4F46E5"/>
+                </a:solidFill>
+                <a:latin typeface="Malgun Gothic"/>
+              </a:rPr>
+              <a:t>Q. 학생이 수업 입장이 안 된대요.</a:t>
+            </a:r>
+          </a:p>
+        </p:txBody>
+      </p:sp>
+      <p:sp>
+        <p:nvSpPr>
+          <p:cNvPr id="17" name="TextBox 16"/>
+          <p:cNvSpPr txBox="1"/>
+          <p:nvPr/>
+        </p:nvSpPr>
+        <p:spPr>
+          <a:xfrm>
+            <a:off x="548640" y="3941064"/>
+            <a:ext cx="11094415" cy="411480"/>
+          </a:xfrm>
+          <a:prstGeom prst="rect">
+            <a:avLst/>
+          </a:prstGeom>
+          <a:noFill/>
+        </p:spPr>
+        <p:txBody>
+          <a:bodyPr wrap="square" anchor="t">
+            <a:spAutoFit/>
+          </a:bodyPr>
+          <a:lstStyle/>
+          <a:p>
+            <a:pPr algn="l">
+              <a:lnSpc>
+                <a:spcPct val="105000"/>
+              </a:lnSpc>
+            </a:pPr>
+            <a:r>
+              <a:rPr sz="1150" b="0">
+                <a:solidFill>
+                  <a:srgbClr val="475569"/>
+                </a:solidFill>
+                <a:latin typeface="Malgun Gothic"/>
+              </a:rPr>
+              <a:t>A. 대부분 브라우저 권한 문제예요. 크롬/엣지로 재접속 후 카메라·마이크 ‘허용’을 안내하세요. 카카오톡 안이면 외부 브라우저로 열게 하세요.</a:t>
+            </a:r>
+          </a:p>
+        </p:txBody>
+      </p:sp>
+      <p:sp>
+        <p:nvSpPr>
+          <p:cNvPr id="18" name="Rounded Rectangle 17"/>
+          <p:cNvSpPr/>
+          <p:nvPr/>
+        </p:nvSpPr>
+        <p:spPr>
+          <a:xfrm>
+            <a:off x="365760" y="4517136"/>
+            <a:ext cx="11460175" cy="868680"/>
+          </a:xfrm>
+          <a:prstGeom prst="roundRect">
+            <a:avLst/>
+          </a:prstGeom>
+          <a:solidFill>
+            <a:srgbClr val="F8FAFC"/>
+          </a:solidFill>
+          <a:ln w="12700">
+            <a:solidFill>
+              <a:srgbClr val="E2E8F0"/>
+            </a:solidFill>
+          </a:ln>
+          <a:effectLst/>
+        </p:spPr>
+        <p:style>
+          <a:lnRef idx="1">
+            <a:schemeClr val="accent1"/>
+          </a:lnRef>
+          <a:fillRef idx="3">
+            <a:schemeClr val="accent1"/>
+          </a:fillRef>
+          <a:effectRef idx="2">
+            <a:schemeClr val="accent1"/>
+          </a:effectRef>
+          <a:fontRef idx="minor">
+            <a:schemeClr val="lt1"/>
+          </a:fontRef>
+        </p:style>
+        <p:txBody>
+          <a:bodyPr rtlCol="0" anchor="ctr"/>
+          <a:lstStyle/>
+          <a:p>
+            <a:pPr algn="ctr"/>
+          </a:p>
+        </p:txBody>
+      </p:sp>
+      <p:sp>
+        <p:nvSpPr>
+          <p:cNvPr id="19" name="TextBox 18"/>
+          <p:cNvSpPr txBox="1"/>
+          <p:nvPr/>
+        </p:nvSpPr>
+        <p:spPr>
+          <a:xfrm>
+            <a:off x="548640" y="4590288"/>
+            <a:ext cx="11094415" cy="365760"/>
+          </a:xfrm>
+          <a:prstGeom prst="rect">
+            <a:avLst/>
+          </a:prstGeom>
+          <a:noFill/>
+        </p:spPr>
+        <p:txBody>
+          <a:bodyPr wrap="square" anchor="t">
+            <a:spAutoFit/>
+          </a:bodyPr>
+          <a:lstStyle/>
+          <a:p>
+            <a:pPr algn="l">
+              <a:lnSpc>
+                <a:spcPct val="100000"/>
+              </a:lnSpc>
+            </a:pPr>
+            <a:r>
+              <a:rPr sz="1350" b="1">
+                <a:solidFill>
+                  <a:srgbClr val="4F46E5"/>
+                </a:solidFill>
+                <a:latin typeface="Malgun Gothic"/>
+              </a:rPr>
+              <a:t>Q. AI 비서가 실행까지 하나요?</a:t>
+            </a:r>
+          </a:p>
+        </p:txBody>
+      </p:sp>
+      <p:sp>
+        <p:nvSpPr>
+          <p:cNvPr id="20" name="TextBox 19"/>
+          <p:cNvSpPr txBox="1"/>
+          <p:nvPr/>
+        </p:nvSpPr>
+        <p:spPr>
+          <a:xfrm>
+            <a:off x="548640" y="4928616"/>
+            <a:ext cx="11094415" cy="411480"/>
+          </a:xfrm>
+          <a:prstGeom prst="rect">
+            <a:avLst/>
+          </a:prstGeom>
+          <a:noFill/>
+        </p:spPr>
+        <p:txBody>
+          <a:bodyPr wrap="square" anchor="t">
+            <a:spAutoFit/>
+          </a:bodyPr>
+          <a:lstStyle/>
+          <a:p>
+            <a:pPr algn="l">
+              <a:lnSpc>
+                <a:spcPct val="105000"/>
+              </a:lnSpc>
+            </a:pPr>
+            <a:r>
+              <a:rPr sz="1150" b="0">
+                <a:solidFill>
+                  <a:srgbClr val="475569"/>
+                </a:solidFill>
+                <a:latin typeface="Malgun Gothic"/>
+              </a:rPr>
+              <a:t>A. 조회는 바로, 중요한 처리는 ‘할까요?’로 확인 후 실행해요. 권한이 있는 일만 처리합니다.</a:t>
+            </a:r>
+          </a:p>
+        </p:txBody>
+      </p:sp>
+      <p:sp>
+        <p:nvSpPr>
+          <p:cNvPr id="21" name="Rounded Rectangle 20"/>
+          <p:cNvSpPr/>
+          <p:nvPr/>
+        </p:nvSpPr>
+        <p:spPr>
+          <a:xfrm>
+            <a:off x="365760" y="5504688"/>
+            <a:ext cx="11460175" cy="868680"/>
+          </a:xfrm>
+          <a:prstGeom prst="roundRect">
+            <a:avLst/>
+          </a:prstGeom>
+          <a:solidFill>
+            <a:srgbClr val="F8FAFC"/>
+          </a:solidFill>
+          <a:ln w="12700">
+            <a:solidFill>
+              <a:srgbClr val="E2E8F0"/>
+            </a:solidFill>
+          </a:ln>
+          <a:effectLst/>
+        </p:spPr>
+        <p:style>
+          <a:lnRef idx="1">
+            <a:schemeClr val="accent1"/>
+          </a:lnRef>
+          <a:fillRef idx="3">
+            <a:schemeClr val="accent1"/>
+          </a:fillRef>
+          <a:effectRef idx="2">
+            <a:schemeClr val="accent1"/>
+          </a:effectRef>
+          <a:fontRef idx="minor">
+            <a:schemeClr val="lt1"/>
+          </a:fontRef>
+        </p:style>
+        <p:txBody>
+          <a:bodyPr rtlCol="0" anchor="ctr"/>
+          <a:lstStyle/>
+          <a:p>
+            <a:pPr algn="ctr"/>
+          </a:p>
+        </p:txBody>
+      </p:sp>
+      <p:sp>
+        <p:nvSpPr>
+          <p:cNvPr id="22" name="TextBox 21"/>
+          <p:cNvSpPr txBox="1"/>
+          <p:nvPr/>
+        </p:nvSpPr>
+        <p:spPr>
+          <a:xfrm>
+            <a:off x="548640" y="5577840"/>
+            <a:ext cx="11094415" cy="365760"/>
+          </a:xfrm>
+          <a:prstGeom prst="rect">
+            <a:avLst/>
+          </a:prstGeom>
+          <a:noFill/>
+        </p:spPr>
+        <p:txBody>
+          <a:bodyPr wrap="square" anchor="t">
+            <a:spAutoFit/>
+          </a:bodyPr>
+          <a:lstStyle/>
+          <a:p>
+            <a:pPr algn="l">
+              <a:lnSpc>
+                <a:spcPct val="100000"/>
+              </a:lnSpc>
+            </a:pPr>
+            <a:r>
+              <a:rPr sz="1350" b="1">
+                <a:solidFill>
+                  <a:srgbClr val="4F46E5"/>
+                </a:solidFill>
+                <a:latin typeface="Malgun Gothic"/>
+              </a:rPr>
+              <a:t>Q. 환불 계산이 헷갈려요.</a:t>
+            </a:r>
+          </a:p>
+        </p:txBody>
+      </p:sp>
+      <p:sp>
+        <p:nvSpPr>
+          <p:cNvPr id="23" name="TextBox 22"/>
+          <p:cNvSpPr txBox="1"/>
+          <p:nvPr/>
+        </p:nvSpPr>
+        <p:spPr>
+          <a:xfrm>
+            <a:off x="548640" y="5916168"/>
+            <a:ext cx="11094415" cy="411480"/>
+          </a:xfrm>
+          <a:prstGeom prst="rect">
+            <a:avLst/>
+          </a:prstGeom>
+          <a:noFill/>
+        </p:spPr>
+        <p:txBody>
+          <a:bodyPr wrap="square" anchor="t">
+            <a:spAutoFit/>
+          </a:bodyPr>
+          <a:lstStyle/>
+          <a:p>
+            <a:pPr algn="l">
+              <a:lnSpc>
+                <a:spcPct val="105000"/>
+              </a:lnSpc>
+            </a:pPr>
+            <a:r>
+              <a:rPr sz="1150" b="0">
+                <a:solidFill>
+                  <a:srgbClr val="475569"/>
+                </a:solidFill>
+                <a:latin typeface="Malgun Gothic"/>
+              </a:rPr>
+              <a:t>A. 환불 규정표대로 자동 계산되며, 할인 결제는 정가 기준으로 재정산됩니다.</a:t>
+            </a:r>
+          </a:p>
+        </p:txBody>
+      </p:sp>
+      <p:sp>
+        <p:nvSpPr>
+          <p:cNvPr id="24" name="Rounded Rectangle 23"/>
+          <p:cNvSpPr/>
+          <p:nvPr/>
+        </p:nvSpPr>
+        <p:spPr>
+          <a:xfrm>
+            <a:off x="365760" y="6492240"/>
+            <a:ext cx="11460175" cy="868680"/>
+          </a:xfrm>
+          <a:prstGeom prst="roundRect">
+            <a:avLst/>
+          </a:prstGeom>
+          <a:solidFill>
+            <a:srgbClr val="F8FAFC"/>
+          </a:solidFill>
+          <a:ln w="12700">
+            <a:solidFill>
+              <a:srgbClr val="E2E8F0"/>
+            </a:solidFill>
+          </a:ln>
+          <a:effectLst/>
+        </p:spPr>
+        <p:style>
+          <a:lnRef idx="1">
+            <a:schemeClr val="accent1"/>
+          </a:lnRef>
+          <a:fillRef idx="3">
+            <a:schemeClr val="accent1"/>
+          </a:fillRef>
+          <a:effectRef idx="2">
+            <a:schemeClr val="accent1"/>
+          </a:effectRef>
+          <a:fontRef idx="minor">
+            <a:schemeClr val="lt1"/>
+          </a:fontRef>
+        </p:style>
+        <p:txBody>
+          <a:bodyPr rtlCol="0" anchor="ctr"/>
+          <a:lstStyle/>
+          <a:p>
+            <a:pPr algn="ctr"/>
+          </a:p>
+        </p:txBody>
+      </p:sp>
+      <p:sp>
+        <p:nvSpPr>
+          <p:cNvPr id="25" name="TextBox 24"/>
+          <p:cNvSpPr txBox="1"/>
+          <p:nvPr/>
+        </p:nvSpPr>
+        <p:spPr>
+          <a:xfrm>
+            <a:off x="548640" y="6565392"/>
+            <a:ext cx="11094415" cy="365760"/>
+          </a:xfrm>
+          <a:prstGeom prst="rect">
+            <a:avLst/>
+          </a:prstGeom>
+          <a:noFill/>
+        </p:spPr>
+        <p:txBody>
+          <a:bodyPr wrap="square" anchor="t">
+            <a:spAutoFit/>
+          </a:bodyPr>
+          <a:lstStyle/>
+          <a:p>
+            <a:pPr algn="l">
+              <a:lnSpc>
+                <a:spcPct val="100000"/>
+              </a:lnSpc>
+            </a:pPr>
+            <a:r>
+              <a:rPr sz="1350" b="1">
+                <a:solidFill>
+                  <a:srgbClr val="4F46E5"/>
+                </a:solidFill>
+                <a:latin typeface="Malgun Gothic"/>
+              </a:rPr>
+              <a:t>Q. 이탈이 걱정돼요.</a:t>
+            </a:r>
+          </a:p>
+        </p:txBody>
+      </p:sp>
+      <p:sp>
+        <p:nvSpPr>
+          <p:cNvPr id="26" name="TextBox 25"/>
+          <p:cNvSpPr txBox="1"/>
+          <p:nvPr/>
+        </p:nvSpPr>
+        <p:spPr>
+          <a:xfrm>
+            <a:off x="548640" y="6903720"/>
+            <a:ext cx="11094415" cy="411480"/>
+          </a:xfrm>
+          <a:prstGeom prst="rect">
+            <a:avLst/>
+          </a:prstGeom>
+          <a:noFill/>
+        </p:spPr>
+        <p:txBody>
+          <a:bodyPr wrap="square" anchor="t">
+            <a:spAutoFit/>
+          </a:bodyPr>
+          <a:lstStyle/>
+          <a:p>
+            <a:pPr algn="l">
+              <a:lnSpc>
+                <a:spcPct val="105000"/>
+              </a:lnSpc>
+            </a:pPr>
+            <a:r>
+              <a:rPr sz="1150" b="0">
+                <a:solidFill>
+                  <a:srgbClr val="475569"/>
+                </a:solidFill>
+                <a:latin typeface="Malgun Gothic"/>
+              </a:rPr>
+              <a:t>A. 리텐션 센터의 이탈위험·전염 관계망으로 미리 찾아 알림톡·상담으로 개입하세요.</a:t>
+            </a:r>
+          </a:p>
+        </p:txBody>
+      </p:sp>
+    </p:spTree>
+  </p:cSld>
+  <p:clrMapOvr>
+    <a:masterClrMapping/>
+  </p:clrMapOvr>
+</p:sld>
+</file>
+
+<file path=ppt/slides/slide46.xml><?xml version="1.0" encoding="utf-8"?>
+<p:sld xmlns:a="http://schemas.openxmlformats.org/drawingml/2006/main" xmlns:p="http://schemas.openxmlformats.org/presentationml/2006/main" xmlns:r="http://schemas.openxmlformats.org/officeDocument/2006/relationships">
+  <p:cSld>
+    <p:bg>
+      <p:bgPr>
+        <a:solidFill>
+          <a:srgbClr val="EEF2FF"/>
+        </a:solidFill>
+        <a:effectLst/>
+      </p:bgPr>
+    </p:bg>
+    <p:spTree>
+      <p:nvGrpSpPr>
+        <p:cNvPr id="1" name=""/>
+        <p:cNvGrpSpPr/>
+        <p:nvPr/>
+      </p:nvGrpSpPr>
+      <p:grpSpPr/>
+      <p:sp>
+        <p:nvSpPr>
+          <p:cNvPr id="2" name="Rectangle 1"/>
+          <p:cNvSpPr/>
+          <p:nvPr/>
+        </p:nvSpPr>
+        <p:spPr>
+          <a:xfrm>
+            <a:off x="0" y="0"/>
+            <a:ext cx="12191695" cy="566928"/>
+          </a:xfrm>
+          <a:prstGeom prst="rect">
+            <a:avLst/>
+          </a:prstGeom>
+          <a:solidFill>
+            <a:srgbClr val="4F46E5"/>
+          </a:solidFill>
+          <a:ln>
+            <a:noFill/>
+          </a:ln>
+          <a:effectLst/>
+        </p:spPr>
+        <p:style>
+          <a:lnRef idx="1">
+            <a:schemeClr val="accent1"/>
+          </a:lnRef>
+          <a:fillRef idx="3">
+            <a:schemeClr val="accent1"/>
+          </a:fillRef>
+          <a:effectRef idx="2">
+            <a:schemeClr val="accent1"/>
+          </a:effectRef>
+          <a:fontRef idx="minor">
+            <a:schemeClr val="lt1"/>
+          </a:fontRef>
+        </p:style>
+        <p:txBody>
+          <a:bodyPr rtlCol="0" anchor="ctr"/>
+          <a:lstStyle/>
+          <a:p>
+            <a:pPr algn="ctr"/>
+          </a:p>
+        </p:txBody>
+      </p:sp>
+      <p:sp>
+        <p:nvSpPr>
+          <p:cNvPr id="3" name="Rectangle 2"/>
+          <p:cNvSpPr/>
+          <p:nvPr/>
+        </p:nvSpPr>
+        <p:spPr>
+          <a:xfrm>
+            <a:off x="0" y="566928"/>
+            <a:ext cx="12191695" cy="54864"/>
+          </a:xfrm>
+          <a:prstGeom prst="rect">
+            <a:avLst/>
+          </a:prstGeom>
+          <a:solidFill>
+            <a:srgbClr val="FF9F1C"/>
+          </a:solidFill>
+          <a:ln>
+            <a:noFill/>
+          </a:ln>
+          <a:effectLst/>
+        </p:spPr>
+        <p:style>
+          <a:lnRef idx="1">
+            <a:schemeClr val="accent1"/>
+          </a:lnRef>
+          <a:fillRef idx="3">
+            <a:schemeClr val="accent1"/>
+          </a:fillRef>
+          <a:effectRef idx="2">
+            <a:schemeClr val="accent1"/>
+          </a:effectRef>
+          <a:fontRef idx="minor">
+            <a:schemeClr val="lt1"/>
+          </a:fontRef>
+        </p:style>
+        <p:txBody>
+          <a:bodyPr rtlCol="0" anchor="ctr"/>
+          <a:lstStyle/>
+          <a:p>
+            <a:pPr algn="ctr"/>
+          </a:p>
+        </p:txBody>
+      </p:sp>
+      <p:sp>
+        <p:nvSpPr>
+          <p:cNvPr id="4" name="TextBox 3"/>
+          <p:cNvSpPr txBox="1"/>
+          <p:nvPr/>
+        </p:nvSpPr>
+        <p:spPr>
+          <a:xfrm>
+            <a:off x="365760" y="27432"/>
+            <a:ext cx="7315200" cy="502920"/>
+          </a:xfrm>
+          <a:prstGeom prst="rect">
+            <a:avLst/>
+          </a:prstGeom>
+          <a:noFill/>
+        </p:spPr>
+        <p:txBody>
+          <a:bodyPr wrap="square" anchor="ctr">
+            <a:spAutoFit/>
+          </a:bodyPr>
+          <a:lstStyle/>
+          <a:p>
+            <a:pPr algn="l">
+              <a:lnSpc>
+                <a:spcPct val="100000"/>
+              </a:lnSpc>
+            </a:pPr>
+            <a:r>
+              <a:rPr sz="1500" b="1">
+                <a:solidFill>
+                  <a:srgbClr val="FFFFFF"/>
+                </a:solidFill>
+                <a:latin typeface="Malgun Gothic"/>
+              </a:rPr>
+              <a:t>🏫 망고아이 관리자용 사용설명서</a:t>
+            </a:r>
+          </a:p>
+        </p:txBody>
+      </p:sp>
+      <p:sp>
+        <p:nvSpPr>
+          <p:cNvPr id="5" name="TextBox 4"/>
+          <p:cNvSpPr txBox="1"/>
+          <p:nvPr/>
+        </p:nvSpPr>
+        <p:spPr>
+          <a:xfrm>
+            <a:off x="8168335" y="27432"/>
+            <a:ext cx="3657600" cy="502920"/>
+          </a:xfrm>
+          <a:prstGeom prst="rect">
+            <a:avLst/>
+          </a:prstGeom>
+          <a:noFill/>
+        </p:spPr>
+        <p:txBody>
+          <a:bodyPr wrap="square" anchor="ctr">
+            <a:spAutoFit/>
+          </a:bodyPr>
+          <a:lstStyle/>
+          <a:p>
+            <a:pPr algn="r">
+              <a:lnSpc>
+                <a:spcPct val="100000"/>
+              </a:lnSpc>
+            </a:pPr>
+            <a:r>
+              <a:rPr sz="1300" b="1">
+                <a:solidFill>
+                  <a:srgbClr val="F1F5F9"/>
+                </a:solidFill>
+                <a:latin typeface="Malgun Gothic"/>
+              </a:rPr>
+              <a:t>체크리스트</a:t>
+            </a:r>
+          </a:p>
+        </p:txBody>
+      </p:sp>
+      <p:sp>
+        <p:nvSpPr>
+          <p:cNvPr id="6" name="Rounded Rectangle 5"/>
+          <p:cNvSpPr/>
+          <p:nvPr/>
+        </p:nvSpPr>
+        <p:spPr>
+          <a:xfrm>
+            <a:off x="365760" y="841248"/>
+            <a:ext cx="658368" cy="512064"/>
+          </a:xfrm>
+          <a:prstGeom prst="roundRect">
+            <a:avLst/>
+          </a:prstGeom>
+          <a:solidFill>
+            <a:srgbClr val="4F46E5"/>
+          </a:solidFill>
+          <a:ln>
+            <a:noFill/>
+          </a:ln>
+          <a:effectLst/>
+        </p:spPr>
+        <p:style>
+          <a:lnRef idx="1">
+            <a:schemeClr val="accent1"/>
+          </a:lnRef>
+          <a:fillRef idx="3">
+            <a:schemeClr val="accent1"/>
+          </a:fillRef>
+          <a:effectRef idx="2">
+            <a:schemeClr val="accent1"/>
+          </a:effectRef>
+          <a:fontRef idx="minor">
+            <a:schemeClr val="lt1"/>
+          </a:fontRef>
+        </p:style>
+        <p:txBody>
+          <a:bodyPr rtlCol="0" anchor="ctr"/>
+          <a:lstStyle/>
+          <a:p>
+            <a:pPr algn="ctr"/>
+          </a:p>
+        </p:txBody>
+      </p:sp>
+      <p:sp>
+        <p:nvSpPr>
+          <p:cNvPr id="7" name="TextBox 6"/>
+          <p:cNvSpPr txBox="1"/>
+          <p:nvPr/>
+        </p:nvSpPr>
+        <p:spPr>
+          <a:xfrm>
+            <a:off x="365760" y="841248"/>
+            <a:ext cx="658368" cy="512064"/>
+          </a:xfrm>
+          <a:prstGeom prst="rect">
+            <a:avLst/>
+          </a:prstGeom>
+          <a:noFill/>
+        </p:spPr>
+        <p:txBody>
+          <a:bodyPr wrap="square" anchor="ctr">
+            <a:spAutoFit/>
+          </a:bodyPr>
+          <a:lstStyle/>
+          <a:p>
+            <a:pPr algn="ctr">
+              <a:lnSpc>
+                <a:spcPct val="100000"/>
+              </a:lnSpc>
+            </a:pPr>
+            <a:r>
+              <a:rPr sz="1700" b="1">
+                <a:solidFill>
+                  <a:srgbClr val="FFFFFF"/>
+                </a:solidFill>
+                <a:latin typeface="Malgun Gothic"/>
+              </a:rPr>
+              <a:t>42</a:t>
+            </a:r>
+          </a:p>
+        </p:txBody>
+      </p:sp>
+      <p:sp>
+        <p:nvSpPr>
+          <p:cNvPr id="8" name="TextBox 7"/>
+          <p:cNvSpPr txBox="1"/>
+          <p:nvPr/>
+        </p:nvSpPr>
+        <p:spPr>
+          <a:xfrm>
+            <a:off x="1143000" y="868680"/>
+            <a:ext cx="9144000" cy="457200"/>
+          </a:xfrm>
+          <a:prstGeom prst="rect">
+            <a:avLst/>
+          </a:prstGeom>
+          <a:noFill/>
+        </p:spPr>
+        <p:txBody>
+          <a:bodyPr wrap="square" anchor="t">
+            <a:spAutoFit/>
+          </a:bodyPr>
+          <a:lstStyle/>
+          <a:p>
+            <a:pPr algn="l">
+              <a:lnSpc>
+                <a:spcPct val="100000"/>
+              </a:lnSpc>
+            </a:pPr>
+            <a:r>
+              <a:rPr sz="2200" b="1">
+                <a:solidFill>
+                  <a:srgbClr val="4F46E5"/>
+                </a:solidFill>
+                <a:latin typeface="Malgun Gothic"/>
+              </a:rPr>
+              <a:t>✅ 매일 운영 체크리스트</a:t>
+            </a:r>
+          </a:p>
+        </p:txBody>
+      </p:sp>
+      <p:sp>
+        <p:nvSpPr>
+          <p:cNvPr id="9" name="Rounded Rectangle 8"/>
+          <p:cNvSpPr/>
+          <p:nvPr/>
+        </p:nvSpPr>
+        <p:spPr>
+          <a:xfrm>
+            <a:off x="457200" y="1645920"/>
+            <a:ext cx="292608" cy="292608"/>
+          </a:xfrm>
+          <a:prstGeom prst="roundRect">
+            <a:avLst/>
+          </a:prstGeom>
+          <a:solidFill>
+            <a:srgbClr val="FFFFFF"/>
+          </a:solidFill>
+          <a:ln w="12700">
+            <a:solidFill>
+              <a:srgbClr val="4F46E5"/>
+            </a:solidFill>
+          </a:ln>
+          <a:effectLst/>
+        </p:spPr>
+        <p:style>
+          <a:lnRef idx="1">
+            <a:schemeClr val="accent1"/>
+          </a:lnRef>
+          <a:fillRef idx="3">
+            <a:schemeClr val="accent1"/>
+          </a:fillRef>
+          <a:effectRef idx="2">
+            <a:schemeClr val="accent1"/>
+          </a:effectRef>
+          <a:fontRef idx="minor">
+            <a:schemeClr val="lt1"/>
+          </a:fontRef>
+        </p:style>
+        <p:txBody>
+          <a:bodyPr rtlCol="0" anchor="ctr"/>
+          <a:lstStyle/>
+          <a:p>
+            <a:pPr algn="ctr"/>
+          </a:p>
+        </p:txBody>
+      </p:sp>
+      <p:sp>
+        <p:nvSpPr>
+          <p:cNvPr id="10" name="TextBox 9"/>
+          <p:cNvSpPr txBox="1"/>
+          <p:nvPr/>
+        </p:nvSpPr>
+        <p:spPr>
+          <a:xfrm>
+            <a:off x="914400" y="1581912"/>
+            <a:ext cx="10058400" cy="411480"/>
+          </a:xfrm>
+          <a:prstGeom prst="rect">
+            <a:avLst/>
+          </a:prstGeom>
+          <a:noFill/>
+        </p:spPr>
+        <p:txBody>
+          <a:bodyPr wrap="square" anchor="t">
+            <a:spAutoFit/>
+          </a:bodyPr>
+          <a:lstStyle/>
+          <a:p>
+            <a:pPr algn="l">
+              <a:lnSpc>
+                <a:spcPct val="100000"/>
+              </a:lnSpc>
+            </a:pPr>
+            <a:r>
+              <a:rPr sz="1500" b="1">
+                <a:solidFill>
+                  <a:srgbClr val="334155"/>
+                </a:solidFill>
+                <a:latin typeface="Malgun Gothic"/>
+              </a:rPr>
+              <a:t>오늘 매출·재원·출석률 지표를 확인했나요?</a:t>
+            </a:r>
+          </a:p>
+        </p:txBody>
+      </p:sp>
+      <p:sp>
+        <p:nvSpPr>
+          <p:cNvPr id="11" name="Rounded Rectangle 10"/>
+          <p:cNvSpPr/>
+          <p:nvPr/>
+        </p:nvSpPr>
+        <p:spPr>
+          <a:xfrm>
+            <a:off x="457200" y="2212848"/>
+            <a:ext cx="292608" cy="292608"/>
+          </a:xfrm>
+          <a:prstGeom prst="roundRect">
+            <a:avLst/>
+          </a:prstGeom>
+          <a:solidFill>
+            <a:srgbClr val="FFFFFF"/>
+          </a:solidFill>
+          <a:ln w="12700">
+            <a:solidFill>
+              <a:srgbClr val="4F46E5"/>
+            </a:solidFill>
+          </a:ln>
+          <a:effectLst/>
+        </p:spPr>
+        <p:style>
+          <a:lnRef idx="1">
+            <a:schemeClr val="accent1"/>
+          </a:lnRef>
+          <a:fillRef idx="3">
+            <a:schemeClr val="accent1"/>
+          </a:fillRef>
+          <a:effectRef idx="2">
+            <a:schemeClr val="accent1"/>
+          </a:effectRef>
+          <a:fontRef idx="minor">
+            <a:schemeClr val="lt1"/>
+          </a:fontRef>
+        </p:style>
+        <p:txBody>
+          <a:bodyPr rtlCol="0" anchor="ctr"/>
+          <a:lstStyle/>
+          <a:p>
+            <a:pPr algn="ctr"/>
+          </a:p>
+        </p:txBody>
+      </p:sp>
+      <p:sp>
+        <p:nvSpPr>
+          <p:cNvPr id="12" name="TextBox 11"/>
+          <p:cNvSpPr txBox="1"/>
+          <p:nvPr/>
+        </p:nvSpPr>
+        <p:spPr>
+          <a:xfrm>
+            <a:off x="914400" y="2148840"/>
+            <a:ext cx="10058400" cy="411480"/>
+          </a:xfrm>
+          <a:prstGeom prst="rect">
+            <a:avLst/>
+          </a:prstGeom>
+          <a:noFill/>
+        </p:spPr>
+        <p:txBody>
+          <a:bodyPr wrap="square" anchor="t">
+            <a:spAutoFit/>
+          </a:bodyPr>
+          <a:lstStyle/>
+          <a:p>
+            <a:pPr algn="l">
+              <a:lnSpc>
+                <a:spcPct val="100000"/>
+              </a:lnSpc>
+            </a:pPr>
+            <a:r>
+              <a:rPr sz="1500" b="1">
+                <a:solidFill>
+                  <a:srgbClr val="334155"/>
+                </a:solidFill>
+                <a:latin typeface="Malgun Gothic"/>
+              </a:rPr>
+              <a:t>신규 상담/문의를 처리했나요?</a:t>
+            </a:r>
+          </a:p>
+        </p:txBody>
+      </p:sp>
+      <p:sp>
+        <p:nvSpPr>
+          <p:cNvPr id="13" name="Rounded Rectangle 12"/>
+          <p:cNvSpPr/>
+          <p:nvPr/>
+        </p:nvSpPr>
+        <p:spPr>
+          <a:xfrm>
+            <a:off x="457200" y="2779776"/>
+            <a:ext cx="292608" cy="292608"/>
+          </a:xfrm>
+          <a:prstGeom prst="roundRect">
+            <a:avLst/>
+          </a:prstGeom>
+          <a:solidFill>
+            <a:srgbClr val="FFFFFF"/>
+          </a:solidFill>
+          <a:ln w="12700">
+            <a:solidFill>
+              <a:srgbClr val="4F46E5"/>
+            </a:solidFill>
+          </a:ln>
+          <a:effectLst/>
+        </p:spPr>
+        <p:style>
+          <a:lnRef idx="1">
+            <a:schemeClr val="accent1"/>
+          </a:lnRef>
+          <a:fillRef idx="3">
+            <a:schemeClr val="accent1"/>
+          </a:fillRef>
+          <a:effectRef idx="2">
+            <a:schemeClr val="accent1"/>
+          </a:effectRef>
+          <a:fontRef idx="minor">
+            <a:schemeClr val="lt1"/>
+          </a:fontRef>
+        </p:style>
+        <p:txBody>
+          <a:bodyPr rtlCol="0" anchor="ctr"/>
+          <a:lstStyle/>
+          <a:p>
+            <a:pPr algn="ctr"/>
+          </a:p>
+        </p:txBody>
+      </p:sp>
+      <p:sp>
+        <p:nvSpPr>
+          <p:cNvPr id="14" name="TextBox 13"/>
+          <p:cNvSpPr txBox="1"/>
+          <p:nvPr/>
+        </p:nvSpPr>
+        <p:spPr>
+          <a:xfrm>
+            <a:off x="914400" y="2715768"/>
+            <a:ext cx="10058400" cy="411480"/>
+          </a:xfrm>
+          <a:prstGeom prst="rect">
+            <a:avLst/>
+          </a:prstGeom>
+          <a:noFill/>
+        </p:spPr>
+        <p:txBody>
+          <a:bodyPr wrap="square" anchor="t">
+            <a:spAutoFit/>
+          </a:bodyPr>
+          <a:lstStyle/>
+          <a:p>
+            <a:pPr algn="l">
+              <a:lnSpc>
+                <a:spcPct val="100000"/>
+              </a:lnSpc>
+            </a:pPr>
+            <a:r>
+              <a:rPr sz="1500" b="1">
+                <a:solidFill>
+                  <a:srgbClr val="334155"/>
+                </a:solidFill>
+                <a:latin typeface="Malgun Gothic"/>
+              </a:rPr>
+              <a:t>미납·환불 건을 확인했나요?</a:t>
+            </a:r>
+          </a:p>
+        </p:txBody>
+      </p:sp>
+      <p:sp>
+        <p:nvSpPr>
+          <p:cNvPr id="15" name="Rounded Rectangle 14"/>
+          <p:cNvSpPr/>
+          <p:nvPr/>
+        </p:nvSpPr>
+        <p:spPr>
+          <a:xfrm>
+            <a:off x="457200" y="3346704"/>
+            <a:ext cx="292608" cy="292608"/>
+          </a:xfrm>
+          <a:prstGeom prst="roundRect">
+            <a:avLst/>
+          </a:prstGeom>
+          <a:solidFill>
+            <a:srgbClr val="FFFFFF"/>
+          </a:solidFill>
+          <a:ln w="12700">
+            <a:solidFill>
+              <a:srgbClr val="4F46E5"/>
+            </a:solidFill>
+          </a:ln>
+          <a:effectLst/>
+        </p:spPr>
+        <p:style>
+          <a:lnRef idx="1">
+            <a:schemeClr val="accent1"/>
+          </a:lnRef>
+          <a:fillRef idx="3">
+            <a:schemeClr val="accent1"/>
+          </a:fillRef>
+          <a:effectRef idx="2">
+            <a:schemeClr val="accent1"/>
+          </a:effectRef>
+          <a:fontRef idx="minor">
+            <a:schemeClr val="lt1"/>
+          </a:fontRef>
+        </p:style>
+        <p:txBody>
+          <a:bodyPr rtlCol="0" anchor="ctr"/>
+          <a:lstStyle/>
+          <a:p>
+            <a:pPr algn="ctr"/>
+          </a:p>
+        </p:txBody>
+      </p:sp>
+      <p:sp>
+        <p:nvSpPr>
+          <p:cNvPr id="16" name="TextBox 15"/>
+          <p:cNvSpPr txBox="1"/>
+          <p:nvPr/>
+        </p:nvSpPr>
+        <p:spPr>
+          <a:xfrm>
+            <a:off x="914400" y="3282696"/>
+            <a:ext cx="10058400" cy="411480"/>
+          </a:xfrm>
+          <a:prstGeom prst="rect">
+            <a:avLst/>
+          </a:prstGeom>
+          <a:noFill/>
+        </p:spPr>
+        <p:txBody>
+          <a:bodyPr wrap="square" anchor="t">
+            <a:spAutoFit/>
+          </a:bodyPr>
+          <a:lstStyle/>
+          <a:p>
+            <a:pPr algn="l">
+              <a:lnSpc>
+                <a:spcPct val="100000"/>
+              </a:lnSpc>
+            </a:pPr>
+            <a:r>
+              <a:rPr sz="1500" b="1">
+                <a:solidFill>
+                  <a:srgbClr val="334155"/>
+                </a:solidFill>
+                <a:latin typeface="Malgun Gothic"/>
+              </a:rPr>
+              <a:t>실시간 수업(LIVE) 상태를 점검했나요?</a:t>
+            </a:r>
+          </a:p>
+        </p:txBody>
+      </p:sp>
+      <p:sp>
+        <p:nvSpPr>
+          <p:cNvPr id="17" name="Rounded Rectangle 16"/>
+          <p:cNvSpPr/>
+          <p:nvPr/>
+        </p:nvSpPr>
+        <p:spPr>
+          <a:xfrm>
+            <a:off x="457200" y="3913632"/>
+            <a:ext cx="292608" cy="292608"/>
+          </a:xfrm>
+          <a:prstGeom prst="roundRect">
+            <a:avLst/>
+          </a:prstGeom>
+          <a:solidFill>
+            <a:srgbClr val="FFFFFF"/>
+          </a:solidFill>
+          <a:ln w="12700">
+            <a:solidFill>
+              <a:srgbClr val="4F46E5"/>
+            </a:solidFill>
+          </a:ln>
+          <a:effectLst/>
+        </p:spPr>
+        <p:style>
+          <a:lnRef idx="1">
+            <a:schemeClr val="accent1"/>
+          </a:lnRef>
+          <a:fillRef idx="3">
+            <a:schemeClr val="accent1"/>
+          </a:fillRef>
+          <a:effectRef idx="2">
+            <a:schemeClr val="accent1"/>
+          </a:effectRef>
+          <a:fontRef idx="minor">
+            <a:schemeClr val="lt1"/>
+          </a:fontRef>
+        </p:style>
+        <p:txBody>
+          <a:bodyPr rtlCol="0" anchor="ctr"/>
+          <a:lstStyle/>
+          <a:p>
+            <a:pPr algn="ctr"/>
+          </a:p>
+        </p:txBody>
+      </p:sp>
+      <p:sp>
+        <p:nvSpPr>
+          <p:cNvPr id="18" name="TextBox 17"/>
+          <p:cNvSpPr txBox="1"/>
+          <p:nvPr/>
+        </p:nvSpPr>
+        <p:spPr>
+          <a:xfrm>
+            <a:off x="914400" y="3849624"/>
+            <a:ext cx="10058400" cy="411480"/>
+          </a:xfrm>
+          <a:prstGeom prst="rect">
+            <a:avLst/>
+          </a:prstGeom>
+          <a:noFill/>
+        </p:spPr>
+        <p:txBody>
+          <a:bodyPr wrap="square" anchor="t">
+            <a:spAutoFit/>
+          </a:bodyPr>
+          <a:lstStyle/>
+          <a:p>
+            <a:pPr algn="l">
+              <a:lnSpc>
+                <a:spcPct val="100000"/>
+              </a:lnSpc>
+            </a:pPr>
+            <a:r>
+              <a:rPr sz="1500" b="1">
+                <a:solidFill>
+                  <a:srgbClr val="334155"/>
+                </a:solidFill>
+                <a:latin typeface="Malgun Gothic"/>
+              </a:rPr>
+              <a:t>이탈위험이 오른 학생을 챙겼나요?</a:t>
+            </a:r>
+          </a:p>
+        </p:txBody>
+      </p:sp>
+      <p:sp>
+        <p:nvSpPr>
+          <p:cNvPr id="19" name="Rounded Rectangle 18"/>
+          <p:cNvSpPr/>
+          <p:nvPr/>
+        </p:nvSpPr>
+        <p:spPr>
+          <a:xfrm>
+            <a:off x="457200" y="4480560"/>
+            <a:ext cx="292608" cy="292608"/>
+          </a:xfrm>
+          <a:prstGeom prst="roundRect">
+            <a:avLst/>
+          </a:prstGeom>
+          <a:solidFill>
+            <a:srgbClr val="FFFFFF"/>
+          </a:solidFill>
+          <a:ln w="12700">
+            <a:solidFill>
+              <a:srgbClr val="4F46E5"/>
+            </a:solidFill>
+          </a:ln>
+          <a:effectLst/>
+        </p:spPr>
+        <p:style>
+          <a:lnRef idx="1">
+            <a:schemeClr val="accent1"/>
+          </a:lnRef>
+          <a:fillRef idx="3">
+            <a:schemeClr val="accent1"/>
+          </a:fillRef>
+          <a:effectRef idx="2">
+            <a:schemeClr val="accent1"/>
+          </a:effectRef>
+          <a:fontRef idx="minor">
+            <a:schemeClr val="lt1"/>
+          </a:fontRef>
+        </p:style>
+        <p:txBody>
+          <a:bodyPr rtlCol="0" anchor="ctr"/>
+          <a:lstStyle/>
+          <a:p>
+            <a:pPr algn="ctr"/>
+          </a:p>
+        </p:txBody>
+      </p:sp>
+      <p:sp>
+        <p:nvSpPr>
+          <p:cNvPr id="20" name="TextBox 19"/>
+          <p:cNvSpPr txBox="1"/>
+          <p:nvPr/>
+        </p:nvSpPr>
+        <p:spPr>
+          <a:xfrm>
+            <a:off x="914400" y="4416552"/>
+            <a:ext cx="10058400" cy="411480"/>
+          </a:xfrm>
+          <a:prstGeom prst="rect">
+            <a:avLst/>
+          </a:prstGeom>
+          <a:noFill/>
+        </p:spPr>
+        <p:txBody>
+          <a:bodyPr wrap="square" anchor="t">
+            <a:spAutoFit/>
+          </a:bodyPr>
+          <a:lstStyle/>
+          <a:p>
+            <a:pPr algn="l">
+              <a:lnSpc>
+                <a:spcPct val="100000"/>
+              </a:lnSpc>
+            </a:pPr>
+            <a:r>
+              <a:rPr sz="1500" b="1">
+                <a:solidFill>
+                  <a:srgbClr val="334155"/>
+                </a:solidFill>
+                <a:latin typeface="Malgun Gothic"/>
+              </a:rPr>
+              <a:t>강사 평가/코칭 피드백을 반영했나요?</a:t>
+            </a:r>
+          </a:p>
+        </p:txBody>
+      </p:sp>
+      <p:sp>
+        <p:nvSpPr>
+          <p:cNvPr id="21" name="Rounded Rectangle 20"/>
+          <p:cNvSpPr/>
+          <p:nvPr/>
+        </p:nvSpPr>
+        <p:spPr>
+          <a:xfrm>
+            <a:off x="457200" y="5047488"/>
+            <a:ext cx="292608" cy="292608"/>
+          </a:xfrm>
+          <a:prstGeom prst="roundRect">
+            <a:avLst/>
+          </a:prstGeom>
+          <a:solidFill>
+            <a:srgbClr val="FFFFFF"/>
+          </a:solidFill>
+          <a:ln w="12700">
+            <a:solidFill>
+              <a:srgbClr val="4F46E5"/>
+            </a:solidFill>
+          </a:ln>
+          <a:effectLst/>
+        </p:spPr>
+        <p:style>
+          <a:lnRef idx="1">
+            <a:schemeClr val="accent1"/>
+          </a:lnRef>
+          <a:fillRef idx="3">
+            <a:schemeClr val="accent1"/>
+          </a:fillRef>
+          <a:effectRef idx="2">
+            <a:schemeClr val="accent1"/>
+          </a:effectRef>
+          <a:fontRef idx="minor">
+            <a:schemeClr val="lt1"/>
+          </a:fontRef>
+        </p:style>
+        <p:txBody>
+          <a:bodyPr rtlCol="0" anchor="ctr"/>
+          <a:lstStyle/>
+          <a:p>
+            <a:pPr algn="ctr"/>
+          </a:p>
+        </p:txBody>
+      </p:sp>
+      <p:sp>
+        <p:nvSpPr>
+          <p:cNvPr id="22" name="TextBox 21"/>
+          <p:cNvSpPr txBox="1"/>
+          <p:nvPr/>
+        </p:nvSpPr>
+        <p:spPr>
+          <a:xfrm>
+            <a:off x="914400" y="4983480"/>
+            <a:ext cx="10058400" cy="411480"/>
+          </a:xfrm>
+          <a:prstGeom prst="rect">
+            <a:avLst/>
+          </a:prstGeom>
+          <a:noFill/>
+        </p:spPr>
+        <p:txBody>
+          <a:bodyPr wrap="square" anchor="t">
+            <a:spAutoFit/>
+          </a:bodyPr>
+          <a:lstStyle/>
+          <a:p>
+            <a:pPr algn="l">
+              <a:lnSpc>
+                <a:spcPct val="100000"/>
+              </a:lnSpc>
+            </a:pPr>
+            <a:r>
+              <a:rPr sz="1500" b="1">
+                <a:solidFill>
+                  <a:srgbClr val="334155"/>
+                </a:solidFill>
+                <a:latin typeface="Malgun Gothic"/>
+              </a:rPr>
+              <a:t>반복 문의를 FAQ에 추가했나요?</a:t>
+            </a:r>
+          </a:p>
+        </p:txBody>
+      </p:sp>
+      <p:pic>
+        <p:nvPicPr>
+          <p:cNvPr id="23" name="Picture 22" descr="mango_char.png"/>
+          <p:cNvPicPr>
+            <a:picLocks noChangeAspect="1"/>
+          </p:cNvPicPr>
+          <p:nvPr/>
+        </p:nvPicPr>
+        <p:blipFill>
+          <a:blip r:embed="rId2"/>
+          <a:stretch>
+            <a:fillRect/>
+          </a:stretch>
+        </p:blipFill>
+        <p:spPr>
+          <a:xfrm>
+            <a:off x="9153162" y="4480559"/>
+            <a:ext cx="2489892" cy="2011680"/>
+          </a:xfrm>
+          <a:prstGeom prst="rect">
+            <a:avLst/>
+          </a:prstGeom>
+        </p:spPr>
+      </p:pic>
+    </p:spTree>
+  </p:cSld>
+  <p:clrMapOvr>
+    <a:masterClrMapping/>
+  </p:clrMapOvr>
+</p:sld>
+</file>
+
+<file path=ppt/slides/slide47.xml><?xml version="1.0" encoding="utf-8"?>
+<p:sld xmlns:a="http://schemas.openxmlformats.org/drawingml/2006/main" xmlns:p="http://schemas.openxmlformats.org/presentationml/2006/main" xmlns:r="http://schemas.openxmlformats.org/officeDocument/2006/relationships">
+  <p:cSld>
+    <p:bg>
+      <p:bgPr>
+        <a:solidFill>
+          <a:srgbClr val="FFFFFF"/>
+        </a:solidFill>
+        <a:effectLst/>
+      </p:bgPr>
+    </p:bg>
+    <p:spTree>
+      <p:nvGrpSpPr>
+        <p:cNvPr id="1" name=""/>
+        <p:cNvGrpSpPr/>
+        <p:nvPr/>
+      </p:nvGrpSpPr>
+      <p:grpSpPr/>
+      <p:sp>
+        <p:nvSpPr>
+          <p:cNvPr id="2" name="Rectangle 1"/>
+          <p:cNvSpPr/>
+          <p:nvPr/>
+        </p:nvSpPr>
+        <p:spPr>
+          <a:xfrm>
+            <a:off x="0" y="0"/>
+            <a:ext cx="12191695" cy="566928"/>
+          </a:xfrm>
+          <a:prstGeom prst="rect">
+            <a:avLst/>
+          </a:prstGeom>
+          <a:solidFill>
+            <a:srgbClr val="4F46E5"/>
+          </a:solidFill>
+          <a:ln>
+            <a:noFill/>
+          </a:ln>
+          <a:effectLst/>
+        </p:spPr>
+        <p:style>
+          <a:lnRef idx="1">
+            <a:schemeClr val="accent1"/>
+          </a:lnRef>
+          <a:fillRef idx="3">
+            <a:schemeClr val="accent1"/>
+          </a:fillRef>
+          <a:effectRef idx="2">
+            <a:schemeClr val="accent1"/>
+          </a:effectRef>
+          <a:fontRef idx="minor">
+            <a:schemeClr val="lt1"/>
+          </a:fontRef>
+        </p:style>
+        <p:txBody>
+          <a:bodyPr rtlCol="0" anchor="ctr"/>
+          <a:lstStyle/>
+          <a:p>
+            <a:pPr algn="ctr"/>
+          </a:p>
+        </p:txBody>
+      </p:sp>
+      <p:sp>
+        <p:nvSpPr>
+          <p:cNvPr id="3" name="Rectangle 2"/>
+          <p:cNvSpPr/>
+          <p:nvPr/>
+        </p:nvSpPr>
+        <p:spPr>
+          <a:xfrm>
+            <a:off x="0" y="566928"/>
+            <a:ext cx="12191695" cy="54864"/>
+          </a:xfrm>
+          <a:prstGeom prst="rect">
+            <a:avLst/>
+          </a:prstGeom>
+          <a:solidFill>
+            <a:srgbClr val="FF9F1C"/>
+          </a:solidFill>
+          <a:ln>
+            <a:noFill/>
+          </a:ln>
+          <a:effectLst/>
+        </p:spPr>
+        <p:style>
+          <a:lnRef idx="1">
+            <a:schemeClr val="accent1"/>
+          </a:lnRef>
+          <a:fillRef idx="3">
+            <a:schemeClr val="accent1"/>
+          </a:fillRef>
+          <a:effectRef idx="2">
+            <a:schemeClr val="accent1"/>
+          </a:effectRef>
+          <a:fontRef idx="minor">
+            <a:schemeClr val="lt1"/>
+          </a:fontRef>
+        </p:style>
+        <p:txBody>
+          <a:bodyPr rtlCol="0" anchor="ctr"/>
+          <a:lstStyle/>
+          <a:p>
+            <a:pPr algn="ctr"/>
+          </a:p>
+        </p:txBody>
+      </p:sp>
+      <p:sp>
+        <p:nvSpPr>
+          <p:cNvPr id="4" name="TextBox 3"/>
+          <p:cNvSpPr txBox="1"/>
+          <p:nvPr/>
+        </p:nvSpPr>
+        <p:spPr>
+          <a:xfrm>
+            <a:off x="365760" y="27432"/>
+            <a:ext cx="7315200" cy="502920"/>
+          </a:xfrm>
+          <a:prstGeom prst="rect">
+            <a:avLst/>
+          </a:prstGeom>
+          <a:noFill/>
+        </p:spPr>
+        <p:txBody>
+          <a:bodyPr wrap="square" anchor="ctr">
+            <a:spAutoFit/>
+          </a:bodyPr>
+          <a:lstStyle/>
+          <a:p>
+            <a:pPr algn="l">
+              <a:lnSpc>
+                <a:spcPct val="100000"/>
+              </a:lnSpc>
+            </a:pPr>
+            <a:r>
+              <a:rPr sz="1500" b="1">
+                <a:solidFill>
+                  <a:srgbClr val="FFFFFF"/>
+                </a:solidFill>
+                <a:latin typeface="Malgun Gothic"/>
+              </a:rPr>
+              <a:t>🏫 망고아이 관리자용 사용설명서</a:t>
+            </a:r>
+          </a:p>
+        </p:txBody>
+      </p:sp>
+      <p:sp>
+        <p:nvSpPr>
+          <p:cNvPr id="5" name="TextBox 4"/>
+          <p:cNvSpPr txBox="1"/>
+          <p:nvPr/>
+        </p:nvSpPr>
+        <p:spPr>
+          <a:xfrm>
+            <a:off x="8168335" y="27432"/>
+            <a:ext cx="3657600" cy="502920"/>
+          </a:xfrm>
+          <a:prstGeom prst="rect">
+            <a:avLst/>
+          </a:prstGeom>
+          <a:noFill/>
+        </p:spPr>
+        <p:txBody>
+          <a:bodyPr wrap="square" anchor="ctr">
+            <a:spAutoFit/>
+          </a:bodyPr>
+          <a:lstStyle/>
+          <a:p>
+            <a:pPr algn="r">
+              <a:lnSpc>
+                <a:spcPct val="100000"/>
+              </a:lnSpc>
+            </a:pPr>
+            <a:r>
+              <a:rPr sz="1300" b="1">
+                <a:solidFill>
+                  <a:srgbClr val="F1F5F9"/>
+                </a:solidFill>
+                <a:latin typeface="Malgun Gothic"/>
+              </a:rPr>
+              <a:t>마무리</a:t>
+            </a:r>
+          </a:p>
+        </p:txBody>
+      </p:sp>
+      <p:sp>
+        <p:nvSpPr>
+          <p:cNvPr id="6" name="Rounded Rectangle 5"/>
+          <p:cNvSpPr/>
+          <p:nvPr/>
+        </p:nvSpPr>
+        <p:spPr>
+          <a:xfrm>
+            <a:off x="365760" y="841248"/>
+            <a:ext cx="658368" cy="512064"/>
+          </a:xfrm>
+          <a:prstGeom prst="roundRect">
+            <a:avLst/>
+          </a:prstGeom>
+          <a:solidFill>
+            <a:srgbClr val="4F46E5"/>
+          </a:solidFill>
+          <a:ln>
+            <a:noFill/>
+          </a:ln>
+          <a:effectLst/>
+        </p:spPr>
+        <p:style>
+          <a:lnRef idx="1">
+            <a:schemeClr val="accent1"/>
+          </a:lnRef>
+          <a:fillRef idx="3">
+            <a:schemeClr val="accent1"/>
+          </a:fillRef>
+          <a:effectRef idx="2">
+            <a:schemeClr val="accent1"/>
+          </a:effectRef>
+          <a:fontRef idx="minor">
+            <a:schemeClr val="lt1"/>
+          </a:fontRef>
+        </p:style>
+        <p:txBody>
+          <a:bodyPr rtlCol="0" anchor="ctr"/>
+          <a:lstStyle/>
+          <a:p>
+            <a:pPr algn="ctr"/>
+          </a:p>
+        </p:txBody>
+      </p:sp>
+      <p:sp>
+        <p:nvSpPr>
+          <p:cNvPr id="7" name="TextBox 6"/>
+          <p:cNvSpPr txBox="1"/>
+          <p:nvPr/>
+        </p:nvSpPr>
+        <p:spPr>
+          <a:xfrm>
+            <a:off x="365760" y="841248"/>
+            <a:ext cx="658368" cy="512064"/>
+          </a:xfrm>
+          <a:prstGeom prst="rect">
+            <a:avLst/>
+          </a:prstGeom>
+          <a:noFill/>
+        </p:spPr>
+        <p:txBody>
+          <a:bodyPr wrap="square" anchor="ctr">
+            <a:spAutoFit/>
+          </a:bodyPr>
+          <a:lstStyle/>
+          <a:p>
+            <a:pPr algn="ctr">
+              <a:lnSpc>
+                <a:spcPct val="100000"/>
+              </a:lnSpc>
+            </a:pPr>
+            <a:r>
+              <a:rPr sz="1700" b="1">
+                <a:solidFill>
+                  <a:srgbClr val="FFFFFF"/>
+                </a:solidFill>
+                <a:latin typeface="Malgun Gothic"/>
+              </a:rPr>
+              <a:t>43</a:t>
             </a:r>
           </a:p>
         </p:txBody>
@@ -47535,7 +49999,7 @@
 </p:sld>
 </file>
 
-<file path=ppt/slides/slide46.xml><?xml version="1.0" encoding="utf-8"?>
+<file path=ppt/slides/slide48.xml><?xml version="1.0" encoding="utf-8"?>
 <p:sld xmlns:a="http://schemas.openxmlformats.org/drawingml/2006/main" xmlns:p="http://schemas.openxmlformats.org/presentationml/2006/main" xmlns:r="http://schemas.openxmlformats.org/officeDocument/2006/relationships">
   <p:cSld>
     <p:bg>

--- a/cloudflare-deploy/public/library/admin/admin-kr.pptx
+++ b/cloudflare-deploy/public/library/admin/admin-kr.pptx
@@ -56,6 +56,13 @@
     <p:sldId id="304" r:id="rId55"/>
     <p:sldId id="305" r:id="rId56"/>
     <p:sldId id="306" r:id="rId57"/>
+    <p:sldId id="307" r:id="rId58"/>
+    <p:sldId id="308" r:id="rId59"/>
+    <p:sldId id="309" r:id="rId60"/>
+    <p:sldId id="310" r:id="rId61"/>
+    <p:sldId id="311" r:id="rId62"/>
+    <p:sldId id="312" r:id="rId63"/>
+    <p:sldId id="313" r:id="rId64"/>
   </p:sldIdLst>
   <p:sldSz cx="12191695" cy="6858000" type="screen4x3"/>
   <p:notesSz cx="6858000" cy="9144000"/>
@@ -3232,7 +3239,7 @@
                   <a:srgbClr val="F59E0B"/>
                 </a:solidFill>
               </a:rPr>
-              <a:t>2026-10-09 기준 · 최신 화면</a:t>
+              <a:t>2026-10-28 판 · 화면: 1~9장 2026-10-09 · 10장 2026-10-28</a:t>
             </a:r>
           </a:p>
         </p:txBody>
@@ -4738,6 +4745,14 @@
               <a:t>9. 결재 · 매일보고</a:t>
             </a:r>
           </a:p>
+          <a:p>
+            <a:pPr>
+              <a:defRPr sz="1600"/>
+            </a:pPr>
+            <a:r>
+              <a:t>10. AI 컨텐츠 결제 (대리점)</a:t>
+            </a:r>
+          </a:p>
         </p:txBody>
       </p:sp>
     </p:spTree>
@@ -6202,7 +6217,7 @@
               <a:defRPr sz="1600"/>
             </a:pPr>
             <a:r>
-              <a:t>• 캡처 속 학생·강사(Emma Kim, Teacher Anna …)와 숫자는 설명용 가짜 데이터입니다. 실제 화면에는 실제 이름과 숫자가 나옵니다.</a:t>
+              <a:t>• 캡처 속 학생·강사·학원(Emma Kim, Teacher Anna, 샘플영어학원, demo001 …)과 숫자는 설명용 가짜 데이터입니다. 실제 화면에는 실제 이름과 숫자가 나옵니다.</a:t>
             </a:r>
           </a:p>
           <a:p>
@@ -6210,7 +6225,7 @@
               <a:defRPr sz="1600"/>
             </a:pPr>
             <a:r>
-              <a:t>• 빨간 상자 = 누를 곳입니다.</a:t>
+              <a:t>• 빨간 상자 = 누를 곳입니다. 10장 그림의 번호(④⑤…)는 설명 글의 번호와 짝입니다.</a:t>
             </a:r>
           </a:p>
         </p:txBody>
@@ -9368,6 +9383,952 @@
             </a:pPr>
             <a:r>
               <a:t>• 근무일에 안 쓰면 다음 날 아침 본인과 대표에게 알림이 갑니다(공휴일 제외).</a:t>
+            </a:r>
+          </a:p>
+        </p:txBody>
+      </p:sp>
+    </p:spTree>
+  </p:cSld>
+  <p:clrMapOvr>
+    <a:masterClrMapping/>
+  </p:clrMapOvr>
+</p:sld>
+</file>
+
+<file path=ppt/slides/slide52.xml><?xml version="1.0" encoding="utf-8"?>
+<p:sld xmlns:a="http://schemas.openxmlformats.org/drawingml/2006/main" xmlns:p="http://schemas.openxmlformats.org/presentationml/2006/main" xmlns:r="http://schemas.openxmlformats.org/officeDocument/2006/relationships">
+  <p:cSld>
+    <p:spTree>
+      <p:nvGrpSpPr>
+        <p:cNvPr id="1" name=""/>
+        <p:cNvGrpSpPr/>
+        <p:nvPr/>
+      </p:nvGrpSpPr>
+      <p:grpSpPr/>
+      <p:sp>
+        <p:nvSpPr>
+          <p:cNvPr id="2" name="Rectangle 1"/>
+          <p:cNvSpPr/>
+          <p:nvPr/>
+        </p:nvSpPr>
+        <p:spPr>
+          <a:xfrm>
+            <a:off x="0" y="0"/>
+            <a:ext cx="12191695" cy="6858000"/>
+          </a:xfrm>
+          <a:prstGeom prst="rect">
+            <a:avLst/>
+          </a:prstGeom>
+          <a:solidFill>
+            <a:srgbClr val="FFF7ED"/>
+          </a:solidFill>
+          <a:ln>
+            <a:noFill/>
+          </a:ln>
+        </p:spPr>
+        <p:style>
+          <a:lnRef idx="1">
+            <a:schemeClr val="accent1"/>
+          </a:lnRef>
+          <a:fillRef idx="3">
+            <a:schemeClr val="accent1"/>
+          </a:fillRef>
+          <a:effectRef idx="2">
+            <a:schemeClr val="accent1"/>
+          </a:effectRef>
+          <a:fontRef idx="minor">
+            <a:schemeClr val="lt1"/>
+          </a:fontRef>
+        </p:style>
+        <p:txBody>
+          <a:bodyPr rtlCol="0" anchor="ctr"/>
+          <a:lstStyle/>
+          <a:p>
+            <a:pPr algn="ctr"/>
+          </a:p>
+        </p:txBody>
+      </p:sp>
+      <p:sp>
+        <p:nvSpPr>
+          <p:cNvPr id="3" name="TextBox 2"/>
+          <p:cNvSpPr txBox="1"/>
+          <p:nvPr/>
+        </p:nvSpPr>
+        <p:spPr>
+          <a:xfrm>
+            <a:off x="731520" y="2377440"/>
+            <a:ext cx="10698480" cy="1097280"/>
+          </a:xfrm>
+          <a:prstGeom prst="rect">
+            <a:avLst/>
+          </a:prstGeom>
+          <a:noFill/>
+        </p:spPr>
+        <p:txBody>
+          <a:bodyPr wrap="square">
+            <a:spAutoFit/>
+          </a:bodyPr>
+          <a:lstStyle/>
+          <a:p>
+            <a:r>
+              <a:rPr sz="3600" b="1">
+                <a:solidFill>
+                  <a:srgbClr val="111827"/>
+                </a:solidFill>
+              </a:rPr>
+              <a:t>10. AI 컨텐츠 결제 (대리점)</a:t>
+            </a:r>
+          </a:p>
+        </p:txBody>
+      </p:sp>
+      <p:sp>
+        <p:nvSpPr>
+          <p:cNvPr id="4" name="TextBox 3"/>
+          <p:cNvSpPr txBox="1"/>
+          <p:nvPr/>
+        </p:nvSpPr>
+        <p:spPr>
+          <a:xfrm>
+            <a:off x="731520" y="3474720"/>
+            <a:ext cx="10698480" cy="1280160"/>
+          </a:xfrm>
+          <a:prstGeom prst="rect">
+            <a:avLst/>
+          </a:prstGeom>
+          <a:noFill/>
+        </p:spPr>
+        <p:txBody>
+          <a:bodyPr wrap="square">
+            <a:spAutoFit/>
+          </a:bodyPr>
+          <a:lstStyle/>
+          <a:p>
+            <a:r>
+              <a:rPr sz="1800" b="0">
+                <a:solidFill>
+                  <a:srgbClr val="4B5563"/>
+                </a:solidFill>
+              </a:rPr>
+              <a:t>대리점(학원)이 다음 달에 A.i 를 쓸 학생을 골라 이번 달 말일까지 카드로 미리 냅니다. 결제는 대리점 계정만 합니다 — 본사 직원은 문의를 받을 때 이 흐름을 알아 두세요. 대리점에 보낼 4쪽 안내서는 자료실 «🤖 A.i 컨텐츠 결제 안내서» 입니다.</a:t>
+            </a:r>
+          </a:p>
+        </p:txBody>
+      </p:sp>
+    </p:spTree>
+  </p:cSld>
+  <p:clrMapOvr>
+    <a:masterClrMapping/>
+  </p:clrMapOvr>
+</p:sld>
+</file>
+
+<file path=ppt/slides/slide53.xml><?xml version="1.0" encoding="utf-8"?>
+<p:sld xmlns:a="http://schemas.openxmlformats.org/drawingml/2006/main" xmlns:p="http://schemas.openxmlformats.org/presentationml/2006/main" xmlns:r="http://schemas.openxmlformats.org/officeDocument/2006/relationships">
+  <p:cSld>
+    <p:spTree>
+      <p:nvGrpSpPr>
+        <p:cNvPr id="1" name=""/>
+        <p:cNvGrpSpPr/>
+        <p:nvPr/>
+      </p:nvGrpSpPr>
+      <p:grpSpPr/>
+      <p:sp>
+        <p:nvSpPr>
+          <p:cNvPr id="2" name="TextBox 1"/>
+          <p:cNvSpPr txBox="1"/>
+          <p:nvPr/>
+        </p:nvSpPr>
+        <p:spPr>
+          <a:xfrm>
+            <a:off x="365760" y="228600"/>
+            <a:ext cx="11430000" cy="640080"/>
+          </a:xfrm>
+          <a:prstGeom prst="rect">
+            <a:avLst/>
+          </a:prstGeom>
+          <a:noFill/>
+        </p:spPr>
+        <p:txBody>
+          <a:bodyPr wrap="square">
+            <a:spAutoFit/>
+          </a:bodyPr>
+          <a:lstStyle/>
+          <a:p>
+            <a:r>
+              <a:rPr sz="2200" b="1">
+                <a:solidFill>
+                  <a:srgbClr val="111827"/>
+                </a:solidFill>
+              </a:rPr>
+              <a:t>10. AI 컨텐츠 결제 (대리점) — 대리점 로그인 · 메뉴 열기</a:t>
+            </a:r>
+          </a:p>
+        </p:txBody>
+      </p:sp>
+      <p:pic>
+        <p:nvPicPr>
+          <p:cNvPr id="3" name="Picture 2" descr="ko-p2-menu.jpg"/>
+          <p:cNvPicPr>
+            <a:picLocks noChangeAspect="1"/>
+          </p:cNvPicPr>
+          <p:nvPr/>
+        </p:nvPicPr>
+        <p:blipFill>
+          <a:blip r:embed="rId2"/>
+          <a:stretch>
+            <a:fillRect/>
+          </a:stretch>
+        </p:blipFill>
+        <p:spPr>
+          <a:xfrm>
+            <a:off x="320040" y="960120"/>
+            <a:ext cx="7223760" cy="2670853"/>
+          </a:xfrm>
+          <a:prstGeom prst="rect">
+            <a:avLst/>
+          </a:prstGeom>
+        </p:spPr>
+      </p:pic>
+      <p:sp>
+        <p:nvSpPr>
+          <p:cNvPr id="4" name="TextBox 3"/>
+          <p:cNvSpPr txBox="1"/>
+          <p:nvPr/>
+        </p:nvSpPr>
+        <p:spPr>
+          <a:xfrm>
+            <a:off x="7772400" y="960120"/>
+            <a:ext cx="4114800" cy="5669280"/>
+          </a:xfrm>
+          <a:prstGeom prst="rect">
+            <a:avLst/>
+          </a:prstGeom>
+          <a:noFill/>
+        </p:spPr>
+        <p:txBody>
+          <a:bodyPr wrap="square">
+            <a:spAutoFit/>
+          </a:bodyPr>
+          <a:lstStyle/>
+          <a:p>
+            <a:pPr>
+              <a:spcAft>
+                <a:spcPts val="600"/>
+              </a:spcAft>
+              <a:defRPr sz="1400"/>
+            </a:pPr>
+            <a:r>
+              <a:t>• 대리점 아이디로 mangoi.ai/admin/login 에 로그인하면 대리점 화면이 열립니다.</a:t>
+            </a:r>
+          </a:p>
+          <a:p>
+            <a:pPr>
+              <a:spcAft>
+                <a:spcPts val="600"/>
+              </a:spcAft>
+              <a:defRPr sz="1400"/>
+            </a:pPr>
+            <a:r>
+              <a:t>• ④ 왼쪽 메뉴 정산통계관리 › 🤖 AI 컨텐츠 결제. 이 메뉴는 대리점 계정에만 보입니다(본사·지사 계정에는 없습니다).</a:t>
+            </a:r>
+          </a:p>
+          <a:p>
+            <a:pPr>
+              <a:spcAft>
+                <a:spcPts val="600"/>
+              </a:spcAft>
+              <a:defRPr sz="1400"/>
+            </a:pPr>
+            <a:r>
+              <a:t>• 본사는 정산·매출 › 🏢 AI 사용료(A.i 학습 사용료 관리)에서 학원별 인원·예상 청구액을 보고, 예외 단가를 정하고, 자동 청구 켜기/끄기를 합니다. 결제 버튼은 거기에 없습니다.</a:t>
+            </a:r>
+          </a:p>
+        </p:txBody>
+      </p:sp>
+    </p:spTree>
+  </p:cSld>
+  <p:clrMapOvr>
+    <a:masterClrMapping/>
+  </p:clrMapOvr>
+</p:sld>
+</file>
+
+<file path=ppt/slides/slide54.xml><?xml version="1.0" encoding="utf-8"?>
+<p:sld xmlns:a="http://schemas.openxmlformats.org/drawingml/2006/main" xmlns:p="http://schemas.openxmlformats.org/presentationml/2006/main" xmlns:r="http://schemas.openxmlformats.org/officeDocument/2006/relationships">
+  <p:cSld>
+    <p:spTree>
+      <p:nvGrpSpPr>
+        <p:cNvPr id="1" name=""/>
+        <p:cNvGrpSpPr/>
+        <p:nvPr/>
+      </p:nvGrpSpPr>
+      <p:grpSpPr/>
+      <p:sp>
+        <p:nvSpPr>
+          <p:cNvPr id="2" name="TextBox 1"/>
+          <p:cNvSpPr txBox="1"/>
+          <p:nvPr/>
+        </p:nvSpPr>
+        <p:spPr>
+          <a:xfrm>
+            <a:off x="365760" y="228600"/>
+            <a:ext cx="11430000" cy="640080"/>
+          </a:xfrm>
+          <a:prstGeom prst="rect">
+            <a:avLst/>
+          </a:prstGeom>
+          <a:noFill/>
+        </p:spPr>
+        <p:txBody>
+          <a:bodyPr wrap="square">
+            <a:spAutoFit/>
+          </a:bodyPr>
+          <a:lstStyle/>
+          <a:p>
+            <a:r>
+              <a:rPr sz="2200" b="1">
+                <a:solidFill>
+                  <a:srgbClr val="111827"/>
+                </a:solidFill>
+              </a:rPr>
+              <a:t>10. AI 컨텐츠 결제 (대리점) — 학생 명단 불러오기</a:t>
+            </a:r>
+          </a:p>
+        </p:txBody>
+      </p:sp>
+      <p:pic>
+        <p:nvPicPr>
+          <p:cNvPr id="3" name="Picture 2" descr="ko-p3-load.jpg"/>
+          <p:cNvPicPr>
+            <a:picLocks noChangeAspect="1"/>
+          </p:cNvPicPr>
+          <p:nvPr/>
+        </p:nvPicPr>
+        <p:blipFill>
+          <a:blip r:embed="rId2"/>
+          <a:stretch>
+            <a:fillRect/>
+          </a:stretch>
+        </p:blipFill>
+        <p:spPr>
+          <a:xfrm>
+            <a:off x="320040" y="960120"/>
+            <a:ext cx="7223760" cy="3840195"/>
+          </a:xfrm>
+          <a:prstGeom prst="rect">
+            <a:avLst/>
+          </a:prstGeom>
+        </p:spPr>
+      </p:pic>
+      <p:sp>
+        <p:nvSpPr>
+          <p:cNvPr id="4" name="TextBox 3"/>
+          <p:cNvSpPr txBox="1"/>
+          <p:nvPr/>
+        </p:nvSpPr>
+        <p:spPr>
+          <a:xfrm>
+            <a:off x="7772400" y="960120"/>
+            <a:ext cx="4114800" cy="5669280"/>
+          </a:xfrm>
+          <a:prstGeom prst="rect">
+            <a:avLst/>
+          </a:prstGeom>
+          <a:noFill/>
+        </p:spPr>
+        <p:txBody>
+          <a:bodyPr wrap="square">
+            <a:spAutoFit/>
+          </a:bodyPr>
+          <a:lstStyle/>
+          <a:p>
+            <a:pPr>
+              <a:spcAft>
+                <a:spcPts val="600"/>
+              </a:spcAft>
+              <a:defRPr sz="1400"/>
+            </a:pPr>
+            <a:r>
+              <a:t>• 위의 결제 마감(이번 달 말일 · D-남은 날)을 확인합니다. 결제하는 것은 다음 달 이용분입니다.</a:t>
+            </a:r>
+          </a:p>
+          <a:p>
+            <a:pPr>
+              <a:spcAft>
+                <a:spcPts val="600"/>
+              </a:spcAft>
+              <a:defRPr sz="1400"/>
+            </a:pPr>
+            <a:r>
+              <a:t>• 숫자 칸: A.i 이용 신청(결제 대상) · 아직 신청 안 함 · 화상영어(포함) — 화상영어 학생은 수업료에 A.i 가 포함돼 여기서 결제하지 않습니다.</a:t>
+            </a:r>
+          </a:p>
+          <a:p>
+            <a:pPr>
+              <a:spcAft>
+                <a:spcPts val="600"/>
+              </a:spcAft>
+              <a:defRPr sz="1400"/>
+            </a:pPr>
+            <a:r>
+              <a:t>• ⑤ 우리 학원 학생 불러와서 고르기는 명단만 불러옵니다. 이때는 아무것도 결제되지 않습니다.</a:t>
+            </a:r>
+          </a:p>
+          <a:p>
+            <a:pPr>
+              <a:spcAft>
+                <a:spcPts val="600"/>
+              </a:spcAft>
+              <a:defRPr sz="1400"/>
+            </a:pPr>
+            <a:r>
+              <a:t>• 본사가 자동 청구를 아직 켜지 않았으면 «본사가 아직 A.i 컨텐츠 결제를 열지 않았습니다(테스트 기간)» 만 보입니다 — 고장이 아닙니다.</a:t>
+            </a:r>
+          </a:p>
+        </p:txBody>
+      </p:sp>
+    </p:spTree>
+  </p:cSld>
+  <p:clrMapOvr>
+    <a:masterClrMapping/>
+  </p:clrMapOvr>
+</p:sld>
+</file>
+
+<file path=ppt/slides/slide55.xml><?xml version="1.0" encoding="utf-8"?>
+<p:sld xmlns:a="http://schemas.openxmlformats.org/drawingml/2006/main" xmlns:p="http://schemas.openxmlformats.org/presentationml/2006/main" xmlns:r="http://schemas.openxmlformats.org/officeDocument/2006/relationships">
+  <p:cSld>
+    <p:spTree>
+      <p:nvGrpSpPr>
+        <p:cNvPr id="1" name=""/>
+        <p:cNvGrpSpPr/>
+        <p:nvPr/>
+      </p:nvGrpSpPr>
+      <p:grpSpPr/>
+      <p:sp>
+        <p:nvSpPr>
+          <p:cNvPr id="2" name="TextBox 1"/>
+          <p:cNvSpPr txBox="1"/>
+          <p:nvPr/>
+        </p:nvSpPr>
+        <p:spPr>
+          <a:xfrm>
+            <a:off x="365760" y="228600"/>
+            <a:ext cx="11430000" cy="640080"/>
+          </a:xfrm>
+          <a:prstGeom prst="rect">
+            <a:avLst/>
+          </a:prstGeom>
+          <a:noFill/>
+        </p:spPr>
+        <p:txBody>
+          <a:bodyPr wrap="square">
+            <a:spAutoFit/>
+          </a:bodyPr>
+          <a:lstStyle/>
+          <a:p>
+            <a:r>
+              <a:rPr sz="2200" b="1">
+                <a:solidFill>
+                  <a:srgbClr val="111827"/>
+                </a:solidFill>
+              </a:rPr>
+              <a:t>10. AI 컨텐츠 결제 (대리점) — 다음 달에 쓸 학생 고르기</a:t>
+            </a:r>
+          </a:p>
+        </p:txBody>
+      </p:sp>
+      <p:pic>
+        <p:nvPicPr>
+          <p:cNvPr id="3" name="Picture 2" descr="ko-p4-check.jpg"/>
+          <p:cNvPicPr>
+            <a:picLocks noChangeAspect="1"/>
+          </p:cNvPicPr>
+          <p:nvPr/>
+        </p:nvPicPr>
+        <p:blipFill>
+          <a:blip r:embed="rId2"/>
+          <a:stretch>
+            <a:fillRect/>
+          </a:stretch>
+        </p:blipFill>
+        <p:spPr>
+          <a:xfrm>
+            <a:off x="320040" y="960120"/>
+            <a:ext cx="7223760" cy="3284926"/>
+          </a:xfrm>
+          <a:prstGeom prst="rect">
+            <a:avLst/>
+          </a:prstGeom>
+        </p:spPr>
+      </p:pic>
+      <p:sp>
+        <p:nvSpPr>
+          <p:cNvPr id="4" name="TextBox 3"/>
+          <p:cNvSpPr txBox="1"/>
+          <p:nvPr/>
+        </p:nvSpPr>
+        <p:spPr>
+          <a:xfrm>
+            <a:off x="7772400" y="960120"/>
+            <a:ext cx="4114800" cy="5669280"/>
+          </a:xfrm>
+          <a:prstGeom prst="rect">
+            <a:avLst/>
+          </a:prstGeom>
+          <a:noFill/>
+        </p:spPr>
+        <p:txBody>
+          <a:bodyPr wrap="square">
+            <a:spAutoFit/>
+          </a:bodyPr>
+          <a:lstStyle/>
+          <a:p>
+            <a:pPr>
+              <a:spcAft>
+                <a:spcPts val="600"/>
+              </a:spcAft>
+              <a:defRPr sz="1400"/>
+            </a:pPr>
+            <a:r>
+              <a:t>• ⑥ 결제 대상에 체크된 학생만 결제됩니다. 그만둔 학생은 체크를 풀면 결제 전에 빠집니다.</a:t>
+            </a:r>
+          </a:p>
+          <a:p>
+            <a:pPr>
+              <a:spcAft>
+                <a:spcPts val="600"/>
+              </a:spcAft>
+              <a:defRPr sz="1400"/>
+            </a:pPr>
+            <a:r>
+              <a:t>• 이름·아이디로 찾을 수 있고, 보이는 학생 모두 빼기 / 모두 선택으로 한 번에 바꿉니다(몇 명이 바뀌는지 먼저 묻습니다).</a:t>
+            </a:r>
+          </a:p>
+          <a:p>
+            <a:pPr>
+              <a:spcAft>
+                <a:spcPts val="600"/>
+              </a:spcAft>
+              <a:defRPr sz="1400"/>
+            </a:pPr>
+            <a:r>
+              <a:t>• 체크를 바꿀 때마다 금액은 서버가 다시 계산합니다.</a:t>
+            </a:r>
+          </a:p>
+        </p:txBody>
+      </p:sp>
+    </p:spTree>
+  </p:cSld>
+  <p:clrMapOvr>
+    <a:masterClrMapping/>
+  </p:clrMapOvr>
+</p:sld>
+</file>
+
+<file path=ppt/slides/slide56.xml><?xml version="1.0" encoding="utf-8"?>
+<p:sld xmlns:a="http://schemas.openxmlformats.org/drawingml/2006/main" xmlns:p="http://schemas.openxmlformats.org/presentationml/2006/main" xmlns:r="http://schemas.openxmlformats.org/officeDocument/2006/relationships">
+  <p:cSld>
+    <p:spTree>
+      <p:nvGrpSpPr>
+        <p:cNvPr id="1" name=""/>
+        <p:cNvGrpSpPr/>
+        <p:nvPr/>
+      </p:nvGrpSpPr>
+      <p:grpSpPr/>
+      <p:sp>
+        <p:nvSpPr>
+          <p:cNvPr id="2" name="TextBox 1"/>
+          <p:cNvSpPr txBox="1"/>
+          <p:nvPr/>
+        </p:nvSpPr>
+        <p:spPr>
+          <a:xfrm>
+            <a:off x="365760" y="228600"/>
+            <a:ext cx="11430000" cy="640080"/>
+          </a:xfrm>
+          <a:prstGeom prst="rect">
+            <a:avLst/>
+          </a:prstGeom>
+          <a:noFill/>
+        </p:spPr>
+        <p:txBody>
+          <a:bodyPr wrap="square">
+            <a:spAutoFit/>
+          </a:bodyPr>
+          <a:lstStyle/>
+          <a:p>
+            <a:r>
+              <a:rPr sz="2200" b="1">
+                <a:solidFill>
+                  <a:srgbClr val="111827"/>
+                </a:solidFill>
+              </a:rPr>
+              <a:t>10. AI 컨텐츠 결제 (대리점) — 아직 신청 안 한 학생 · 화상영어 학생</a:t>
+            </a:r>
+          </a:p>
+        </p:txBody>
+      </p:sp>
+      <p:pic>
+        <p:nvPicPr>
+          <p:cNvPr id="3" name="Picture 2" descr="ko-p4-notyet.jpg"/>
+          <p:cNvPicPr>
+            <a:picLocks noChangeAspect="1"/>
+          </p:cNvPicPr>
+          <p:nvPr/>
+        </p:nvPicPr>
+        <p:blipFill>
+          <a:blip r:embed="rId2"/>
+          <a:stretch>
+            <a:fillRect/>
+          </a:stretch>
+        </p:blipFill>
+        <p:spPr>
+          <a:xfrm>
+            <a:off x="320040" y="960120"/>
+            <a:ext cx="7223760" cy="1845987"/>
+          </a:xfrm>
+          <a:prstGeom prst="rect">
+            <a:avLst/>
+          </a:prstGeom>
+        </p:spPr>
+      </p:pic>
+      <p:sp>
+        <p:nvSpPr>
+          <p:cNvPr id="4" name="TextBox 3"/>
+          <p:cNvSpPr txBox="1"/>
+          <p:nvPr/>
+        </p:nvSpPr>
+        <p:spPr>
+          <a:xfrm>
+            <a:off x="7772400" y="960120"/>
+            <a:ext cx="4114799" cy="5669280"/>
+          </a:xfrm>
+          <a:prstGeom prst="rect">
+            <a:avLst/>
+          </a:prstGeom>
+          <a:noFill/>
+        </p:spPr>
+        <p:txBody>
+          <a:bodyPr wrap="square">
+            <a:spAutoFit/>
+          </a:bodyPr>
+          <a:lstStyle/>
+          <a:p>
+            <a:pPr>
+              <a:spcAft>
+                <a:spcPts val="600"/>
+              </a:spcAft>
+              <a:defRPr sz="1400"/>
+            </a:pPr>
+            <a:r>
+              <a:t>• ⑦ 아직 신청 안 한 학생 중 다음 달에 쓸 학생을 체크하면 결제 대상에 들어갑니다.</a:t>
+            </a:r>
+          </a:p>
+          <a:p>
+            <a:pPr>
+              <a:spcAft>
+                <a:spcPts val="600"/>
+              </a:spcAft>
+              <a:defRPr sz="1400"/>
+            </a:pPr>
+            <a:r>
+              <a:t>• 📹 화상영어 수업 학생은 접혀 있습니다. A.i 가 수업료에 포함돼 고르지 않습니다 — 판정이 틀린 학생만 체크합니다.</a:t>
+            </a:r>
+          </a:p>
+          <a:p>
+            <a:pPr>
+              <a:spcAft>
+                <a:spcPts val="600"/>
+              </a:spcAft>
+              <a:defRPr sz="1400"/>
+            </a:pPr>
+            <a:r>
+              <a:t>• 학원이 직접 바꾼 학생에는 «✔ 학원 확인» 표시가 붙고, 그 뒤로는 자동 분류가 바꾸지 않습니다.</a:t>
+            </a:r>
+          </a:p>
+        </p:txBody>
+      </p:sp>
+    </p:spTree>
+  </p:cSld>
+  <p:clrMapOvr>
+    <a:masterClrMapping/>
+  </p:clrMapOvr>
+</p:sld>
+</file>
+
+<file path=ppt/slides/slide57.xml><?xml version="1.0" encoding="utf-8"?>
+<p:sld xmlns:a="http://schemas.openxmlformats.org/drawingml/2006/main" xmlns:p="http://schemas.openxmlformats.org/presentationml/2006/main" xmlns:r="http://schemas.openxmlformats.org/officeDocument/2006/relationships">
+  <p:cSld>
+    <p:spTree>
+      <p:nvGrpSpPr>
+        <p:cNvPr id="1" name=""/>
+        <p:cNvGrpSpPr/>
+        <p:nvPr/>
+      </p:nvGrpSpPr>
+      <p:grpSpPr/>
+      <p:sp>
+        <p:nvSpPr>
+          <p:cNvPr id="2" name="TextBox 1"/>
+          <p:cNvSpPr txBox="1"/>
+          <p:nvPr/>
+        </p:nvSpPr>
+        <p:spPr>
+          <a:xfrm>
+            <a:off x="365760" y="228600"/>
+            <a:ext cx="11430000" cy="640080"/>
+          </a:xfrm>
+          <a:prstGeom prst="rect">
+            <a:avLst/>
+          </a:prstGeom>
+          <a:noFill/>
+        </p:spPr>
+        <p:txBody>
+          <a:bodyPr wrap="square">
+            <a:spAutoFit/>
+          </a:bodyPr>
+          <a:lstStyle/>
+          <a:p>
+            <a:r>
+              <a:rPr sz="2200" b="1">
+                <a:solidFill>
+                  <a:srgbClr val="111827"/>
+                </a:solidFill>
+              </a:rPr>
+              <a:t>10. AI 컨텐츠 결제 (대리점) — 금액 확인 · 카드 결제</a:t>
+            </a:r>
+          </a:p>
+        </p:txBody>
+      </p:sp>
+      <p:pic>
+        <p:nvPicPr>
+          <p:cNvPr id="3" name="Picture 2" descr="ko-p5-pay.jpg"/>
+          <p:cNvPicPr>
+            <a:picLocks noChangeAspect="1"/>
+          </p:cNvPicPr>
+          <p:nvPr/>
+        </p:nvPicPr>
+        <p:blipFill>
+          <a:blip r:embed="rId2"/>
+          <a:stretch>
+            <a:fillRect/>
+          </a:stretch>
+        </p:blipFill>
+        <p:spPr>
+          <a:xfrm>
+            <a:off x="320040" y="960120"/>
+            <a:ext cx="7223760" cy="3229890"/>
+          </a:xfrm>
+          <a:prstGeom prst="rect">
+            <a:avLst/>
+          </a:prstGeom>
+        </p:spPr>
+      </p:pic>
+      <p:sp>
+        <p:nvSpPr>
+          <p:cNvPr id="4" name="TextBox 3"/>
+          <p:cNvSpPr txBox="1"/>
+          <p:nvPr/>
+        </p:nvSpPr>
+        <p:spPr>
+          <a:xfrm>
+            <a:off x="7772400" y="960120"/>
+            <a:ext cx="4114800" cy="5669280"/>
+          </a:xfrm>
+          <a:prstGeom prst="rect">
+            <a:avLst/>
+          </a:prstGeom>
+          <a:noFill/>
+        </p:spPr>
+        <p:txBody>
+          <a:bodyPr wrap="square">
+            <a:spAutoFit/>
+          </a:bodyPr>
+          <a:lstStyle/>
+          <a:p>
+            <a:pPr>
+              <a:spcAft>
+                <a:spcPts val="600"/>
+              </a:spcAft>
+              <a:defRPr sz="1400"/>
+            </a:pPr>
+            <a:r>
+              <a:t>• ⑧ 합계 인원·금액을 확인하고 ⑨ OOO원 결제하기 → 확인창 → 토스 카드 결제창에서 결제합니다.</a:t>
+            </a:r>
+          </a:p>
+          <a:p>
+            <a:pPr>
+              <a:spcAft>
+                <a:spcPts val="600"/>
+              </a:spcAft>
+              <a:defRPr sz="1400"/>
+            </a:pPr>
+            <a:r>
+              <a:t>• 1명 단가(한 달): 20명 이하 7,500원 · 21~50명 6,500원 · 51~70명 5,500원 · 71명 이상 4,500원. 최소 청구는 없습니다(2026-10-26부터).</a:t>
+            </a:r>
+          </a:p>
+          <a:p>
+            <a:pPr>
+              <a:spcAft>
+                <a:spcPts val="600"/>
+              </a:spcAft>
+              <a:defRPr sz="1400"/>
+            </a:pPr>
+            <a:r>
+              <a:t>• 인원이 늘어도 총액은 줄지 않게 계산됩니다(예: 21~23명은 150,000원). 금액은 결제하는 순간 서버가 다시 계산합니다 — 화면 숫자는 표시용입니다. 본사가 «예외 단가»를 정한 학원은 그 단가 × 인원입니다.</a:t>
+            </a:r>
+          </a:p>
+          <a:p>
+            <a:pPr>
+              <a:spcAft>
+                <a:spcPts val="600"/>
+              </a:spcAft>
+              <a:defRPr sz="1400"/>
+            </a:pPr>
+            <a:r>
+              <a:t>• 시연 계정(testagency)은 결제창이 열리지 않습니다(예시 데이터).</a:t>
+            </a:r>
+          </a:p>
+        </p:txBody>
+      </p:sp>
+    </p:spTree>
+  </p:cSld>
+  <p:clrMapOvr>
+    <a:masterClrMapping/>
+  </p:clrMapOvr>
+</p:sld>
+</file>
+
+<file path=ppt/slides/slide58.xml><?xml version="1.0" encoding="utf-8"?>
+<p:sld xmlns:a="http://schemas.openxmlformats.org/drawingml/2006/main" xmlns:p="http://schemas.openxmlformats.org/presentationml/2006/main" xmlns:r="http://schemas.openxmlformats.org/officeDocument/2006/relationships">
+  <p:cSld>
+    <p:spTree>
+      <p:nvGrpSpPr>
+        <p:cNvPr id="1" name=""/>
+        <p:cNvGrpSpPr/>
+        <p:nvPr/>
+      </p:nvGrpSpPr>
+      <p:grpSpPr/>
+      <p:sp>
+        <p:nvSpPr>
+          <p:cNvPr id="2" name="TextBox 1"/>
+          <p:cNvSpPr txBox="1"/>
+          <p:nvPr/>
+        </p:nvSpPr>
+        <p:spPr>
+          <a:xfrm>
+            <a:off x="365760" y="228600"/>
+            <a:ext cx="11430000" cy="640080"/>
+          </a:xfrm>
+          <a:prstGeom prst="rect">
+            <a:avLst/>
+          </a:prstGeom>
+          <a:noFill/>
+        </p:spPr>
+        <p:txBody>
+          <a:bodyPr wrap="square">
+            <a:spAutoFit/>
+          </a:bodyPr>
+          <a:lstStyle/>
+          <a:p>
+            <a:r>
+              <a:rPr sz="2200" b="1">
+                <a:solidFill>
+                  <a:srgbClr val="111827"/>
+                </a:solidFill>
+              </a:rPr>
+              <a:t>10. AI 컨텐츠 결제 (대리점) — 결제 확인 · 추가 결제</a:t>
+            </a:r>
+          </a:p>
+        </p:txBody>
+      </p:sp>
+      <p:pic>
+        <p:nvPicPr>
+          <p:cNvPr id="3" name="Picture 2" descr="ko-p6-done.jpg"/>
+          <p:cNvPicPr>
+            <a:picLocks noChangeAspect="1"/>
+          </p:cNvPicPr>
+          <p:nvPr/>
+        </p:nvPicPr>
+        <p:blipFill>
+          <a:blip r:embed="rId2"/>
+          <a:stretch>
+            <a:fillRect/>
+          </a:stretch>
+        </p:blipFill>
+        <p:spPr>
+          <a:xfrm>
+            <a:off x="320040" y="960120"/>
+            <a:ext cx="7223760" cy="1011477"/>
+          </a:xfrm>
+          <a:prstGeom prst="rect">
+            <a:avLst/>
+          </a:prstGeom>
+        </p:spPr>
+      </p:pic>
+      <p:sp>
+        <p:nvSpPr>
+          <p:cNvPr id="4" name="TextBox 3"/>
+          <p:cNvSpPr txBox="1"/>
+          <p:nvPr/>
+        </p:nvSpPr>
+        <p:spPr>
+          <a:xfrm>
+            <a:off x="7772400" y="960120"/>
+            <a:ext cx="4114800" cy="5669280"/>
+          </a:xfrm>
+          <a:prstGeom prst="rect">
+            <a:avLst/>
+          </a:prstGeom>
+          <a:noFill/>
+        </p:spPr>
+        <p:txBody>
+          <a:bodyPr wrap="square">
+            <a:spAutoFit/>
+          </a:bodyPr>
+          <a:lstStyle/>
+          <a:p>
+            <a:pPr>
+              <a:spcAft>
+                <a:spcPts val="600"/>
+              </a:spcAft>
+              <a:defRPr sz="1400"/>
+            </a:pPr>
+            <a:r>
+              <a:t>• ⑩ 지난 결제에 ✅ 가 있으면 결제 완료입니다. 결제가 끝나면 «결제가 완료됐습니다» 가 뜨고 낸 학생은 위에 고정됩니다.</a:t>
+            </a:r>
+          </a:p>
+          <a:p>
+            <a:pPr>
+              <a:spcAft>
+                <a:spcPts val="600"/>
+              </a:spcAft>
+              <a:defRPr sz="1400"/>
+            </a:pPr>
+            <a:r>
+              <a:t>• 같은 달에 학생을 더 넣으면 아래에서 체크하고 추가 결제 — 늘어난 학생 몫만 냅니다.</a:t>
+            </a:r>
+          </a:p>
+          <a:p>
+            <a:pPr>
+              <a:spcAft>
+                <a:spcPts val="600"/>
+              </a:spcAft>
+              <a:defRPr sz="1400"/>
+            </a:pPr>
+            <a:r>
+              <a:t>• 이미 결제한 학생은 화면에서 빼거나 바꿀 수 없습니다. 환불은 본사가 처리합니다.</a:t>
+            </a:r>
+          </a:p>
+          <a:p>
+            <a:pPr>
+              <a:spcAft>
+                <a:spcPts val="600"/>
+              </a:spcAft>
+              <a:defRPr sz="1400"/>
+            </a:pPr>
+            <a:r>
+              <a:t>• 아직 안 낸 지난 달이 있으면 맨 위에 «⚠️ 아직 결제하지 않은 달이 있습니다» 버튼이 나옵니다.</a:t>
             </a:r>
           </a:p>
         </p:txBody>
